--- a/kawase/LED_delay_measure/jitter_analysis.pptx
+++ b/kawase/LED_delay_measure/jitter_analysis.pptx
@@ -5,12 +5,13 @@
     <p:sldMasterId id="2147483648" r:id="rId1"/>
   </p:sldMasterIdLst>
   <p:sldIdLst>
-    <p:sldId id="256" r:id="rId7"/>
-    <p:sldId id="257" r:id="rId8"/>
-    <p:sldId id="258" r:id="rId9"/>
-    <p:sldId id="259" r:id="rId10"/>
+    <p:sldId id="256" r:id="rId2"/>
+    <p:sldId id="257" r:id="rId3"/>
+    <p:sldId id="258" r:id="rId4"/>
+    <p:sldId id="259" r:id="rId5"/>
+    <p:sldId id="260" r:id="rId6"/>
   </p:sldIdLst>
-  <p:sldSz cx="12191695" cy="6858000" type="screen4x3"/>
+  <p:sldSz cx="12192000" cy="6858000"/>
   <p:notesSz cx="6858000" cy="9144000"/>
   <p:defaultTextStyle>
     <a:defPPr>
@@ -107,6 +108,22 @@
       </a:defRPr>
     </a:lvl9pPr>
   </p:defaultTextStyle>
+  <p:extLst>
+    <p:ext uri="{EFAFB233-063F-42B5-8137-9DF3F51BA10A}">
+      <p15:sldGuideLst xmlns:p15="http://schemas.microsoft.com/office/powerpoint/2012/main">
+        <p15:guide id="1" orient="horz" pos="2160">
+          <p15:clr>
+            <a:srgbClr val="A4A3A4"/>
+          </p15:clr>
+        </p15:guide>
+        <p15:guide id="2" pos="2880">
+          <p15:clr>
+            <a:srgbClr val="A4A3A4"/>
+          </p15:clr>
+        </p15:guide>
+      </p15:sldGuideLst>
+    </p:ext>
+  </p:extLst>
 </p:presentation>
 </file>
 
@@ -148,10 +165,9 @@
           <a:lstStyle/>
           <a:p>
             <a:r>
-              <a:rPr lang="en-US" smtClean="0"/>
+              <a:rPr lang="en-US"/>
               <a:t>Click to edit Master title style</a:t>
             </a:r>
-            <a:endParaRPr lang="en-US"/>
           </a:p>
         </p:txBody>
       </p:sp>
@@ -267,10 +283,9 @@
           </a:lstStyle>
           <a:p>
             <a:r>
-              <a:rPr lang="en-US" smtClean="0"/>
+              <a:rPr lang="en-US"/>
               <a:t>Click to edit Master subtitle style</a:t>
             </a:r>
-            <a:endParaRPr lang="en-US"/>
           </a:p>
         </p:txBody>
       </p:sp>
@@ -291,7 +306,7 @@
           <a:p>
             <a:fld id="{5BCAD085-E8A6-8845-BD4E-CB4CCA059FC4}" type="datetimeFigureOut">
               <a:rPr lang="en-US" smtClean="0"/>
-              <a:t>1/27/13</a:t>
+              <a:t>7/8/26</a:t>
             </a:fld>
             <a:endParaRPr lang="en-US"/>
           </a:p>
@@ -385,10 +400,9 @@
           <a:lstStyle/>
           <a:p>
             <a:r>
-              <a:rPr lang="en-US" smtClean="0"/>
+              <a:rPr lang="en-US"/>
               <a:t>Click to edit Master title style</a:t>
             </a:r>
-            <a:endParaRPr lang="en-US"/>
           </a:p>
         </p:txBody>
       </p:sp>
@@ -409,38 +423,37 @@
           <a:p>
             <a:pPr lvl="0"/>
             <a:r>
-              <a:rPr lang="en-US" smtClean="0"/>
+              <a:rPr lang="en-US"/>
               <a:t>Click to edit Master text styles</a:t>
             </a:r>
           </a:p>
           <a:p>
             <a:pPr lvl="1"/>
             <a:r>
-              <a:rPr lang="en-US" smtClean="0"/>
+              <a:rPr lang="en-US"/>
               <a:t>Second level</a:t>
             </a:r>
           </a:p>
           <a:p>
             <a:pPr lvl="2"/>
             <a:r>
-              <a:rPr lang="en-US" smtClean="0"/>
+              <a:rPr lang="en-US"/>
               <a:t>Third level</a:t>
             </a:r>
           </a:p>
           <a:p>
             <a:pPr lvl="3"/>
             <a:r>
-              <a:rPr lang="en-US" smtClean="0"/>
+              <a:rPr lang="en-US"/>
               <a:t>Fourth level</a:t>
             </a:r>
           </a:p>
           <a:p>
             <a:pPr lvl="4"/>
             <a:r>
-              <a:rPr lang="en-US" smtClean="0"/>
+              <a:rPr lang="en-US"/>
               <a:t>Fifth level</a:t>
             </a:r>
-            <a:endParaRPr lang="en-US"/>
           </a:p>
         </p:txBody>
       </p:sp>
@@ -461,7 +474,7 @@
           <a:p>
             <a:fld id="{5BCAD085-E8A6-8845-BD4E-CB4CCA059FC4}" type="datetimeFigureOut">
               <a:rPr lang="en-US" smtClean="0"/>
-              <a:t>1/27/13</a:t>
+              <a:t>7/8/26</a:t>
             </a:fld>
             <a:endParaRPr lang="en-US"/>
           </a:p>
@@ -560,10 +573,9 @@
           <a:lstStyle/>
           <a:p>
             <a:r>
-              <a:rPr lang="en-US" smtClean="0"/>
+              <a:rPr lang="en-US"/>
               <a:t>Click to edit Master title style</a:t>
             </a:r>
-            <a:endParaRPr lang="en-US"/>
           </a:p>
         </p:txBody>
       </p:sp>
@@ -589,38 +601,37 @@
           <a:p>
             <a:pPr lvl="0"/>
             <a:r>
-              <a:rPr lang="en-US" smtClean="0"/>
+              <a:rPr lang="en-US"/>
               <a:t>Click to edit Master text styles</a:t>
             </a:r>
           </a:p>
           <a:p>
             <a:pPr lvl="1"/>
             <a:r>
-              <a:rPr lang="en-US" smtClean="0"/>
+              <a:rPr lang="en-US"/>
               <a:t>Second level</a:t>
             </a:r>
           </a:p>
           <a:p>
             <a:pPr lvl="2"/>
             <a:r>
-              <a:rPr lang="en-US" smtClean="0"/>
+              <a:rPr lang="en-US"/>
               <a:t>Third level</a:t>
             </a:r>
           </a:p>
           <a:p>
             <a:pPr lvl="3"/>
             <a:r>
-              <a:rPr lang="en-US" smtClean="0"/>
+              <a:rPr lang="en-US"/>
               <a:t>Fourth level</a:t>
             </a:r>
           </a:p>
           <a:p>
             <a:pPr lvl="4"/>
             <a:r>
-              <a:rPr lang="en-US" smtClean="0"/>
+              <a:rPr lang="en-US"/>
               <a:t>Fifth level</a:t>
             </a:r>
-            <a:endParaRPr lang="en-US"/>
           </a:p>
         </p:txBody>
       </p:sp>
@@ -641,7 +652,7 @@
           <a:p>
             <a:fld id="{5BCAD085-E8A6-8845-BD4E-CB4CCA059FC4}" type="datetimeFigureOut">
               <a:rPr lang="en-US" smtClean="0"/>
-              <a:t>1/27/13</a:t>
+              <a:t>7/8/26</a:t>
             </a:fld>
             <a:endParaRPr lang="en-US"/>
           </a:p>
@@ -735,10 +746,9 @@
           <a:lstStyle/>
           <a:p>
             <a:r>
-              <a:rPr lang="en-US" smtClean="0"/>
+              <a:rPr lang="en-US"/>
               <a:t>Click to edit Master title style</a:t>
             </a:r>
-            <a:endParaRPr lang="en-US"/>
           </a:p>
         </p:txBody>
       </p:sp>
@@ -759,38 +769,37 @@
           <a:p>
             <a:pPr lvl="0"/>
             <a:r>
-              <a:rPr lang="en-US" smtClean="0"/>
+              <a:rPr lang="en-US"/>
               <a:t>Click to edit Master text styles</a:t>
             </a:r>
           </a:p>
           <a:p>
             <a:pPr lvl="1"/>
             <a:r>
-              <a:rPr lang="en-US" smtClean="0"/>
+              <a:rPr lang="en-US"/>
               <a:t>Second level</a:t>
             </a:r>
           </a:p>
           <a:p>
             <a:pPr lvl="2"/>
             <a:r>
-              <a:rPr lang="en-US" smtClean="0"/>
+              <a:rPr lang="en-US"/>
               <a:t>Third level</a:t>
             </a:r>
           </a:p>
           <a:p>
             <a:pPr lvl="3"/>
             <a:r>
-              <a:rPr lang="en-US" smtClean="0"/>
+              <a:rPr lang="en-US"/>
               <a:t>Fourth level</a:t>
             </a:r>
           </a:p>
           <a:p>
             <a:pPr lvl="4"/>
             <a:r>
-              <a:rPr lang="en-US" smtClean="0"/>
+              <a:rPr lang="en-US"/>
               <a:t>Fifth level</a:t>
             </a:r>
-            <a:endParaRPr lang="en-US"/>
           </a:p>
         </p:txBody>
       </p:sp>
@@ -811,7 +820,7 @@
           <a:p>
             <a:fld id="{5BCAD085-E8A6-8845-BD4E-CB4CCA059FC4}" type="datetimeFigureOut">
               <a:rPr lang="en-US" smtClean="0"/>
-              <a:t>1/27/13</a:t>
+              <a:t>7/8/26</a:t>
             </a:fld>
             <a:endParaRPr lang="en-US"/>
           </a:p>
@@ -914,10 +923,9 @@
           </a:lstStyle>
           <a:p>
             <a:r>
-              <a:rPr lang="en-US" smtClean="0"/>
+              <a:rPr lang="en-US"/>
               <a:t>Click to edit Master title style</a:t>
             </a:r>
-            <a:endParaRPr lang="en-US"/>
           </a:p>
         </p:txBody>
       </p:sp>
@@ -1034,7 +1042,7 @@
           <a:p>
             <a:pPr lvl="0"/>
             <a:r>
-              <a:rPr lang="en-US" smtClean="0"/>
+              <a:rPr lang="en-US"/>
               <a:t>Click to edit Master text styles</a:t>
             </a:r>
           </a:p>
@@ -1057,7 +1065,7 @@
           <a:p>
             <a:fld id="{5BCAD085-E8A6-8845-BD4E-CB4CCA059FC4}" type="datetimeFigureOut">
               <a:rPr lang="en-US" smtClean="0"/>
-              <a:t>1/27/13</a:t>
+              <a:t>7/8/26</a:t>
             </a:fld>
             <a:endParaRPr lang="en-US"/>
           </a:p>
@@ -1151,10 +1159,9 @@
           <a:lstStyle/>
           <a:p>
             <a:r>
-              <a:rPr lang="en-US" smtClean="0"/>
+              <a:rPr lang="en-US"/>
               <a:t>Click to edit Master title style</a:t>
             </a:r>
-            <a:endParaRPr lang="en-US"/>
           </a:p>
         </p:txBody>
       </p:sp>
@@ -1208,38 +1215,37 @@
           <a:p>
             <a:pPr lvl="0"/>
             <a:r>
-              <a:rPr lang="en-US" smtClean="0"/>
+              <a:rPr lang="en-US"/>
               <a:t>Click to edit Master text styles</a:t>
             </a:r>
           </a:p>
           <a:p>
             <a:pPr lvl="1"/>
             <a:r>
-              <a:rPr lang="en-US" smtClean="0"/>
+              <a:rPr lang="en-US"/>
               <a:t>Second level</a:t>
             </a:r>
           </a:p>
           <a:p>
             <a:pPr lvl="2"/>
             <a:r>
-              <a:rPr lang="en-US" smtClean="0"/>
+              <a:rPr lang="en-US"/>
               <a:t>Third level</a:t>
             </a:r>
           </a:p>
           <a:p>
             <a:pPr lvl="3"/>
             <a:r>
-              <a:rPr lang="en-US" smtClean="0"/>
+              <a:rPr lang="en-US"/>
               <a:t>Fourth level</a:t>
             </a:r>
           </a:p>
           <a:p>
             <a:pPr lvl="4"/>
             <a:r>
-              <a:rPr lang="en-US" smtClean="0"/>
+              <a:rPr lang="en-US"/>
               <a:t>Fifth level</a:t>
             </a:r>
-            <a:endParaRPr lang="en-US"/>
           </a:p>
         </p:txBody>
       </p:sp>
@@ -1293,38 +1299,37 @@
           <a:p>
             <a:pPr lvl="0"/>
             <a:r>
-              <a:rPr lang="en-US" smtClean="0"/>
+              <a:rPr lang="en-US"/>
               <a:t>Click to edit Master text styles</a:t>
             </a:r>
           </a:p>
           <a:p>
             <a:pPr lvl="1"/>
             <a:r>
-              <a:rPr lang="en-US" smtClean="0"/>
+              <a:rPr lang="en-US"/>
               <a:t>Second level</a:t>
             </a:r>
           </a:p>
           <a:p>
             <a:pPr lvl="2"/>
             <a:r>
-              <a:rPr lang="en-US" smtClean="0"/>
+              <a:rPr lang="en-US"/>
               <a:t>Third level</a:t>
             </a:r>
           </a:p>
           <a:p>
             <a:pPr lvl="3"/>
             <a:r>
-              <a:rPr lang="en-US" smtClean="0"/>
+              <a:rPr lang="en-US"/>
               <a:t>Fourth level</a:t>
             </a:r>
           </a:p>
           <a:p>
             <a:pPr lvl="4"/>
             <a:r>
-              <a:rPr lang="en-US" smtClean="0"/>
+              <a:rPr lang="en-US"/>
               <a:t>Fifth level</a:t>
             </a:r>
-            <a:endParaRPr lang="en-US"/>
           </a:p>
         </p:txBody>
       </p:sp>
@@ -1345,7 +1350,7 @@
           <a:p>
             <a:fld id="{5BCAD085-E8A6-8845-BD4E-CB4CCA059FC4}" type="datetimeFigureOut">
               <a:rPr lang="en-US" smtClean="0"/>
-              <a:t>1/27/13</a:t>
+              <a:t>7/8/26</a:t>
             </a:fld>
             <a:endParaRPr lang="en-US"/>
           </a:p>
@@ -1443,10 +1448,9 @@
           </a:lstStyle>
           <a:p>
             <a:r>
-              <a:rPr lang="en-US" smtClean="0"/>
+              <a:rPr lang="en-US"/>
               <a:t>Click to edit Master title style</a:t>
             </a:r>
-            <a:endParaRPr lang="en-US"/>
           </a:p>
         </p:txBody>
       </p:sp>
@@ -1509,7 +1513,7 @@
           <a:p>
             <a:pPr lvl="0"/>
             <a:r>
-              <a:rPr lang="en-US" smtClean="0"/>
+              <a:rPr lang="en-US"/>
               <a:t>Click to edit Master text styles</a:t>
             </a:r>
           </a:p>
@@ -1565,38 +1569,37 @@
           <a:p>
             <a:pPr lvl="0"/>
             <a:r>
-              <a:rPr lang="en-US" smtClean="0"/>
+              <a:rPr lang="en-US"/>
               <a:t>Click to edit Master text styles</a:t>
             </a:r>
           </a:p>
           <a:p>
             <a:pPr lvl="1"/>
             <a:r>
-              <a:rPr lang="en-US" smtClean="0"/>
+              <a:rPr lang="en-US"/>
               <a:t>Second level</a:t>
             </a:r>
           </a:p>
           <a:p>
             <a:pPr lvl="2"/>
             <a:r>
-              <a:rPr lang="en-US" smtClean="0"/>
+              <a:rPr lang="en-US"/>
               <a:t>Third level</a:t>
             </a:r>
           </a:p>
           <a:p>
             <a:pPr lvl="3"/>
             <a:r>
-              <a:rPr lang="en-US" smtClean="0"/>
+              <a:rPr lang="en-US"/>
               <a:t>Fourth level</a:t>
             </a:r>
           </a:p>
           <a:p>
             <a:pPr lvl="4"/>
             <a:r>
-              <a:rPr lang="en-US" smtClean="0"/>
+              <a:rPr lang="en-US"/>
               <a:t>Fifth level</a:t>
             </a:r>
-            <a:endParaRPr lang="en-US"/>
           </a:p>
         </p:txBody>
       </p:sp>
@@ -1659,7 +1662,7 @@
           <a:p>
             <a:pPr lvl="0"/>
             <a:r>
-              <a:rPr lang="en-US" smtClean="0"/>
+              <a:rPr lang="en-US"/>
               <a:t>Click to edit Master text styles</a:t>
             </a:r>
           </a:p>
@@ -1715,38 +1718,37 @@
           <a:p>
             <a:pPr lvl="0"/>
             <a:r>
-              <a:rPr lang="en-US" smtClean="0"/>
+              <a:rPr lang="en-US"/>
               <a:t>Click to edit Master text styles</a:t>
             </a:r>
           </a:p>
           <a:p>
             <a:pPr lvl="1"/>
             <a:r>
-              <a:rPr lang="en-US" smtClean="0"/>
+              <a:rPr lang="en-US"/>
               <a:t>Second level</a:t>
             </a:r>
           </a:p>
           <a:p>
             <a:pPr lvl="2"/>
             <a:r>
-              <a:rPr lang="en-US" smtClean="0"/>
+              <a:rPr lang="en-US"/>
               <a:t>Third level</a:t>
             </a:r>
           </a:p>
           <a:p>
             <a:pPr lvl="3"/>
             <a:r>
-              <a:rPr lang="en-US" smtClean="0"/>
+              <a:rPr lang="en-US"/>
               <a:t>Fourth level</a:t>
             </a:r>
           </a:p>
           <a:p>
             <a:pPr lvl="4"/>
             <a:r>
-              <a:rPr lang="en-US" smtClean="0"/>
+              <a:rPr lang="en-US"/>
               <a:t>Fifth level</a:t>
             </a:r>
-            <a:endParaRPr lang="en-US"/>
           </a:p>
         </p:txBody>
       </p:sp>
@@ -1767,7 +1769,7 @@
           <a:p>
             <a:fld id="{5BCAD085-E8A6-8845-BD4E-CB4CCA059FC4}" type="datetimeFigureOut">
               <a:rPr lang="en-US" smtClean="0"/>
-              <a:t>1/27/13</a:t>
+              <a:t>7/8/26</a:t>
             </a:fld>
             <a:endParaRPr lang="en-US"/>
           </a:p>
@@ -1861,10 +1863,9 @@
           <a:lstStyle/>
           <a:p>
             <a:r>
-              <a:rPr lang="en-US" smtClean="0"/>
+              <a:rPr lang="en-US"/>
               <a:t>Click to edit Master title style</a:t>
             </a:r>
-            <a:endParaRPr lang="en-US"/>
           </a:p>
         </p:txBody>
       </p:sp>
@@ -1885,7 +1886,7 @@
           <a:p>
             <a:fld id="{5BCAD085-E8A6-8845-BD4E-CB4CCA059FC4}" type="datetimeFigureOut">
               <a:rPr lang="en-US" smtClean="0"/>
-              <a:t>1/27/13</a:t>
+              <a:t>7/8/26</a:t>
             </a:fld>
             <a:endParaRPr lang="en-US"/>
           </a:p>
@@ -1980,7 +1981,7 @@
           <a:p>
             <a:fld id="{5BCAD085-E8A6-8845-BD4E-CB4CCA059FC4}" type="datetimeFigureOut">
               <a:rPr lang="en-US" smtClean="0"/>
-              <a:t>1/27/13</a:t>
+              <a:t>7/8/26</a:t>
             </a:fld>
             <a:endParaRPr lang="en-US"/>
           </a:p>
@@ -2083,10 +2084,9 @@
           </a:lstStyle>
           <a:p>
             <a:r>
-              <a:rPr lang="en-US" smtClean="0"/>
+              <a:rPr lang="en-US"/>
               <a:t>Click to edit Master title style</a:t>
             </a:r>
-            <a:endParaRPr lang="en-US"/>
           </a:p>
         </p:txBody>
       </p:sp>
@@ -2140,38 +2140,37 @@
           <a:p>
             <a:pPr lvl="0"/>
             <a:r>
-              <a:rPr lang="en-US" smtClean="0"/>
+              <a:rPr lang="en-US"/>
               <a:t>Click to edit Master text styles</a:t>
             </a:r>
           </a:p>
           <a:p>
             <a:pPr lvl="1"/>
             <a:r>
-              <a:rPr lang="en-US" smtClean="0"/>
+              <a:rPr lang="en-US"/>
               <a:t>Second level</a:t>
             </a:r>
           </a:p>
           <a:p>
             <a:pPr lvl="2"/>
             <a:r>
-              <a:rPr lang="en-US" smtClean="0"/>
+              <a:rPr lang="en-US"/>
               <a:t>Third level</a:t>
             </a:r>
           </a:p>
           <a:p>
             <a:pPr lvl="3"/>
             <a:r>
-              <a:rPr lang="en-US" smtClean="0"/>
+              <a:rPr lang="en-US"/>
               <a:t>Fourth level</a:t>
             </a:r>
           </a:p>
           <a:p>
             <a:pPr lvl="4"/>
             <a:r>
-              <a:rPr lang="en-US" smtClean="0"/>
+              <a:rPr lang="en-US"/>
               <a:t>Fifth level</a:t>
             </a:r>
-            <a:endParaRPr lang="en-US"/>
           </a:p>
         </p:txBody>
       </p:sp>
@@ -2234,7 +2233,7 @@
           <a:p>
             <a:pPr lvl="0"/>
             <a:r>
-              <a:rPr lang="en-US" smtClean="0"/>
+              <a:rPr lang="en-US"/>
               <a:t>Click to edit Master text styles</a:t>
             </a:r>
           </a:p>
@@ -2257,7 +2256,7 @@
           <a:p>
             <a:fld id="{5BCAD085-E8A6-8845-BD4E-CB4CCA059FC4}" type="datetimeFigureOut">
               <a:rPr lang="en-US" smtClean="0"/>
-              <a:t>1/27/13</a:t>
+              <a:t>7/8/26</a:t>
             </a:fld>
             <a:endParaRPr lang="en-US"/>
           </a:p>
@@ -2360,10 +2359,9 @@
           </a:lstStyle>
           <a:p>
             <a:r>
-              <a:rPr lang="en-US" smtClean="0"/>
+              <a:rPr lang="en-US"/>
               <a:t>Click to edit Master title style</a:t>
             </a:r>
-            <a:endParaRPr lang="en-US"/>
           </a:p>
         </p:txBody>
       </p:sp>
@@ -2487,7 +2485,7 @@
           <a:p>
             <a:pPr lvl="0"/>
             <a:r>
-              <a:rPr lang="en-US" smtClean="0"/>
+              <a:rPr lang="en-US"/>
               <a:t>Click to edit Master text styles</a:t>
             </a:r>
           </a:p>
@@ -2510,7 +2508,7 @@
           <a:p>
             <a:fld id="{5BCAD085-E8A6-8845-BD4E-CB4CCA059FC4}" type="datetimeFigureOut">
               <a:rPr lang="en-US" smtClean="0"/>
-              <a:t>1/27/13</a:t>
+              <a:t>7/8/26</a:t>
             </a:fld>
             <a:endParaRPr lang="en-US"/>
           </a:p>
@@ -2619,10 +2617,9 @@
           <a:lstStyle/>
           <a:p>
             <a:r>
-              <a:rPr lang="en-US" smtClean="0"/>
+              <a:rPr lang="en-US"/>
               <a:t>Click to edit Master title style</a:t>
             </a:r>
-            <a:endParaRPr lang="en-US"/>
           </a:p>
         </p:txBody>
       </p:sp>
@@ -2653,38 +2650,37 @@
           <a:p>
             <a:pPr lvl="0"/>
             <a:r>
-              <a:rPr lang="en-US" smtClean="0"/>
+              <a:rPr lang="en-US"/>
               <a:t>Click to edit Master text styles</a:t>
             </a:r>
           </a:p>
           <a:p>
             <a:pPr lvl="1"/>
             <a:r>
-              <a:rPr lang="en-US" smtClean="0"/>
+              <a:rPr lang="en-US"/>
               <a:t>Second level</a:t>
             </a:r>
           </a:p>
           <a:p>
             <a:pPr lvl="2"/>
             <a:r>
-              <a:rPr lang="en-US" smtClean="0"/>
+              <a:rPr lang="en-US"/>
               <a:t>Third level</a:t>
             </a:r>
           </a:p>
           <a:p>
             <a:pPr lvl="3"/>
             <a:r>
-              <a:rPr lang="en-US" smtClean="0"/>
+              <a:rPr lang="en-US"/>
               <a:t>Fourth level</a:t>
             </a:r>
           </a:p>
           <a:p>
             <a:pPr lvl="4"/>
             <a:r>
-              <a:rPr lang="en-US" smtClean="0"/>
+              <a:rPr lang="en-US"/>
               <a:t>Fifth level</a:t>
             </a:r>
-            <a:endParaRPr lang="en-US"/>
           </a:p>
         </p:txBody>
       </p:sp>
@@ -2723,7 +2719,7 @@
           <a:p>
             <a:fld id="{5BCAD085-E8A6-8845-BD4E-CB4CCA059FC4}" type="datetimeFigureOut">
               <a:rPr lang="en-US" smtClean="0"/>
-              <a:t>1/27/13</a:t>
+              <a:t>7/8/26</a:t>
             </a:fld>
             <a:endParaRPr lang="en-US"/>
           </a:p>
@@ -3082,7 +3078,7 @@
 </file>
 
 <file path=ppt/slides/slide1.xml><?xml version="1.0" encoding="utf-8"?>
-<p:sld xmlns:a="http://schemas.openxmlformats.org/drawingml/2006/main" xmlns:p="http://schemas.openxmlformats.org/presentationml/2006/main" xmlns:r="http://schemas.openxmlformats.org/officeDocument/2006/relationships">
+<p:sld xmlns:a="http://schemas.openxmlformats.org/drawingml/2006/main" xmlns:r="http://schemas.openxmlformats.org/officeDocument/2006/relationships" xmlns:p="http://schemas.openxmlformats.org/presentationml/2006/main">
   <p:cSld>
     <p:spTree>
       <p:nvGrpSpPr>
@@ -3090,7 +3086,14 @@
         <p:cNvGrpSpPr/>
         <p:nvPr/>
       </p:nvGrpSpPr>
-      <p:grpSpPr/>
+      <p:grpSpPr>
+        <a:xfrm>
+          <a:off x="0" y="0"/>
+          <a:ext cx="0" cy="0"/>
+          <a:chOff x="0" y="0"/>
+          <a:chExt cx="0" cy="0"/>
+        </a:xfrm>
+      </p:grpSpPr>
       <p:sp>
         <p:nvSpPr>
           <p:cNvPr id="2" name="TextBox 1"/>
@@ -3182,7 +3185,7 @@
 </file>
 
 <file path=ppt/slides/slide2.xml><?xml version="1.0" encoding="utf-8"?>
-<p:sld xmlns:a="http://schemas.openxmlformats.org/drawingml/2006/main" xmlns:p="http://schemas.openxmlformats.org/presentationml/2006/main" xmlns:r="http://schemas.openxmlformats.org/officeDocument/2006/relationships">
+<p:sld xmlns:a="http://schemas.openxmlformats.org/drawingml/2006/main" xmlns:r="http://schemas.openxmlformats.org/officeDocument/2006/relationships" xmlns:p="http://schemas.openxmlformats.org/presentationml/2006/main">
   <p:cSld>
     <p:spTree>
       <p:nvGrpSpPr>
@@ -3190,7 +3193,14 @@
         <p:cNvGrpSpPr/>
         <p:nvPr/>
       </p:nvGrpSpPr>
-      <p:grpSpPr/>
+      <p:grpSpPr>
+        <a:xfrm>
+          <a:off x="0" y="0"/>
+          <a:ext cx="0" cy="0"/>
+          <a:chOff x="0" y="0"/>
+          <a:chExt cx="0" cy="0"/>
+        </a:xfrm>
+      </p:grpSpPr>
       <p:sp>
         <p:nvSpPr>
           <p:cNvPr id="2" name="TextBox 1"/>
@@ -3242,8 +3252,20 @@
                 <a:tableStyleId>{5C22544A-7EE6-4342-B048-85BDC9FD1C3A}</a:tableStyleId>
               </a:tblPr>
               <a:tblGrid>
-                <a:gridCol w="4572000"/>
-                <a:gridCol w="4572000"/>
+                <a:gridCol w="4572000">
+                  <a:extLst>
+                    <a:ext uri="{9D8B030D-6E8A-4147-A177-3AD203B41FA5}">
+                      <a16:colId xmlns:a16="http://schemas.microsoft.com/office/drawing/2014/main" val="20000"/>
+                    </a:ext>
+                  </a:extLst>
+                </a:gridCol>
+                <a:gridCol w="4572000">
+                  <a:extLst>
+                    <a:ext uri="{9D8B030D-6E8A-4147-A177-3AD203B41FA5}">
+                      <a16:colId xmlns:a16="http://schemas.microsoft.com/office/drawing/2014/main" val="20001"/>
+                    </a:ext>
+                  </a:extLst>
+                </a:gridCol>
               </a:tblGrid>
               <a:tr h="548640">
                 <a:tc>
@@ -3253,7 +3275,7 @@
                     <a:p>
                       <a:pPr algn="ctr"/>
                       <a:r>
-                        <a:rPr sz="1600" b="1">
+                        <a:rPr sz="1600" b="1" dirty="0" err="1">
                           <a:solidFill>
                             <a:srgbClr val="FFFFFF"/>
                           </a:solidFill>
@@ -3261,6 +3283,333 @@
                           <a:ea typeface="Yu Gothic"/>
                         </a:rPr>
                         <a:t>指標</a:t>
+                      </a:r>
+                      <a:endParaRPr sz="1600" b="1" dirty="0">
+                        <a:solidFill>
+                          <a:srgbClr val="FFFFFF"/>
+                        </a:solidFill>
+                        <a:latin typeface="Yu Gothic"/>
+                        <a:ea typeface="Yu Gothic"/>
+                      </a:endParaRPr>
+                    </a:p>
+                  </a:txBody>
+                  <a:tcPr/>
+                </a:tc>
+                <a:tc>
+                  <a:txBody>
+                    <a:bodyPr/>
+                    <a:lstStyle/>
+                    <a:p>
+                      <a:pPr algn="ctr"/>
+                      <a:r>
+                        <a:rPr sz="1600" b="1" dirty="0" err="1">
+                          <a:solidFill>
+                            <a:srgbClr val="FFFFFF"/>
+                          </a:solidFill>
+                          <a:latin typeface="Yu Gothic"/>
+                          <a:ea typeface="Yu Gothic"/>
+                        </a:rPr>
+                        <a:t>値</a:t>
+                      </a:r>
+                      <a:endParaRPr sz="1600" b="1" dirty="0">
+                        <a:solidFill>
+                          <a:srgbClr val="FFFFFF"/>
+                        </a:solidFill>
+                        <a:latin typeface="Yu Gothic"/>
+                        <a:ea typeface="Yu Gothic"/>
+                      </a:endParaRPr>
+                    </a:p>
+                  </a:txBody>
+                  <a:tcPr/>
+                </a:tc>
+                <a:extLst>
+                  <a:ext uri="{0D108BD9-81ED-4DB2-BD59-A6C34878D82A}">
+                    <a16:rowId xmlns:a16="http://schemas.microsoft.com/office/drawing/2014/main" val="10000"/>
+                  </a:ext>
+                </a:extLst>
+              </a:tr>
+              <a:tr h="548640">
+                <a:tc>
+                  <a:txBody>
+                    <a:bodyPr/>
+                    <a:lstStyle/>
+                    <a:p>
+                      <a:pPr algn="l"/>
+                      <a:r>
+                        <a:rPr sz="1600" b="0" dirty="0" err="1">
+                          <a:latin typeface="Yu Gothic"/>
+                          <a:ea typeface="Yu Gothic"/>
+                        </a:rPr>
+                        <a:t>サンプル数</a:t>
+                      </a:r>
+                      <a:endParaRPr sz="1600" b="0" dirty="0">
+                        <a:latin typeface="Yu Gothic"/>
+                        <a:ea typeface="Yu Gothic"/>
+                      </a:endParaRPr>
+                    </a:p>
+                  </a:txBody>
+                  <a:tcPr/>
+                </a:tc>
+                <a:tc>
+                  <a:txBody>
+                    <a:bodyPr/>
+                    <a:lstStyle/>
+                    <a:p>
+                      <a:pPr algn="ctr"/>
+                      <a:r>
+                        <a:rPr sz="1600" b="0" dirty="0">
+                          <a:latin typeface="Yu Gothic"/>
+                          <a:ea typeface="Yu Gothic"/>
+                        </a:rPr>
+                        <a:t>1,544 拍（17 </a:t>
+                      </a:r>
+                      <a:r>
+                        <a:rPr sz="1600" b="0" dirty="0" err="1">
+                          <a:latin typeface="Yu Gothic"/>
+                          <a:ea typeface="Yu Gothic"/>
+                        </a:rPr>
+                        <a:t>ファイル</a:t>
+                      </a:r>
+                      <a:r>
+                        <a:rPr sz="1600" b="0" dirty="0">
+                          <a:latin typeface="Yu Gothic"/>
+                          <a:ea typeface="Yu Gothic"/>
+                        </a:rPr>
+                        <a:t>）</a:t>
+                      </a:r>
+                    </a:p>
+                  </a:txBody>
+                  <a:tcPr/>
+                </a:tc>
+                <a:extLst>
+                  <a:ext uri="{0D108BD9-81ED-4DB2-BD59-A6C34878D82A}">
+                    <a16:rowId xmlns:a16="http://schemas.microsoft.com/office/drawing/2014/main" val="10001"/>
+                  </a:ext>
+                </a:extLst>
+              </a:tr>
+              <a:tr h="548640">
+                <a:tc>
+                  <a:txBody>
+                    <a:bodyPr/>
+                    <a:lstStyle/>
+                    <a:p>
+                      <a:pPr algn="l"/>
+                      <a:r>
+                        <a:rPr sz="1600" b="0" dirty="0" err="1">
+                          <a:latin typeface="Yu Gothic"/>
+                          <a:ea typeface="Yu Gothic"/>
+                        </a:rPr>
+                        <a:t>平均</a:t>
+                      </a:r>
+                      <a:endParaRPr sz="1600" b="0" dirty="0">
+                        <a:latin typeface="Yu Gothic"/>
+                        <a:ea typeface="Yu Gothic"/>
+                      </a:endParaRPr>
+                    </a:p>
+                  </a:txBody>
+                  <a:tcPr/>
+                </a:tc>
+                <a:tc>
+                  <a:txBody>
+                    <a:bodyPr/>
+                    <a:lstStyle/>
+                    <a:p>
+                      <a:pPr algn="ctr"/>
+                      <a:r>
+                        <a:rPr sz="1600" b="0" dirty="0">
+                          <a:latin typeface="Yu Gothic"/>
+                          <a:ea typeface="Yu Gothic"/>
+                        </a:rPr>
+                        <a:t>+7.6 </a:t>
+                      </a:r>
+                      <a:r>
+                        <a:rPr sz="1600" b="0" dirty="0" err="1">
+                          <a:latin typeface="Yu Gothic"/>
+                          <a:ea typeface="Yu Gothic"/>
+                        </a:rPr>
+                        <a:t>ms</a:t>
+                      </a:r>
+                      <a:endParaRPr sz="1600" b="0" dirty="0">
+                        <a:latin typeface="Yu Gothic"/>
+                        <a:ea typeface="Yu Gothic"/>
+                      </a:endParaRPr>
+                    </a:p>
+                  </a:txBody>
+                  <a:tcPr/>
+                </a:tc>
+                <a:extLst>
+                  <a:ext uri="{0D108BD9-81ED-4DB2-BD59-A6C34878D82A}">
+                    <a16:rowId xmlns:a16="http://schemas.microsoft.com/office/drawing/2014/main" val="10002"/>
+                  </a:ext>
+                </a:extLst>
+              </a:tr>
+              <a:tr h="548640">
+                <a:tc>
+                  <a:txBody>
+                    <a:bodyPr/>
+                    <a:lstStyle/>
+                    <a:p>
+                      <a:pPr algn="l"/>
+                      <a:r>
+                        <a:rPr sz="1600" b="0" dirty="0" err="1">
+                          <a:latin typeface="Yu Gothic"/>
+                          <a:ea typeface="Yu Gothic"/>
+                        </a:rPr>
+                        <a:t>標準偏差</a:t>
+                      </a:r>
+                      <a:endParaRPr sz="1600" b="0" dirty="0">
+                        <a:latin typeface="Yu Gothic"/>
+                        <a:ea typeface="Yu Gothic"/>
+                      </a:endParaRPr>
+                    </a:p>
+                  </a:txBody>
+                  <a:tcPr/>
+                </a:tc>
+                <a:tc>
+                  <a:txBody>
+                    <a:bodyPr/>
+                    <a:lstStyle/>
+                    <a:p>
+                      <a:pPr algn="ctr"/>
+                      <a:r>
+                        <a:rPr sz="1600" b="0" dirty="0">
+                          <a:latin typeface="Yu Gothic"/>
+                          <a:ea typeface="Yu Gothic"/>
+                        </a:rPr>
+                        <a:t>3.1 </a:t>
+                      </a:r>
+                      <a:r>
+                        <a:rPr sz="1600" b="0" dirty="0" err="1">
+                          <a:latin typeface="Yu Gothic"/>
+                          <a:ea typeface="Yu Gothic"/>
+                        </a:rPr>
+                        <a:t>ms</a:t>
+                      </a:r>
+                      <a:endParaRPr sz="1600" b="0" dirty="0">
+                        <a:latin typeface="Yu Gothic"/>
+                        <a:ea typeface="Yu Gothic"/>
+                      </a:endParaRPr>
+                    </a:p>
+                  </a:txBody>
+                  <a:tcPr/>
+                </a:tc>
+                <a:extLst>
+                  <a:ext uri="{0D108BD9-81ED-4DB2-BD59-A6C34878D82A}">
+                    <a16:rowId xmlns:a16="http://schemas.microsoft.com/office/drawing/2014/main" val="10003"/>
+                  </a:ext>
+                </a:extLst>
+              </a:tr>
+              <a:tr h="548640">
+                <a:tc>
+                  <a:txBody>
+                    <a:bodyPr/>
+                    <a:lstStyle/>
+                    <a:p>
+                      <a:pPr algn="l"/>
+                      <a:r>
+                        <a:rPr sz="1600" b="0" dirty="0" err="1">
+                          <a:latin typeface="Yu Gothic"/>
+                          <a:ea typeface="Yu Gothic"/>
+                        </a:rPr>
+                        <a:t>最小</a:t>
+                      </a:r>
+                      <a:r>
+                        <a:rPr sz="1600" b="0" dirty="0">
+                          <a:latin typeface="Yu Gothic"/>
+                          <a:ea typeface="Yu Gothic"/>
+                        </a:rPr>
+                        <a:t> / </a:t>
+                      </a:r>
+                      <a:r>
+                        <a:rPr sz="1600" b="0" dirty="0" err="1">
+                          <a:latin typeface="Yu Gothic"/>
+                          <a:ea typeface="Yu Gothic"/>
+                        </a:rPr>
+                        <a:t>最大</a:t>
+                      </a:r>
+                      <a:endParaRPr sz="1600" b="0" dirty="0">
+                        <a:latin typeface="Yu Gothic"/>
+                        <a:ea typeface="Yu Gothic"/>
+                      </a:endParaRPr>
+                    </a:p>
+                  </a:txBody>
+                  <a:tcPr/>
+                </a:tc>
+                <a:tc>
+                  <a:txBody>
+                    <a:bodyPr/>
+                    <a:lstStyle/>
+                    <a:p>
+                      <a:pPr algn="ctr"/>
+                      <a:r>
+                        <a:rPr sz="1600" b="0" dirty="0">
+                          <a:latin typeface="Yu Gothic"/>
+                          <a:ea typeface="Yu Gothic"/>
+                        </a:rPr>
+                        <a:t>0 </a:t>
+                      </a:r>
+                      <a:r>
+                        <a:rPr sz="1600" b="0" dirty="0" err="1">
+                          <a:latin typeface="Yu Gothic"/>
+                          <a:ea typeface="Yu Gothic"/>
+                        </a:rPr>
+                        <a:t>ms</a:t>
+                      </a:r>
+                      <a:r>
+                        <a:rPr sz="1600" b="0" dirty="0">
+                          <a:latin typeface="Yu Gothic"/>
+                          <a:ea typeface="Yu Gothic"/>
+                        </a:rPr>
+                        <a:t> / +20 </a:t>
+                      </a:r>
+                      <a:r>
+                        <a:rPr sz="1600" b="0" dirty="0" err="1">
+                          <a:latin typeface="Yu Gothic"/>
+                          <a:ea typeface="Yu Gothic"/>
+                        </a:rPr>
+                        <a:t>ms</a:t>
+                      </a:r>
+                      <a:endParaRPr sz="1600" b="0" dirty="0">
+                        <a:latin typeface="Yu Gothic"/>
+                        <a:ea typeface="Yu Gothic"/>
+                      </a:endParaRPr>
+                    </a:p>
+                  </a:txBody>
+                  <a:tcPr/>
+                </a:tc>
+                <a:extLst>
+                  <a:ext uri="{0D108BD9-81ED-4DB2-BD59-A6C34878D82A}">
+                    <a16:rowId xmlns:a16="http://schemas.microsoft.com/office/drawing/2014/main" val="10004"/>
+                  </a:ext>
+                </a:extLst>
+              </a:tr>
+              <a:tr h="548640">
+                <a:tc>
+                  <a:txBody>
+                    <a:bodyPr/>
+                    <a:lstStyle/>
+                    <a:p>
+                      <a:pPr algn="l"/>
+                      <a:r>
+                        <a:rPr sz="1600" b="0" dirty="0">
+                          <a:latin typeface="Yu Gothic"/>
+                          <a:ea typeface="Yu Gothic"/>
+                        </a:rPr>
+                        <a:t>95 </a:t>
+                      </a:r>
+                      <a:r>
+                        <a:rPr sz="1600" b="0" dirty="0" err="1">
+                          <a:latin typeface="Yu Gothic"/>
+                          <a:ea typeface="Yu Gothic"/>
+                        </a:rPr>
+                        <a:t>パーセンタイル（絶対値</a:t>
+                      </a:r>
+                      <a:r>
+                        <a:rPr sz="1600" b="0" dirty="0">
+                          <a:latin typeface="Yu Gothic"/>
+                          <a:ea typeface="Yu Gothic"/>
+                        </a:rPr>
+                        <a:t>）</a:t>
                       </a:r>
                     </a:p>
                   </a:txBody>
@@ -3273,199 +3622,32 @@
                     <a:p>
                       <a:pPr algn="ctr"/>
                       <a:r>
-                        <a:rPr sz="1600" b="1">
-                          <a:solidFill>
-                            <a:srgbClr val="FFFFFF"/>
-                          </a:solidFill>
+                        <a:rPr sz="1600" b="0" dirty="0">
                           <a:latin typeface="Yu Gothic"/>
                           <a:ea typeface="Yu Gothic"/>
                         </a:rPr>
-                        <a:t>値</a:t>
+                        <a:t>12 </a:t>
                       </a:r>
+                      <a:r>
+                        <a:rPr sz="1600" b="0" dirty="0" err="1">
+                          <a:latin typeface="Yu Gothic"/>
+                          <a:ea typeface="Yu Gothic"/>
+                        </a:rPr>
+                        <a:t>ms</a:t>
+                      </a:r>
+                      <a:endParaRPr sz="1600" b="0" dirty="0">
+                        <a:latin typeface="Yu Gothic"/>
+                        <a:ea typeface="Yu Gothic"/>
+                      </a:endParaRPr>
                     </a:p>
                   </a:txBody>
                   <a:tcPr/>
                 </a:tc>
-              </a:tr>
-              <a:tr h="548640">
-                <a:tc>
-                  <a:txBody>
-                    <a:bodyPr/>
-                    <a:lstStyle/>
-                    <a:p>
-                      <a:pPr algn="l"/>
-                      <a:r>
-                        <a:rPr sz="1600" b="0">
-                          <a:latin typeface="Yu Gothic"/>
-                          <a:ea typeface="Yu Gothic"/>
-                        </a:rPr>
-                        <a:t>サンプル数</a:t>
-                      </a:r>
-                    </a:p>
-                  </a:txBody>
-                  <a:tcPr/>
-                </a:tc>
-                <a:tc>
-                  <a:txBody>
-                    <a:bodyPr/>
-                    <a:lstStyle/>
-                    <a:p>
-                      <a:pPr algn="ctr"/>
-                      <a:r>
-                        <a:rPr sz="1600" b="0">
-                          <a:latin typeface="Yu Gothic"/>
-                          <a:ea typeface="Yu Gothic"/>
-                        </a:rPr>
-                        <a:t>1,544 拍（17 ファイル）</a:t>
-                      </a:r>
-                    </a:p>
-                  </a:txBody>
-                  <a:tcPr/>
-                </a:tc>
-              </a:tr>
-              <a:tr h="548640">
-                <a:tc>
-                  <a:txBody>
-                    <a:bodyPr/>
-                    <a:lstStyle/>
-                    <a:p>
-                      <a:pPr algn="l"/>
-                      <a:r>
-                        <a:rPr sz="1600" b="0">
-                          <a:latin typeface="Yu Gothic"/>
-                          <a:ea typeface="Yu Gothic"/>
-                        </a:rPr>
-                        <a:t>平均</a:t>
-                      </a:r>
-                    </a:p>
-                  </a:txBody>
-                  <a:tcPr/>
-                </a:tc>
-                <a:tc>
-                  <a:txBody>
-                    <a:bodyPr/>
-                    <a:lstStyle/>
-                    <a:p>
-                      <a:pPr algn="ctr"/>
-                      <a:r>
-                        <a:rPr sz="1600" b="0">
-                          <a:latin typeface="Yu Gothic"/>
-                          <a:ea typeface="Yu Gothic"/>
-                        </a:rPr>
-                        <a:t>+7.6 ms</a:t>
-                      </a:r>
-                    </a:p>
-                  </a:txBody>
-                  <a:tcPr/>
-                </a:tc>
-              </a:tr>
-              <a:tr h="548640">
-                <a:tc>
-                  <a:txBody>
-                    <a:bodyPr/>
-                    <a:lstStyle/>
-                    <a:p>
-                      <a:pPr algn="l"/>
-                      <a:r>
-                        <a:rPr sz="1600" b="0">
-                          <a:latin typeface="Yu Gothic"/>
-                          <a:ea typeface="Yu Gothic"/>
-                        </a:rPr>
-                        <a:t>標準偏差</a:t>
-                      </a:r>
-                    </a:p>
-                  </a:txBody>
-                  <a:tcPr/>
-                </a:tc>
-                <a:tc>
-                  <a:txBody>
-                    <a:bodyPr/>
-                    <a:lstStyle/>
-                    <a:p>
-                      <a:pPr algn="ctr"/>
-                      <a:r>
-                        <a:rPr sz="1600" b="0">
-                          <a:latin typeface="Yu Gothic"/>
-                          <a:ea typeface="Yu Gothic"/>
-                        </a:rPr>
-                        <a:t>3.1 ms</a:t>
-                      </a:r>
-                    </a:p>
-                  </a:txBody>
-                  <a:tcPr/>
-                </a:tc>
-              </a:tr>
-              <a:tr h="548640">
-                <a:tc>
-                  <a:txBody>
-                    <a:bodyPr/>
-                    <a:lstStyle/>
-                    <a:p>
-                      <a:pPr algn="l"/>
-                      <a:r>
-                        <a:rPr sz="1600" b="0">
-                          <a:latin typeface="Yu Gothic"/>
-                          <a:ea typeface="Yu Gothic"/>
-                        </a:rPr>
-                        <a:t>最小 / 最大</a:t>
-                      </a:r>
-                    </a:p>
-                  </a:txBody>
-                  <a:tcPr/>
-                </a:tc>
-                <a:tc>
-                  <a:txBody>
-                    <a:bodyPr/>
-                    <a:lstStyle/>
-                    <a:p>
-                      <a:pPr algn="ctr"/>
-                      <a:r>
-                        <a:rPr sz="1600" b="0">
-                          <a:latin typeface="Yu Gothic"/>
-                          <a:ea typeface="Yu Gothic"/>
-                        </a:rPr>
-                        <a:t>0 ms / +20 ms</a:t>
-                      </a:r>
-                    </a:p>
-                  </a:txBody>
-                  <a:tcPr/>
-                </a:tc>
-              </a:tr>
-              <a:tr h="548640">
-                <a:tc>
-                  <a:txBody>
-                    <a:bodyPr/>
-                    <a:lstStyle/>
-                    <a:p>
-                      <a:pPr algn="l"/>
-                      <a:r>
-                        <a:rPr sz="1600" b="0">
-                          <a:latin typeface="Yu Gothic"/>
-                          <a:ea typeface="Yu Gothic"/>
-                        </a:rPr>
-                        <a:t>95 パーセンタイル（絶対値）</a:t>
-                      </a:r>
-                    </a:p>
-                  </a:txBody>
-                  <a:tcPr/>
-                </a:tc>
-                <a:tc>
-                  <a:txBody>
-                    <a:bodyPr/>
-                    <a:lstStyle/>
-                    <a:p>
-                      <a:pPr algn="ctr"/>
-                      <a:r>
-                        <a:rPr sz="1600" b="0">
-                          <a:latin typeface="Yu Gothic"/>
-                          <a:ea typeface="Yu Gothic"/>
-                        </a:rPr>
-                        <a:t>12 ms</a:t>
-                      </a:r>
-                    </a:p>
-                  </a:txBody>
-                  <a:tcPr/>
-                </a:tc>
+                <a:extLst>
+                  <a:ext uri="{0D108BD9-81ED-4DB2-BD59-A6C34878D82A}">
+                    <a16:rowId xmlns:a16="http://schemas.microsoft.com/office/drawing/2014/main" val="10005"/>
+                  </a:ext>
+                </a:extLst>
               </a:tr>
             </a:tbl>
           </a:graphicData>
@@ -3521,7 +3703,7 @@
 </file>
 
 <file path=ppt/slides/slide3.xml><?xml version="1.0" encoding="utf-8"?>
-<p:sld xmlns:a="http://schemas.openxmlformats.org/drawingml/2006/main" xmlns:p="http://schemas.openxmlformats.org/presentationml/2006/main" xmlns:r="http://schemas.openxmlformats.org/officeDocument/2006/relationships">
+<p:sld xmlns:a="http://schemas.openxmlformats.org/drawingml/2006/main" xmlns:r="http://schemas.openxmlformats.org/officeDocument/2006/relationships" xmlns:p="http://schemas.openxmlformats.org/presentationml/2006/main">
   <p:cSld>
     <p:spTree>
       <p:nvGrpSpPr>
@@ -3529,7 +3711,14 @@
         <p:cNvGrpSpPr/>
         <p:nvPr/>
       </p:nvGrpSpPr>
-      <p:grpSpPr/>
+      <p:grpSpPr>
+        <a:xfrm>
+          <a:off x="0" y="0"/>
+          <a:ext cx="0" cy="0"/>
+          <a:chOff x="0" y="0"/>
+          <a:chExt cx="0" cy="0"/>
+        </a:xfrm>
+      </p:grpSpPr>
       <p:sp>
         <p:nvSpPr>
           <p:cNvPr id="2" name="TextBox 1"/>
@@ -3581,14 +3770,62 @@
                 <a:tableStyleId>{5C22544A-7EE6-4342-B048-85BDC9FD1C3A}</a:tableStyleId>
               </a:tblPr>
               <a:tblGrid>
-                <a:gridCol w="1371600"/>
-                <a:gridCol w="1371600"/>
-                <a:gridCol w="1371600"/>
-                <a:gridCol w="1371600"/>
-                <a:gridCol w="1371600"/>
-                <a:gridCol w="1371600"/>
-                <a:gridCol w="1371600"/>
-                <a:gridCol w="1371600"/>
+                <a:gridCol w="1371600">
+                  <a:extLst>
+                    <a:ext uri="{9D8B030D-6E8A-4147-A177-3AD203B41FA5}">
+                      <a16:colId xmlns:a16="http://schemas.microsoft.com/office/drawing/2014/main" val="20000"/>
+                    </a:ext>
+                  </a:extLst>
+                </a:gridCol>
+                <a:gridCol w="1371600">
+                  <a:extLst>
+                    <a:ext uri="{9D8B030D-6E8A-4147-A177-3AD203B41FA5}">
+                      <a16:colId xmlns:a16="http://schemas.microsoft.com/office/drawing/2014/main" val="20001"/>
+                    </a:ext>
+                  </a:extLst>
+                </a:gridCol>
+                <a:gridCol w="1371600">
+                  <a:extLst>
+                    <a:ext uri="{9D8B030D-6E8A-4147-A177-3AD203B41FA5}">
+                      <a16:colId xmlns:a16="http://schemas.microsoft.com/office/drawing/2014/main" val="20002"/>
+                    </a:ext>
+                  </a:extLst>
+                </a:gridCol>
+                <a:gridCol w="1371600">
+                  <a:extLst>
+                    <a:ext uri="{9D8B030D-6E8A-4147-A177-3AD203B41FA5}">
+                      <a16:colId xmlns:a16="http://schemas.microsoft.com/office/drawing/2014/main" val="20003"/>
+                    </a:ext>
+                  </a:extLst>
+                </a:gridCol>
+                <a:gridCol w="1371600">
+                  <a:extLst>
+                    <a:ext uri="{9D8B030D-6E8A-4147-A177-3AD203B41FA5}">
+                      <a16:colId xmlns:a16="http://schemas.microsoft.com/office/drawing/2014/main" val="20004"/>
+                    </a:ext>
+                  </a:extLst>
+                </a:gridCol>
+                <a:gridCol w="1371600">
+                  <a:extLst>
+                    <a:ext uri="{9D8B030D-6E8A-4147-A177-3AD203B41FA5}">
+                      <a16:colId xmlns:a16="http://schemas.microsoft.com/office/drawing/2014/main" val="20005"/>
+                    </a:ext>
+                  </a:extLst>
+                </a:gridCol>
+                <a:gridCol w="1371600">
+                  <a:extLst>
+                    <a:ext uri="{9D8B030D-6E8A-4147-A177-3AD203B41FA5}">
+                      <a16:colId xmlns:a16="http://schemas.microsoft.com/office/drawing/2014/main" val="20006"/>
+                    </a:ext>
+                  </a:extLst>
+                </a:gridCol>
+                <a:gridCol w="1371600">
+                  <a:extLst>
+                    <a:ext uri="{9D8B030D-6E8A-4147-A177-3AD203B41FA5}">
+                      <a16:colId xmlns:a16="http://schemas.microsoft.com/office/drawing/2014/main" val="20007"/>
+                    </a:ext>
+                  </a:extLst>
+                </a:gridCol>
               </a:tblGrid>
               <a:tr h="447040">
                 <a:tc>
@@ -3751,6 +3988,11 @@
                   </a:txBody>
                   <a:tcPr/>
                 </a:tc>
+                <a:extLst>
+                  <a:ext uri="{0D108BD9-81ED-4DB2-BD59-A6C34878D82A}">
+                    <a16:rowId xmlns:a16="http://schemas.microsoft.com/office/drawing/2014/main" val="10000"/>
+                  </a:ext>
+                </a:extLst>
               </a:tr>
               <a:tr h="447040">
                 <a:tc>
@@ -3889,6 +4131,11 @@
                   </a:txBody>
                   <a:tcPr/>
                 </a:tc>
+                <a:extLst>
+                  <a:ext uri="{0D108BD9-81ED-4DB2-BD59-A6C34878D82A}">
+                    <a16:rowId xmlns:a16="http://schemas.microsoft.com/office/drawing/2014/main" val="10001"/>
+                  </a:ext>
+                </a:extLst>
               </a:tr>
               <a:tr h="447040">
                 <a:tc>
@@ -4027,6 +4274,11 @@
                   </a:txBody>
                   <a:tcPr/>
                 </a:tc>
+                <a:extLst>
+                  <a:ext uri="{0D108BD9-81ED-4DB2-BD59-A6C34878D82A}">
+                    <a16:rowId xmlns:a16="http://schemas.microsoft.com/office/drawing/2014/main" val="10002"/>
+                  </a:ext>
+                </a:extLst>
               </a:tr>
               <a:tr h="447040">
                 <a:tc>
@@ -4165,6 +4417,11 @@
                   </a:txBody>
                   <a:tcPr/>
                 </a:tc>
+                <a:extLst>
+                  <a:ext uri="{0D108BD9-81ED-4DB2-BD59-A6C34878D82A}">
+                    <a16:rowId xmlns:a16="http://schemas.microsoft.com/office/drawing/2014/main" val="10003"/>
+                  </a:ext>
+                </a:extLst>
               </a:tr>
               <a:tr h="447040">
                 <a:tc>
@@ -4303,6 +4560,11 @@
                   </a:txBody>
                   <a:tcPr/>
                 </a:tc>
+                <a:extLst>
+                  <a:ext uri="{0D108BD9-81ED-4DB2-BD59-A6C34878D82A}">
+                    <a16:rowId xmlns:a16="http://schemas.microsoft.com/office/drawing/2014/main" val="10004"/>
+                  </a:ext>
+                </a:extLst>
               </a:tr>
               <a:tr h="447040">
                 <a:tc>
@@ -4441,6 +4703,11 @@
                   </a:txBody>
                   <a:tcPr/>
                 </a:tc>
+                <a:extLst>
+                  <a:ext uri="{0D108BD9-81ED-4DB2-BD59-A6C34878D82A}">
+                    <a16:rowId xmlns:a16="http://schemas.microsoft.com/office/drawing/2014/main" val="10005"/>
+                  </a:ext>
+                </a:extLst>
               </a:tr>
               <a:tr h="447040">
                 <a:tc>
@@ -4579,6 +4846,11 @@
                   </a:txBody>
                   <a:tcPr/>
                 </a:tc>
+                <a:extLst>
+                  <a:ext uri="{0D108BD9-81ED-4DB2-BD59-A6C34878D82A}">
+                    <a16:rowId xmlns:a16="http://schemas.microsoft.com/office/drawing/2014/main" val="10006"/>
+                  </a:ext>
+                </a:extLst>
               </a:tr>
               <a:tr h="447040">
                 <a:tc>
@@ -4717,6 +4989,11 @@
                   </a:txBody>
                   <a:tcPr/>
                 </a:tc>
+                <a:extLst>
+                  <a:ext uri="{0D108BD9-81ED-4DB2-BD59-A6C34878D82A}">
+                    <a16:rowId xmlns:a16="http://schemas.microsoft.com/office/drawing/2014/main" val="10007"/>
+                  </a:ext>
+                </a:extLst>
               </a:tr>
               <a:tr h="447040">
                 <a:tc>
@@ -4855,6 +5132,11 @@
                   </a:txBody>
                   <a:tcPr/>
                 </a:tc>
+                <a:extLst>
+                  <a:ext uri="{0D108BD9-81ED-4DB2-BD59-A6C34878D82A}">
+                    <a16:rowId xmlns:a16="http://schemas.microsoft.com/office/drawing/2014/main" val="10008"/>
+                  </a:ext>
+                </a:extLst>
               </a:tr>
             </a:tbl>
           </a:graphicData>
@@ -4910,7 +5192,7 @@
 </file>
 
 <file path=ppt/slides/slide4.xml><?xml version="1.0" encoding="utf-8"?>
-<p:sld xmlns:a="http://schemas.openxmlformats.org/drawingml/2006/main" xmlns:p="http://schemas.openxmlformats.org/presentationml/2006/main" xmlns:r="http://schemas.openxmlformats.org/officeDocument/2006/relationships">
+<p:sld xmlns:a="http://schemas.openxmlformats.org/drawingml/2006/main" xmlns:r="http://schemas.openxmlformats.org/officeDocument/2006/relationships" xmlns:p="http://schemas.openxmlformats.org/presentationml/2006/main">
   <p:cSld>
     <p:spTree>
       <p:nvGrpSpPr>
@@ -4918,7 +5200,14 @@
         <p:cNvGrpSpPr/>
         <p:nvPr/>
       </p:nvGrpSpPr>
-      <p:grpSpPr/>
+      <p:grpSpPr>
+        <a:xfrm>
+          <a:off x="0" y="0"/>
+          <a:ext cx="0" cy="0"/>
+          <a:chOff x="0" y="0"/>
+          <a:chExt cx="0" cy="0"/>
+        </a:xfrm>
+      </p:grpSpPr>
       <p:sp>
         <p:nvSpPr>
           <p:cNvPr id="2" name="TextBox 1"/>
@@ -5009,13 +5298,10 @@
             </a:r>
           </a:p>
           <a:p>
-            <a:r>
-              <a:rPr sz="1000" b="0">
-                <a:latin typeface="Yu Gothic"/>
-                <a:ea typeface="Yu Gothic"/>
-              </a:rPr>
-              <a:t/>
-            </a:r>
+            <a:endParaRPr sz="1800" b="0">
+              <a:latin typeface="Yu Gothic"/>
+              <a:ea typeface="Yu Gothic"/>
+            </a:endParaRPr>
           </a:p>
           <a:p>
             <a:r>
@@ -5047,6 +5333,4454 @@
         </p:txBody>
       </p:sp>
     </p:spTree>
+  </p:cSld>
+  <p:clrMapOvr>
+    <a:masterClrMapping/>
+  </p:clrMapOvr>
+</p:sld>
+</file>
+
+<file path=ppt/slides/slide5.xml><?xml version="1.0" encoding="utf-8"?>
+<p:sld xmlns:a="http://schemas.openxmlformats.org/drawingml/2006/main" xmlns:r="http://schemas.openxmlformats.org/officeDocument/2006/relationships" xmlns:p="http://schemas.openxmlformats.org/presentationml/2006/main">
+  <p:cSld>
+    <p:spTree>
+      <p:nvGrpSpPr>
+        <p:cNvPr id="1" name=""/>
+        <p:cNvGrpSpPr/>
+        <p:nvPr/>
+      </p:nvGrpSpPr>
+      <p:grpSpPr>
+        <a:xfrm>
+          <a:off x="0" y="0"/>
+          <a:ext cx="0" cy="0"/>
+          <a:chOff x="0" y="0"/>
+          <a:chExt cx="0" cy="0"/>
+        </a:xfrm>
+      </p:grpSpPr>
+      <p:sp>
+        <p:nvSpPr>
+          <p:cNvPr id="2" name="Title 1">
+            <a:extLst>
+              <a:ext uri="{FF2B5EF4-FFF2-40B4-BE49-F238E27FC236}">
+                <a16:creationId xmlns:a16="http://schemas.microsoft.com/office/drawing/2014/main" id="{FCBA65B2-8645-24E5-2A72-15AF64C74157}"/>
+              </a:ext>
+            </a:extLst>
+          </p:cNvPr>
+          <p:cNvSpPr>
+            <a:spLocks noGrp="1"/>
+          </p:cNvSpPr>
+          <p:nvPr/>
+        </p:nvSpPr>
+        <p:spPr>
+          <a:xfrm>
+            <a:off x="1356345" y="155413"/>
+            <a:ext cx="10058400" cy="702302"/>
+          </a:xfrm>
+          <a:prstGeom prst="rect">
+            <a:avLst/>
+          </a:prstGeom>
+        </p:spPr>
+        <p:txBody>
+          <a:bodyPr vert="horz" lIns="91440" tIns="45720" rIns="91440" bIns="45720" rtlCol="0" anchor="b">
+            <a:normAutofit/>
+          </a:bodyPr>
+          <a:lstStyle>
+            <a:lvl1pPr algn="ctr" defTabSz="914400" rtl="0" eaLnBrk="1" latinLnBrk="0" hangingPunct="1">
+              <a:lnSpc>
+                <a:spcPct val="85000"/>
+              </a:lnSpc>
+              <a:spcBef>
+                <a:spcPct val="0"/>
+              </a:spcBef>
+              <a:buNone/>
+              <a:defRPr sz="4000" b="1" kern="1200" spc="-50" baseline="0">
+                <a:solidFill>
+                  <a:schemeClr val="tx1">
+                    <a:lumMod val="75000"/>
+                    <a:lumOff val="25000"/>
+                  </a:schemeClr>
+                </a:solidFill>
+                <a:latin typeface="+mj-lt"/>
+                <a:ea typeface="+mj-ea"/>
+                <a:cs typeface="+mj-cs"/>
+              </a:defRPr>
+            </a:lvl1pPr>
+          </a:lstStyle>
+          <a:p>
+            <a:r>
+              <a:rPr lang="ja-JP" altLang="en-US">
+                <a:ea typeface="ＭＳ Ｐゴシック"/>
+              </a:rPr>
+              <a:t>考察</a:t>
+            </a:r>
+            <a:r>
+              <a:rPr lang="ja-JP"/>
+              <a:t>ー</a:t>
+            </a:r>
+            <a:r>
+              <a:rPr lang="ja-JP">
+                <a:latin typeface="MS PGothic"/>
+                <a:ea typeface="MS PGothic"/>
+              </a:rPr>
+              <a:t>LEDの点灯・輝度制御</a:t>
+            </a:r>
+            <a:endParaRPr lang="ja-JP">
+              <a:solidFill>
+                <a:srgbClr val="000000"/>
+              </a:solidFill>
+              <a:latin typeface="MS PGothic"/>
+              <a:ea typeface="MS PGothic"/>
+            </a:endParaRPr>
+          </a:p>
+        </p:txBody>
+      </p:sp>
+      <p:sp>
+        <p:nvSpPr>
+          <p:cNvPr id="3" name="Footer Placeholder 3">
+            <a:extLst>
+              <a:ext uri="{FF2B5EF4-FFF2-40B4-BE49-F238E27FC236}">
+                <a16:creationId xmlns:a16="http://schemas.microsoft.com/office/drawing/2014/main" id="{428F3691-4775-C285-E081-2BB776E801FD}"/>
+              </a:ext>
+            </a:extLst>
+          </p:cNvPr>
+          <p:cNvSpPr>
+            <a:spLocks noGrp="1"/>
+          </p:cNvSpPr>
+          <p:nvPr/>
+        </p:nvSpPr>
+        <p:spPr>
+          <a:xfrm>
+            <a:off x="7486776" y="6337463"/>
+            <a:ext cx="4114800" cy="365125"/>
+          </a:xfrm>
+          <a:prstGeom prst="rect">
+            <a:avLst/>
+          </a:prstGeom>
+        </p:spPr>
+        <p:txBody>
+          <a:bodyPr vert="horz" lIns="91440" tIns="45720" rIns="91440" bIns="45720" rtlCol="0" anchor="ctr"/>
+          <a:lstStyle>
+            <a:defPPr>
+              <a:defRPr lang="ja-JP"/>
+            </a:defPPr>
+            <a:lvl1pPr marL="0" algn="ctr" defTabSz="914400" rtl="0" eaLnBrk="1" latinLnBrk="0" hangingPunct="1">
+              <a:defRPr kumimoji="1" sz="2000" kern="1200" cap="all" baseline="0">
+                <a:solidFill>
+                  <a:srgbClr val="FFFFFF"/>
+                </a:solidFill>
+                <a:latin typeface="+mn-lt"/>
+                <a:ea typeface="+mn-ea"/>
+                <a:cs typeface="+mn-cs"/>
+              </a:defRPr>
+            </a:lvl1pPr>
+            <a:lvl2pPr marL="457200" algn="l" defTabSz="914400" rtl="0" eaLnBrk="1" latinLnBrk="0" hangingPunct="1">
+              <a:defRPr kumimoji="1" sz="1800" kern="1200">
+                <a:solidFill>
+                  <a:schemeClr val="tx1"/>
+                </a:solidFill>
+                <a:latin typeface="+mn-lt"/>
+                <a:ea typeface="+mn-ea"/>
+                <a:cs typeface="+mn-cs"/>
+              </a:defRPr>
+            </a:lvl2pPr>
+            <a:lvl3pPr marL="914400" algn="l" defTabSz="914400" rtl="0" eaLnBrk="1" latinLnBrk="0" hangingPunct="1">
+              <a:defRPr kumimoji="1" sz="1800" kern="1200">
+                <a:solidFill>
+                  <a:schemeClr val="tx1"/>
+                </a:solidFill>
+                <a:latin typeface="+mn-lt"/>
+                <a:ea typeface="+mn-ea"/>
+                <a:cs typeface="+mn-cs"/>
+              </a:defRPr>
+            </a:lvl3pPr>
+            <a:lvl4pPr marL="1371600" algn="l" defTabSz="914400" rtl="0" eaLnBrk="1" latinLnBrk="0" hangingPunct="1">
+              <a:defRPr kumimoji="1" sz="1800" kern="1200">
+                <a:solidFill>
+                  <a:schemeClr val="tx1"/>
+                </a:solidFill>
+                <a:latin typeface="+mn-lt"/>
+                <a:ea typeface="+mn-ea"/>
+                <a:cs typeface="+mn-cs"/>
+              </a:defRPr>
+            </a:lvl4pPr>
+            <a:lvl5pPr marL="1828800" algn="l" defTabSz="914400" rtl="0" eaLnBrk="1" latinLnBrk="0" hangingPunct="1">
+              <a:defRPr kumimoji="1" sz="1800" kern="1200">
+                <a:solidFill>
+                  <a:schemeClr val="tx1"/>
+                </a:solidFill>
+                <a:latin typeface="+mn-lt"/>
+                <a:ea typeface="+mn-ea"/>
+                <a:cs typeface="+mn-cs"/>
+              </a:defRPr>
+            </a:lvl5pPr>
+            <a:lvl6pPr marL="2286000" algn="l" defTabSz="914400" rtl="0" eaLnBrk="1" latinLnBrk="0" hangingPunct="1">
+              <a:defRPr kumimoji="1" sz="1800" kern="1200">
+                <a:solidFill>
+                  <a:schemeClr val="tx1"/>
+                </a:solidFill>
+                <a:latin typeface="+mn-lt"/>
+                <a:ea typeface="+mn-ea"/>
+                <a:cs typeface="+mn-cs"/>
+              </a:defRPr>
+            </a:lvl6pPr>
+            <a:lvl7pPr marL="2743200" algn="l" defTabSz="914400" rtl="0" eaLnBrk="1" latinLnBrk="0" hangingPunct="1">
+              <a:defRPr kumimoji="1" sz="1800" kern="1200">
+                <a:solidFill>
+                  <a:schemeClr val="tx1"/>
+                </a:solidFill>
+                <a:latin typeface="+mn-lt"/>
+                <a:ea typeface="+mn-ea"/>
+                <a:cs typeface="+mn-cs"/>
+              </a:defRPr>
+            </a:lvl7pPr>
+            <a:lvl8pPr marL="3200400" algn="l" defTabSz="914400" rtl="0" eaLnBrk="1" latinLnBrk="0" hangingPunct="1">
+              <a:defRPr kumimoji="1" sz="1800" kern="1200">
+                <a:solidFill>
+                  <a:schemeClr val="tx1"/>
+                </a:solidFill>
+                <a:latin typeface="+mn-lt"/>
+                <a:ea typeface="+mn-ea"/>
+                <a:cs typeface="+mn-cs"/>
+              </a:defRPr>
+            </a:lvl8pPr>
+            <a:lvl9pPr marL="3657600" algn="l" defTabSz="914400" rtl="0" eaLnBrk="1" latinLnBrk="0" hangingPunct="1">
+              <a:defRPr kumimoji="1" sz="1800" kern="1200">
+                <a:solidFill>
+                  <a:schemeClr val="tx1"/>
+                </a:solidFill>
+                <a:latin typeface="+mn-lt"/>
+                <a:ea typeface="+mn-ea"/>
+                <a:cs typeface="+mn-cs"/>
+              </a:defRPr>
+            </a:lvl9pPr>
+          </a:lstStyle>
+          <a:p>
+            <a:r>
+              <a:rPr lang="en-US"/>
+              <a:t>25G1039　</a:t>
+            </a:r>
+            <a:r>
+              <a:rPr lang="ja-JP" altLang="en-US"/>
+              <a:t>川瀬瑠音</a:t>
+            </a:r>
+            <a:endParaRPr lang="en-US"/>
+          </a:p>
+        </p:txBody>
+      </p:sp>
+      <p:sp>
+        <p:nvSpPr>
+          <p:cNvPr id="4" name="TextBox 12">
+            <a:extLst>
+              <a:ext uri="{FF2B5EF4-FFF2-40B4-BE49-F238E27FC236}">
+                <a16:creationId xmlns:a16="http://schemas.microsoft.com/office/drawing/2014/main" id="{3668F289-CEE7-A251-49D3-5725FCE68BD9}"/>
+              </a:ext>
+            </a:extLst>
+          </p:cNvPr>
+          <p:cNvSpPr txBox="1"/>
+          <p:nvPr/>
+        </p:nvSpPr>
+        <p:spPr>
+          <a:xfrm>
+            <a:off x="4829890" y="1208841"/>
+            <a:ext cx="6771686" cy="1200329"/>
+          </a:xfrm>
+          <a:prstGeom prst="rect">
+            <a:avLst/>
+          </a:prstGeom>
+          <a:noFill/>
+        </p:spPr>
+        <p:txBody>
+          <a:bodyPr rot="0" spcFirstLastPara="0" vert="horz" wrap="square" lIns="91440" tIns="45720" rIns="91440" bIns="45720" numCol="1" spcCol="0" rtlCol="0" fromWordArt="0" anchor="t" anchorCtr="0" forceAA="0" compatLnSpc="1">
+            <a:prstTxWarp prst="textNoShape">
+              <a:avLst/>
+            </a:prstTxWarp>
+            <a:spAutoFit/>
+          </a:bodyPr>
+          <a:lstStyle>
+            <a:defPPr>
+              <a:defRPr lang="ja-JP"/>
+            </a:defPPr>
+            <a:lvl1pPr marL="0" algn="l" defTabSz="914400" rtl="0" eaLnBrk="1" latinLnBrk="0" hangingPunct="1">
+              <a:defRPr kumimoji="1" sz="1800" kern="1200">
+                <a:solidFill>
+                  <a:schemeClr val="tx1"/>
+                </a:solidFill>
+                <a:latin typeface="+mn-lt"/>
+                <a:ea typeface="+mn-ea"/>
+                <a:cs typeface="+mn-cs"/>
+              </a:defRPr>
+            </a:lvl1pPr>
+            <a:lvl2pPr marL="457200" algn="l" defTabSz="914400" rtl="0" eaLnBrk="1" latinLnBrk="0" hangingPunct="1">
+              <a:defRPr kumimoji="1" sz="1800" kern="1200">
+                <a:solidFill>
+                  <a:schemeClr val="tx1"/>
+                </a:solidFill>
+                <a:latin typeface="+mn-lt"/>
+                <a:ea typeface="+mn-ea"/>
+                <a:cs typeface="+mn-cs"/>
+              </a:defRPr>
+            </a:lvl2pPr>
+            <a:lvl3pPr marL="914400" algn="l" defTabSz="914400" rtl="0" eaLnBrk="1" latinLnBrk="0" hangingPunct="1">
+              <a:defRPr kumimoji="1" sz="1800" kern="1200">
+                <a:solidFill>
+                  <a:schemeClr val="tx1"/>
+                </a:solidFill>
+                <a:latin typeface="+mn-lt"/>
+                <a:ea typeface="+mn-ea"/>
+                <a:cs typeface="+mn-cs"/>
+              </a:defRPr>
+            </a:lvl3pPr>
+            <a:lvl4pPr marL="1371600" algn="l" defTabSz="914400" rtl="0" eaLnBrk="1" latinLnBrk="0" hangingPunct="1">
+              <a:defRPr kumimoji="1" sz="1800" kern="1200">
+                <a:solidFill>
+                  <a:schemeClr val="tx1"/>
+                </a:solidFill>
+                <a:latin typeface="+mn-lt"/>
+                <a:ea typeface="+mn-ea"/>
+                <a:cs typeface="+mn-cs"/>
+              </a:defRPr>
+            </a:lvl4pPr>
+            <a:lvl5pPr marL="1828800" algn="l" defTabSz="914400" rtl="0" eaLnBrk="1" latinLnBrk="0" hangingPunct="1">
+              <a:defRPr kumimoji="1" sz="1800" kern="1200">
+                <a:solidFill>
+                  <a:schemeClr val="tx1"/>
+                </a:solidFill>
+                <a:latin typeface="+mn-lt"/>
+                <a:ea typeface="+mn-ea"/>
+                <a:cs typeface="+mn-cs"/>
+              </a:defRPr>
+            </a:lvl5pPr>
+            <a:lvl6pPr marL="2286000" algn="l" defTabSz="914400" rtl="0" eaLnBrk="1" latinLnBrk="0" hangingPunct="1">
+              <a:defRPr kumimoji="1" sz="1800" kern="1200">
+                <a:solidFill>
+                  <a:schemeClr val="tx1"/>
+                </a:solidFill>
+                <a:latin typeface="+mn-lt"/>
+                <a:ea typeface="+mn-ea"/>
+                <a:cs typeface="+mn-cs"/>
+              </a:defRPr>
+            </a:lvl6pPr>
+            <a:lvl7pPr marL="2743200" algn="l" defTabSz="914400" rtl="0" eaLnBrk="1" latinLnBrk="0" hangingPunct="1">
+              <a:defRPr kumimoji="1" sz="1800" kern="1200">
+                <a:solidFill>
+                  <a:schemeClr val="tx1"/>
+                </a:solidFill>
+                <a:latin typeface="+mn-lt"/>
+                <a:ea typeface="+mn-ea"/>
+                <a:cs typeface="+mn-cs"/>
+              </a:defRPr>
+            </a:lvl7pPr>
+            <a:lvl8pPr marL="3200400" algn="l" defTabSz="914400" rtl="0" eaLnBrk="1" latinLnBrk="0" hangingPunct="1">
+              <a:defRPr kumimoji="1" sz="1800" kern="1200">
+                <a:solidFill>
+                  <a:schemeClr val="tx1"/>
+                </a:solidFill>
+                <a:latin typeface="+mn-lt"/>
+                <a:ea typeface="+mn-ea"/>
+                <a:cs typeface="+mn-cs"/>
+              </a:defRPr>
+            </a:lvl8pPr>
+            <a:lvl9pPr marL="3657600" algn="l" defTabSz="914400" rtl="0" eaLnBrk="1" latinLnBrk="0" hangingPunct="1">
+              <a:defRPr kumimoji="1" sz="1800" kern="1200">
+                <a:solidFill>
+                  <a:schemeClr val="tx1"/>
+                </a:solidFill>
+                <a:latin typeface="+mn-lt"/>
+                <a:ea typeface="+mn-ea"/>
+                <a:cs typeface="+mn-cs"/>
+              </a:defRPr>
+            </a:lvl9pPr>
+          </a:lstStyle>
+          <a:p>
+            <a:r>
+              <a:rPr lang="ja-JP" altLang="en-US" sz="3600" b="0" i="0" u="none" strike="noStrike" baseline="0">
+                <a:solidFill>
+                  <a:srgbClr val="404040"/>
+                </a:solidFill>
+                <a:latin typeface="+mn-ea"/>
+              </a:rPr>
+              <a:t>今回の検証で点灯遅延が</a:t>
+            </a:r>
+            <a:r>
+              <a:rPr lang="en-US" altLang="ja-JP" sz="3600" b="0" i="0" u="none" strike="noStrike" baseline="0">
+                <a:solidFill>
+                  <a:srgbClr val="404040"/>
+                </a:solidFill>
+                <a:latin typeface="+mn-ea"/>
+              </a:rPr>
+              <a:t>45ms</a:t>
+            </a:r>
+          </a:p>
+          <a:p>
+            <a:r>
+              <a:rPr lang="ja-JP" altLang="en-US" sz="3600" b="0" i="0" u="none" strike="noStrike" baseline="0">
+                <a:solidFill>
+                  <a:srgbClr val="404040"/>
+                </a:solidFill>
+                <a:latin typeface="+mn-ea"/>
+              </a:rPr>
+              <a:t>以内に</a:t>
+            </a:r>
+            <a:r>
+              <a:rPr lang="ja-JP" altLang="en-US" sz="3600">
+                <a:solidFill>
+                  <a:srgbClr val="404040"/>
+                </a:solidFill>
+                <a:latin typeface="+mn-ea"/>
+              </a:rPr>
+              <a:t>収まる</a:t>
+            </a:r>
+            <a:r>
+              <a:rPr lang="ja-JP" altLang="en-US" sz="3600" b="0" i="0" u="none" strike="noStrike" baseline="0">
+                <a:solidFill>
+                  <a:srgbClr val="404040"/>
+                </a:solidFill>
+                <a:latin typeface="+mn-ea"/>
+              </a:rPr>
+              <a:t>ことが確認された．</a:t>
+            </a:r>
+            <a:endParaRPr lang="en-US" altLang="ja-JP" sz="3600">
+              <a:solidFill>
+                <a:srgbClr val="404040"/>
+              </a:solidFill>
+              <a:latin typeface="+mn-ea"/>
+            </a:endParaRPr>
+          </a:p>
+        </p:txBody>
+      </p:sp>
+      <p:sp>
+        <p:nvSpPr>
+          <p:cNvPr id="5" name="Rectangle: Rounded Corners 7">
+            <a:extLst>
+              <a:ext uri="{FF2B5EF4-FFF2-40B4-BE49-F238E27FC236}">
+                <a16:creationId xmlns:a16="http://schemas.microsoft.com/office/drawing/2014/main" id="{3F05BA43-DB1C-BEAF-D93C-E45131263D61}"/>
+              </a:ext>
+            </a:extLst>
+          </p:cNvPr>
+          <p:cNvSpPr/>
+          <p:nvPr/>
+        </p:nvSpPr>
+        <p:spPr>
+          <a:xfrm>
+            <a:off x="994146" y="1255649"/>
+            <a:ext cx="3236685" cy="1106714"/>
+          </a:xfrm>
+          <a:prstGeom prst="roundRect">
+            <a:avLst/>
+          </a:prstGeom>
+          <a:solidFill>
+            <a:schemeClr val="bg1"/>
+          </a:solidFill>
+          <a:ln w="28575">
+            <a:solidFill>
+              <a:schemeClr val="accent2"/>
+            </a:solidFill>
+          </a:ln>
+        </p:spPr>
+        <p:style>
+          <a:lnRef idx="2">
+            <a:schemeClr val="accent1">
+              <a:shade val="15000"/>
+            </a:schemeClr>
+          </a:lnRef>
+          <a:fillRef idx="1">
+            <a:schemeClr val="accent1"/>
+          </a:fillRef>
+          <a:effectRef idx="0">
+            <a:schemeClr val="accent1"/>
+          </a:effectRef>
+          <a:fontRef idx="minor">
+            <a:schemeClr val="lt1"/>
+          </a:fontRef>
+        </p:style>
+        <p:txBody>
+          <a:bodyPr lIns="91440" tIns="45720" rIns="91440" bIns="45720" rtlCol="0" anchor="ctr"/>
+          <a:lstStyle>
+            <a:defPPr>
+              <a:defRPr lang="ja-JP"/>
+            </a:defPPr>
+            <a:lvl1pPr marL="0" algn="l" defTabSz="914400" rtl="0" eaLnBrk="1" latinLnBrk="0" hangingPunct="1">
+              <a:defRPr kumimoji="1" sz="1800" kern="1200">
+                <a:solidFill>
+                  <a:schemeClr val="lt1"/>
+                </a:solidFill>
+                <a:latin typeface="+mn-lt"/>
+                <a:ea typeface="+mn-ea"/>
+                <a:cs typeface="+mn-cs"/>
+              </a:defRPr>
+            </a:lvl1pPr>
+            <a:lvl2pPr marL="457200" algn="l" defTabSz="914400" rtl="0" eaLnBrk="1" latinLnBrk="0" hangingPunct="1">
+              <a:defRPr kumimoji="1" sz="1800" kern="1200">
+                <a:solidFill>
+                  <a:schemeClr val="lt1"/>
+                </a:solidFill>
+                <a:latin typeface="+mn-lt"/>
+                <a:ea typeface="+mn-ea"/>
+                <a:cs typeface="+mn-cs"/>
+              </a:defRPr>
+            </a:lvl2pPr>
+            <a:lvl3pPr marL="914400" algn="l" defTabSz="914400" rtl="0" eaLnBrk="1" latinLnBrk="0" hangingPunct="1">
+              <a:defRPr kumimoji="1" sz="1800" kern="1200">
+                <a:solidFill>
+                  <a:schemeClr val="lt1"/>
+                </a:solidFill>
+                <a:latin typeface="+mn-lt"/>
+                <a:ea typeface="+mn-ea"/>
+                <a:cs typeface="+mn-cs"/>
+              </a:defRPr>
+            </a:lvl3pPr>
+            <a:lvl4pPr marL="1371600" algn="l" defTabSz="914400" rtl="0" eaLnBrk="1" latinLnBrk="0" hangingPunct="1">
+              <a:defRPr kumimoji="1" sz="1800" kern="1200">
+                <a:solidFill>
+                  <a:schemeClr val="lt1"/>
+                </a:solidFill>
+                <a:latin typeface="+mn-lt"/>
+                <a:ea typeface="+mn-ea"/>
+                <a:cs typeface="+mn-cs"/>
+              </a:defRPr>
+            </a:lvl4pPr>
+            <a:lvl5pPr marL="1828800" algn="l" defTabSz="914400" rtl="0" eaLnBrk="1" latinLnBrk="0" hangingPunct="1">
+              <a:defRPr kumimoji="1" sz="1800" kern="1200">
+                <a:solidFill>
+                  <a:schemeClr val="lt1"/>
+                </a:solidFill>
+                <a:latin typeface="+mn-lt"/>
+                <a:ea typeface="+mn-ea"/>
+                <a:cs typeface="+mn-cs"/>
+              </a:defRPr>
+            </a:lvl5pPr>
+            <a:lvl6pPr marL="2286000" algn="l" defTabSz="914400" rtl="0" eaLnBrk="1" latinLnBrk="0" hangingPunct="1">
+              <a:defRPr kumimoji="1" sz="1800" kern="1200">
+                <a:solidFill>
+                  <a:schemeClr val="lt1"/>
+                </a:solidFill>
+                <a:latin typeface="+mn-lt"/>
+                <a:ea typeface="+mn-ea"/>
+                <a:cs typeface="+mn-cs"/>
+              </a:defRPr>
+            </a:lvl6pPr>
+            <a:lvl7pPr marL="2743200" algn="l" defTabSz="914400" rtl="0" eaLnBrk="1" latinLnBrk="0" hangingPunct="1">
+              <a:defRPr kumimoji="1" sz="1800" kern="1200">
+                <a:solidFill>
+                  <a:schemeClr val="lt1"/>
+                </a:solidFill>
+                <a:latin typeface="+mn-lt"/>
+                <a:ea typeface="+mn-ea"/>
+                <a:cs typeface="+mn-cs"/>
+              </a:defRPr>
+            </a:lvl7pPr>
+            <a:lvl8pPr marL="3200400" algn="l" defTabSz="914400" rtl="0" eaLnBrk="1" latinLnBrk="0" hangingPunct="1">
+              <a:defRPr kumimoji="1" sz="1800" kern="1200">
+                <a:solidFill>
+                  <a:schemeClr val="lt1"/>
+                </a:solidFill>
+                <a:latin typeface="+mn-lt"/>
+                <a:ea typeface="+mn-ea"/>
+                <a:cs typeface="+mn-cs"/>
+              </a:defRPr>
+            </a:lvl8pPr>
+            <a:lvl9pPr marL="3657600" algn="l" defTabSz="914400" rtl="0" eaLnBrk="1" latinLnBrk="0" hangingPunct="1">
+              <a:defRPr kumimoji="1" sz="1800" kern="1200">
+                <a:solidFill>
+                  <a:schemeClr val="lt1"/>
+                </a:solidFill>
+                <a:latin typeface="+mn-lt"/>
+                <a:ea typeface="+mn-ea"/>
+                <a:cs typeface="+mn-cs"/>
+              </a:defRPr>
+            </a:lvl9pPr>
+          </a:lstStyle>
+          <a:p>
+            <a:pPr algn="ctr"/>
+            <a:r>
+              <a:rPr lang="ja-JP" altLang="en-US" sz="3600" b="1">
+                <a:solidFill>
+                  <a:srgbClr val="000000"/>
+                </a:solidFill>
+                <a:ea typeface="ＭＳ Ｐゴシック"/>
+                <a:cs typeface="Calibri"/>
+              </a:rPr>
+              <a:t>点灯遅延</a:t>
+            </a:r>
+          </a:p>
+        </p:txBody>
+      </p:sp>
+      <p:sp>
+        <p:nvSpPr>
+          <p:cNvPr id="6" name="正方形/長方形 5">
+            <a:extLst>
+              <a:ext uri="{FF2B5EF4-FFF2-40B4-BE49-F238E27FC236}">
+                <a16:creationId xmlns:a16="http://schemas.microsoft.com/office/drawing/2014/main" id="{C0E7F769-2598-2D34-1D6F-BAD5A3521A90}"/>
+              </a:ext>
+            </a:extLst>
+          </p:cNvPr>
+          <p:cNvSpPr/>
+          <p:nvPr/>
+        </p:nvSpPr>
+        <p:spPr>
+          <a:xfrm>
+            <a:off x="674682" y="2640412"/>
+            <a:ext cx="2154476" cy="1415442"/>
+          </a:xfrm>
+          <a:prstGeom prst="rect">
+            <a:avLst/>
+          </a:prstGeom>
+          <a:ln w="38100">
+            <a:solidFill>
+              <a:schemeClr val="tx1"/>
+            </a:solidFill>
+          </a:ln>
+        </p:spPr>
+        <p:style>
+          <a:lnRef idx="2">
+            <a:schemeClr val="accent6"/>
+          </a:lnRef>
+          <a:fillRef idx="1">
+            <a:schemeClr val="lt1"/>
+          </a:fillRef>
+          <a:effectRef idx="0">
+            <a:schemeClr val="accent6"/>
+          </a:effectRef>
+          <a:fontRef idx="minor">
+            <a:schemeClr val="dk1"/>
+          </a:fontRef>
+        </p:style>
+        <p:txBody>
+          <a:bodyPr rtlCol="0" anchor="ctr"/>
+          <a:lstStyle>
+            <a:defPPr>
+              <a:defRPr lang="ja-JP"/>
+            </a:defPPr>
+            <a:lvl1pPr marL="0" algn="l" defTabSz="914400" rtl="0" eaLnBrk="1" latinLnBrk="0" hangingPunct="1">
+              <a:defRPr kumimoji="1" sz="1800" kern="1200">
+                <a:solidFill>
+                  <a:schemeClr val="dk1"/>
+                </a:solidFill>
+                <a:latin typeface="+mn-lt"/>
+                <a:ea typeface="+mn-ea"/>
+                <a:cs typeface="+mn-cs"/>
+              </a:defRPr>
+            </a:lvl1pPr>
+            <a:lvl2pPr marL="457200" algn="l" defTabSz="914400" rtl="0" eaLnBrk="1" latinLnBrk="0" hangingPunct="1">
+              <a:defRPr kumimoji="1" sz="1800" kern="1200">
+                <a:solidFill>
+                  <a:schemeClr val="dk1"/>
+                </a:solidFill>
+                <a:latin typeface="+mn-lt"/>
+                <a:ea typeface="+mn-ea"/>
+                <a:cs typeface="+mn-cs"/>
+              </a:defRPr>
+            </a:lvl2pPr>
+            <a:lvl3pPr marL="914400" algn="l" defTabSz="914400" rtl="0" eaLnBrk="1" latinLnBrk="0" hangingPunct="1">
+              <a:defRPr kumimoji="1" sz="1800" kern="1200">
+                <a:solidFill>
+                  <a:schemeClr val="dk1"/>
+                </a:solidFill>
+                <a:latin typeface="+mn-lt"/>
+                <a:ea typeface="+mn-ea"/>
+                <a:cs typeface="+mn-cs"/>
+              </a:defRPr>
+            </a:lvl3pPr>
+            <a:lvl4pPr marL="1371600" algn="l" defTabSz="914400" rtl="0" eaLnBrk="1" latinLnBrk="0" hangingPunct="1">
+              <a:defRPr kumimoji="1" sz="1800" kern="1200">
+                <a:solidFill>
+                  <a:schemeClr val="dk1"/>
+                </a:solidFill>
+                <a:latin typeface="+mn-lt"/>
+                <a:ea typeface="+mn-ea"/>
+                <a:cs typeface="+mn-cs"/>
+              </a:defRPr>
+            </a:lvl4pPr>
+            <a:lvl5pPr marL="1828800" algn="l" defTabSz="914400" rtl="0" eaLnBrk="1" latinLnBrk="0" hangingPunct="1">
+              <a:defRPr kumimoji="1" sz="1800" kern="1200">
+                <a:solidFill>
+                  <a:schemeClr val="dk1"/>
+                </a:solidFill>
+                <a:latin typeface="+mn-lt"/>
+                <a:ea typeface="+mn-ea"/>
+                <a:cs typeface="+mn-cs"/>
+              </a:defRPr>
+            </a:lvl5pPr>
+            <a:lvl6pPr marL="2286000" algn="l" defTabSz="914400" rtl="0" eaLnBrk="1" latinLnBrk="0" hangingPunct="1">
+              <a:defRPr kumimoji="1" sz="1800" kern="1200">
+                <a:solidFill>
+                  <a:schemeClr val="dk1"/>
+                </a:solidFill>
+                <a:latin typeface="+mn-lt"/>
+                <a:ea typeface="+mn-ea"/>
+                <a:cs typeface="+mn-cs"/>
+              </a:defRPr>
+            </a:lvl6pPr>
+            <a:lvl7pPr marL="2743200" algn="l" defTabSz="914400" rtl="0" eaLnBrk="1" latinLnBrk="0" hangingPunct="1">
+              <a:defRPr kumimoji="1" sz="1800" kern="1200">
+                <a:solidFill>
+                  <a:schemeClr val="dk1"/>
+                </a:solidFill>
+                <a:latin typeface="+mn-lt"/>
+                <a:ea typeface="+mn-ea"/>
+                <a:cs typeface="+mn-cs"/>
+              </a:defRPr>
+            </a:lvl7pPr>
+            <a:lvl8pPr marL="3200400" algn="l" defTabSz="914400" rtl="0" eaLnBrk="1" latinLnBrk="0" hangingPunct="1">
+              <a:defRPr kumimoji="1" sz="1800" kern="1200">
+                <a:solidFill>
+                  <a:schemeClr val="dk1"/>
+                </a:solidFill>
+                <a:latin typeface="+mn-lt"/>
+                <a:ea typeface="+mn-ea"/>
+                <a:cs typeface="+mn-cs"/>
+              </a:defRPr>
+            </a:lvl8pPr>
+            <a:lvl9pPr marL="3657600" algn="l" defTabSz="914400" rtl="0" eaLnBrk="1" latinLnBrk="0" hangingPunct="1">
+              <a:defRPr kumimoji="1" sz="1800" kern="1200">
+                <a:solidFill>
+                  <a:schemeClr val="dk1"/>
+                </a:solidFill>
+                <a:latin typeface="+mn-lt"/>
+                <a:ea typeface="+mn-ea"/>
+                <a:cs typeface="+mn-cs"/>
+              </a:defRPr>
+            </a:lvl9pPr>
+          </a:lstStyle>
+          <a:p>
+            <a:pPr algn="ctr"/>
+            <a:endParaRPr kumimoji="1" lang="ja-JP" altLang="en-US"/>
+          </a:p>
+        </p:txBody>
+      </p:sp>
+      <p:sp>
+        <p:nvSpPr>
+          <p:cNvPr id="7" name="正方形/長方形 6">
+            <a:extLst>
+              <a:ext uri="{FF2B5EF4-FFF2-40B4-BE49-F238E27FC236}">
+                <a16:creationId xmlns:a16="http://schemas.microsoft.com/office/drawing/2014/main" id="{880FB7A1-B261-4BF4-57D3-BD4094A6774F}"/>
+              </a:ext>
+            </a:extLst>
+          </p:cNvPr>
+          <p:cNvSpPr/>
+          <p:nvPr/>
+        </p:nvSpPr>
+        <p:spPr>
+          <a:xfrm>
+            <a:off x="1754682" y="3180412"/>
+            <a:ext cx="2154476" cy="1415442"/>
+          </a:xfrm>
+          <a:prstGeom prst="rect">
+            <a:avLst/>
+          </a:prstGeom>
+          <a:ln w="38100">
+            <a:solidFill>
+              <a:schemeClr val="tx1"/>
+            </a:solidFill>
+          </a:ln>
+        </p:spPr>
+        <p:style>
+          <a:lnRef idx="2">
+            <a:schemeClr val="accent6"/>
+          </a:lnRef>
+          <a:fillRef idx="1">
+            <a:schemeClr val="lt1"/>
+          </a:fillRef>
+          <a:effectRef idx="0">
+            <a:schemeClr val="accent6"/>
+          </a:effectRef>
+          <a:fontRef idx="minor">
+            <a:schemeClr val="dk1"/>
+          </a:fontRef>
+        </p:style>
+        <p:txBody>
+          <a:bodyPr rtlCol="0" anchor="ctr"/>
+          <a:lstStyle>
+            <a:defPPr>
+              <a:defRPr lang="ja-JP"/>
+            </a:defPPr>
+            <a:lvl1pPr marL="0" algn="l" defTabSz="914400" rtl="0" eaLnBrk="1" latinLnBrk="0" hangingPunct="1">
+              <a:defRPr kumimoji="1" sz="1800" kern="1200">
+                <a:solidFill>
+                  <a:schemeClr val="dk1"/>
+                </a:solidFill>
+                <a:latin typeface="+mn-lt"/>
+                <a:ea typeface="+mn-ea"/>
+                <a:cs typeface="+mn-cs"/>
+              </a:defRPr>
+            </a:lvl1pPr>
+            <a:lvl2pPr marL="457200" algn="l" defTabSz="914400" rtl="0" eaLnBrk="1" latinLnBrk="0" hangingPunct="1">
+              <a:defRPr kumimoji="1" sz="1800" kern="1200">
+                <a:solidFill>
+                  <a:schemeClr val="dk1"/>
+                </a:solidFill>
+                <a:latin typeface="+mn-lt"/>
+                <a:ea typeface="+mn-ea"/>
+                <a:cs typeface="+mn-cs"/>
+              </a:defRPr>
+            </a:lvl2pPr>
+            <a:lvl3pPr marL="914400" algn="l" defTabSz="914400" rtl="0" eaLnBrk="1" latinLnBrk="0" hangingPunct="1">
+              <a:defRPr kumimoji="1" sz="1800" kern="1200">
+                <a:solidFill>
+                  <a:schemeClr val="dk1"/>
+                </a:solidFill>
+                <a:latin typeface="+mn-lt"/>
+                <a:ea typeface="+mn-ea"/>
+                <a:cs typeface="+mn-cs"/>
+              </a:defRPr>
+            </a:lvl3pPr>
+            <a:lvl4pPr marL="1371600" algn="l" defTabSz="914400" rtl="0" eaLnBrk="1" latinLnBrk="0" hangingPunct="1">
+              <a:defRPr kumimoji="1" sz="1800" kern="1200">
+                <a:solidFill>
+                  <a:schemeClr val="dk1"/>
+                </a:solidFill>
+                <a:latin typeface="+mn-lt"/>
+                <a:ea typeface="+mn-ea"/>
+                <a:cs typeface="+mn-cs"/>
+              </a:defRPr>
+            </a:lvl4pPr>
+            <a:lvl5pPr marL="1828800" algn="l" defTabSz="914400" rtl="0" eaLnBrk="1" latinLnBrk="0" hangingPunct="1">
+              <a:defRPr kumimoji="1" sz="1800" kern="1200">
+                <a:solidFill>
+                  <a:schemeClr val="dk1"/>
+                </a:solidFill>
+                <a:latin typeface="+mn-lt"/>
+                <a:ea typeface="+mn-ea"/>
+                <a:cs typeface="+mn-cs"/>
+              </a:defRPr>
+            </a:lvl5pPr>
+            <a:lvl6pPr marL="2286000" algn="l" defTabSz="914400" rtl="0" eaLnBrk="1" latinLnBrk="0" hangingPunct="1">
+              <a:defRPr kumimoji="1" sz="1800" kern="1200">
+                <a:solidFill>
+                  <a:schemeClr val="dk1"/>
+                </a:solidFill>
+                <a:latin typeface="+mn-lt"/>
+                <a:ea typeface="+mn-ea"/>
+                <a:cs typeface="+mn-cs"/>
+              </a:defRPr>
+            </a:lvl6pPr>
+            <a:lvl7pPr marL="2743200" algn="l" defTabSz="914400" rtl="0" eaLnBrk="1" latinLnBrk="0" hangingPunct="1">
+              <a:defRPr kumimoji="1" sz="1800" kern="1200">
+                <a:solidFill>
+                  <a:schemeClr val="dk1"/>
+                </a:solidFill>
+                <a:latin typeface="+mn-lt"/>
+                <a:ea typeface="+mn-ea"/>
+                <a:cs typeface="+mn-cs"/>
+              </a:defRPr>
+            </a:lvl7pPr>
+            <a:lvl8pPr marL="3200400" algn="l" defTabSz="914400" rtl="0" eaLnBrk="1" latinLnBrk="0" hangingPunct="1">
+              <a:defRPr kumimoji="1" sz="1800" kern="1200">
+                <a:solidFill>
+                  <a:schemeClr val="dk1"/>
+                </a:solidFill>
+                <a:latin typeface="+mn-lt"/>
+                <a:ea typeface="+mn-ea"/>
+                <a:cs typeface="+mn-cs"/>
+              </a:defRPr>
+            </a:lvl8pPr>
+            <a:lvl9pPr marL="3657600" algn="l" defTabSz="914400" rtl="0" eaLnBrk="1" latinLnBrk="0" hangingPunct="1">
+              <a:defRPr kumimoji="1" sz="1800" kern="1200">
+                <a:solidFill>
+                  <a:schemeClr val="dk1"/>
+                </a:solidFill>
+                <a:latin typeface="+mn-lt"/>
+                <a:ea typeface="+mn-ea"/>
+                <a:cs typeface="+mn-cs"/>
+              </a:defRPr>
+            </a:lvl9pPr>
+          </a:lstStyle>
+          <a:p>
+            <a:pPr algn="ctr"/>
+            <a:endParaRPr kumimoji="1" lang="ja-JP" altLang="en-US"/>
+          </a:p>
+        </p:txBody>
+      </p:sp>
+      <p:sp>
+        <p:nvSpPr>
+          <p:cNvPr id="8" name="正方形/長方形 7">
+            <a:extLst>
+              <a:ext uri="{FF2B5EF4-FFF2-40B4-BE49-F238E27FC236}">
+                <a16:creationId xmlns:a16="http://schemas.microsoft.com/office/drawing/2014/main" id="{5936AD53-3B36-7456-0667-20D434F3ED94}"/>
+              </a:ext>
+            </a:extLst>
+          </p:cNvPr>
+          <p:cNvSpPr/>
+          <p:nvPr/>
+        </p:nvSpPr>
+        <p:spPr>
+          <a:xfrm>
+            <a:off x="2834682" y="3720412"/>
+            <a:ext cx="2154476" cy="1415442"/>
+          </a:xfrm>
+          <a:prstGeom prst="rect">
+            <a:avLst/>
+          </a:prstGeom>
+          <a:ln w="38100">
+            <a:solidFill>
+              <a:schemeClr val="tx1"/>
+            </a:solidFill>
+          </a:ln>
+        </p:spPr>
+        <p:style>
+          <a:lnRef idx="2">
+            <a:schemeClr val="accent6"/>
+          </a:lnRef>
+          <a:fillRef idx="1">
+            <a:schemeClr val="lt1"/>
+          </a:fillRef>
+          <a:effectRef idx="0">
+            <a:schemeClr val="accent6"/>
+          </a:effectRef>
+          <a:fontRef idx="minor">
+            <a:schemeClr val="dk1"/>
+          </a:fontRef>
+        </p:style>
+        <p:txBody>
+          <a:bodyPr rtlCol="0" anchor="ctr"/>
+          <a:lstStyle>
+            <a:defPPr>
+              <a:defRPr lang="ja-JP"/>
+            </a:defPPr>
+            <a:lvl1pPr marL="0" algn="l" defTabSz="914400" rtl="0" eaLnBrk="1" latinLnBrk="0" hangingPunct="1">
+              <a:defRPr kumimoji="1" sz="1800" kern="1200">
+                <a:solidFill>
+                  <a:schemeClr val="dk1"/>
+                </a:solidFill>
+                <a:latin typeface="+mn-lt"/>
+                <a:ea typeface="+mn-ea"/>
+                <a:cs typeface="+mn-cs"/>
+              </a:defRPr>
+            </a:lvl1pPr>
+            <a:lvl2pPr marL="457200" algn="l" defTabSz="914400" rtl="0" eaLnBrk="1" latinLnBrk="0" hangingPunct="1">
+              <a:defRPr kumimoji="1" sz="1800" kern="1200">
+                <a:solidFill>
+                  <a:schemeClr val="dk1"/>
+                </a:solidFill>
+                <a:latin typeface="+mn-lt"/>
+                <a:ea typeface="+mn-ea"/>
+                <a:cs typeface="+mn-cs"/>
+              </a:defRPr>
+            </a:lvl2pPr>
+            <a:lvl3pPr marL="914400" algn="l" defTabSz="914400" rtl="0" eaLnBrk="1" latinLnBrk="0" hangingPunct="1">
+              <a:defRPr kumimoji="1" sz="1800" kern="1200">
+                <a:solidFill>
+                  <a:schemeClr val="dk1"/>
+                </a:solidFill>
+                <a:latin typeface="+mn-lt"/>
+                <a:ea typeface="+mn-ea"/>
+                <a:cs typeface="+mn-cs"/>
+              </a:defRPr>
+            </a:lvl3pPr>
+            <a:lvl4pPr marL="1371600" algn="l" defTabSz="914400" rtl="0" eaLnBrk="1" latinLnBrk="0" hangingPunct="1">
+              <a:defRPr kumimoji="1" sz="1800" kern="1200">
+                <a:solidFill>
+                  <a:schemeClr val="dk1"/>
+                </a:solidFill>
+                <a:latin typeface="+mn-lt"/>
+                <a:ea typeface="+mn-ea"/>
+                <a:cs typeface="+mn-cs"/>
+              </a:defRPr>
+            </a:lvl4pPr>
+            <a:lvl5pPr marL="1828800" algn="l" defTabSz="914400" rtl="0" eaLnBrk="1" latinLnBrk="0" hangingPunct="1">
+              <a:defRPr kumimoji="1" sz="1800" kern="1200">
+                <a:solidFill>
+                  <a:schemeClr val="dk1"/>
+                </a:solidFill>
+                <a:latin typeface="+mn-lt"/>
+                <a:ea typeface="+mn-ea"/>
+                <a:cs typeface="+mn-cs"/>
+              </a:defRPr>
+            </a:lvl5pPr>
+            <a:lvl6pPr marL="2286000" algn="l" defTabSz="914400" rtl="0" eaLnBrk="1" latinLnBrk="0" hangingPunct="1">
+              <a:defRPr kumimoji="1" sz="1800" kern="1200">
+                <a:solidFill>
+                  <a:schemeClr val="dk1"/>
+                </a:solidFill>
+                <a:latin typeface="+mn-lt"/>
+                <a:ea typeface="+mn-ea"/>
+                <a:cs typeface="+mn-cs"/>
+              </a:defRPr>
+            </a:lvl6pPr>
+            <a:lvl7pPr marL="2743200" algn="l" defTabSz="914400" rtl="0" eaLnBrk="1" latinLnBrk="0" hangingPunct="1">
+              <a:defRPr kumimoji="1" sz="1800" kern="1200">
+                <a:solidFill>
+                  <a:schemeClr val="dk1"/>
+                </a:solidFill>
+                <a:latin typeface="+mn-lt"/>
+                <a:ea typeface="+mn-ea"/>
+                <a:cs typeface="+mn-cs"/>
+              </a:defRPr>
+            </a:lvl7pPr>
+            <a:lvl8pPr marL="3200400" algn="l" defTabSz="914400" rtl="0" eaLnBrk="1" latinLnBrk="0" hangingPunct="1">
+              <a:defRPr kumimoji="1" sz="1800" kern="1200">
+                <a:solidFill>
+                  <a:schemeClr val="dk1"/>
+                </a:solidFill>
+                <a:latin typeface="+mn-lt"/>
+                <a:ea typeface="+mn-ea"/>
+                <a:cs typeface="+mn-cs"/>
+              </a:defRPr>
+            </a:lvl8pPr>
+            <a:lvl9pPr marL="3657600" algn="l" defTabSz="914400" rtl="0" eaLnBrk="1" latinLnBrk="0" hangingPunct="1">
+              <a:defRPr kumimoji="1" sz="1800" kern="1200">
+                <a:solidFill>
+                  <a:schemeClr val="dk1"/>
+                </a:solidFill>
+                <a:latin typeface="+mn-lt"/>
+                <a:ea typeface="+mn-ea"/>
+                <a:cs typeface="+mn-cs"/>
+              </a:defRPr>
+            </a:lvl9pPr>
+          </a:lstStyle>
+          <a:p>
+            <a:pPr algn="ctr"/>
+            <a:endParaRPr kumimoji="1" lang="ja-JP" altLang="en-US"/>
+          </a:p>
+        </p:txBody>
+      </p:sp>
+      <p:sp>
+        <p:nvSpPr>
+          <p:cNvPr id="9" name="正方形/長方形 8">
+            <a:extLst>
+              <a:ext uri="{FF2B5EF4-FFF2-40B4-BE49-F238E27FC236}">
+                <a16:creationId xmlns:a16="http://schemas.microsoft.com/office/drawing/2014/main" id="{914E32ED-5935-7690-ACED-C7DC1C856F68}"/>
+              </a:ext>
+            </a:extLst>
+          </p:cNvPr>
+          <p:cNvSpPr/>
+          <p:nvPr/>
+        </p:nvSpPr>
+        <p:spPr>
+          <a:xfrm>
+            <a:off x="3914682" y="4260412"/>
+            <a:ext cx="2154476" cy="1415442"/>
+          </a:xfrm>
+          <a:prstGeom prst="rect">
+            <a:avLst/>
+          </a:prstGeom>
+          <a:ln w="38100">
+            <a:solidFill>
+              <a:schemeClr val="tx1"/>
+            </a:solidFill>
+          </a:ln>
+        </p:spPr>
+        <p:style>
+          <a:lnRef idx="2">
+            <a:schemeClr val="accent6"/>
+          </a:lnRef>
+          <a:fillRef idx="1">
+            <a:schemeClr val="lt1"/>
+          </a:fillRef>
+          <a:effectRef idx="0">
+            <a:schemeClr val="accent6"/>
+          </a:effectRef>
+          <a:fontRef idx="minor">
+            <a:schemeClr val="dk1"/>
+          </a:fontRef>
+        </p:style>
+        <p:txBody>
+          <a:bodyPr rtlCol="0" anchor="ctr"/>
+          <a:lstStyle>
+            <a:defPPr>
+              <a:defRPr lang="ja-JP"/>
+            </a:defPPr>
+            <a:lvl1pPr marL="0" algn="l" defTabSz="914400" rtl="0" eaLnBrk="1" latinLnBrk="0" hangingPunct="1">
+              <a:defRPr kumimoji="1" sz="1800" kern="1200">
+                <a:solidFill>
+                  <a:schemeClr val="dk1"/>
+                </a:solidFill>
+                <a:latin typeface="+mn-lt"/>
+                <a:ea typeface="+mn-ea"/>
+                <a:cs typeface="+mn-cs"/>
+              </a:defRPr>
+            </a:lvl1pPr>
+            <a:lvl2pPr marL="457200" algn="l" defTabSz="914400" rtl="0" eaLnBrk="1" latinLnBrk="0" hangingPunct="1">
+              <a:defRPr kumimoji="1" sz="1800" kern="1200">
+                <a:solidFill>
+                  <a:schemeClr val="dk1"/>
+                </a:solidFill>
+                <a:latin typeface="+mn-lt"/>
+                <a:ea typeface="+mn-ea"/>
+                <a:cs typeface="+mn-cs"/>
+              </a:defRPr>
+            </a:lvl2pPr>
+            <a:lvl3pPr marL="914400" algn="l" defTabSz="914400" rtl="0" eaLnBrk="1" latinLnBrk="0" hangingPunct="1">
+              <a:defRPr kumimoji="1" sz="1800" kern="1200">
+                <a:solidFill>
+                  <a:schemeClr val="dk1"/>
+                </a:solidFill>
+                <a:latin typeface="+mn-lt"/>
+                <a:ea typeface="+mn-ea"/>
+                <a:cs typeface="+mn-cs"/>
+              </a:defRPr>
+            </a:lvl3pPr>
+            <a:lvl4pPr marL="1371600" algn="l" defTabSz="914400" rtl="0" eaLnBrk="1" latinLnBrk="0" hangingPunct="1">
+              <a:defRPr kumimoji="1" sz="1800" kern="1200">
+                <a:solidFill>
+                  <a:schemeClr val="dk1"/>
+                </a:solidFill>
+                <a:latin typeface="+mn-lt"/>
+                <a:ea typeface="+mn-ea"/>
+                <a:cs typeface="+mn-cs"/>
+              </a:defRPr>
+            </a:lvl4pPr>
+            <a:lvl5pPr marL="1828800" algn="l" defTabSz="914400" rtl="0" eaLnBrk="1" latinLnBrk="0" hangingPunct="1">
+              <a:defRPr kumimoji="1" sz="1800" kern="1200">
+                <a:solidFill>
+                  <a:schemeClr val="dk1"/>
+                </a:solidFill>
+                <a:latin typeface="+mn-lt"/>
+                <a:ea typeface="+mn-ea"/>
+                <a:cs typeface="+mn-cs"/>
+              </a:defRPr>
+            </a:lvl5pPr>
+            <a:lvl6pPr marL="2286000" algn="l" defTabSz="914400" rtl="0" eaLnBrk="1" latinLnBrk="0" hangingPunct="1">
+              <a:defRPr kumimoji="1" sz="1800" kern="1200">
+                <a:solidFill>
+                  <a:schemeClr val="dk1"/>
+                </a:solidFill>
+                <a:latin typeface="+mn-lt"/>
+                <a:ea typeface="+mn-ea"/>
+                <a:cs typeface="+mn-cs"/>
+              </a:defRPr>
+            </a:lvl6pPr>
+            <a:lvl7pPr marL="2743200" algn="l" defTabSz="914400" rtl="0" eaLnBrk="1" latinLnBrk="0" hangingPunct="1">
+              <a:defRPr kumimoji="1" sz="1800" kern="1200">
+                <a:solidFill>
+                  <a:schemeClr val="dk1"/>
+                </a:solidFill>
+                <a:latin typeface="+mn-lt"/>
+                <a:ea typeface="+mn-ea"/>
+                <a:cs typeface="+mn-cs"/>
+              </a:defRPr>
+            </a:lvl7pPr>
+            <a:lvl8pPr marL="3200400" algn="l" defTabSz="914400" rtl="0" eaLnBrk="1" latinLnBrk="0" hangingPunct="1">
+              <a:defRPr kumimoji="1" sz="1800" kern="1200">
+                <a:solidFill>
+                  <a:schemeClr val="dk1"/>
+                </a:solidFill>
+                <a:latin typeface="+mn-lt"/>
+                <a:ea typeface="+mn-ea"/>
+                <a:cs typeface="+mn-cs"/>
+              </a:defRPr>
+            </a:lvl8pPr>
+            <a:lvl9pPr marL="3657600" algn="l" defTabSz="914400" rtl="0" eaLnBrk="1" latinLnBrk="0" hangingPunct="1">
+              <a:defRPr kumimoji="1" sz="1800" kern="1200">
+                <a:solidFill>
+                  <a:schemeClr val="dk1"/>
+                </a:solidFill>
+                <a:latin typeface="+mn-lt"/>
+                <a:ea typeface="+mn-ea"/>
+                <a:cs typeface="+mn-cs"/>
+              </a:defRPr>
+            </a:lvl9pPr>
+          </a:lstStyle>
+          <a:p>
+            <a:pPr algn="ctr"/>
+            <a:endParaRPr kumimoji="1" lang="ja-JP" altLang="en-US"/>
+          </a:p>
+        </p:txBody>
+      </p:sp>
+      <p:sp>
+        <p:nvSpPr>
+          <p:cNvPr id="10" name="正方形/長方形 9">
+            <a:extLst>
+              <a:ext uri="{FF2B5EF4-FFF2-40B4-BE49-F238E27FC236}">
+                <a16:creationId xmlns:a16="http://schemas.microsoft.com/office/drawing/2014/main" id="{1EC1ECE1-856C-3557-EC4B-0E35B1A494F0}"/>
+              </a:ext>
+            </a:extLst>
+          </p:cNvPr>
+          <p:cNvSpPr/>
+          <p:nvPr/>
+        </p:nvSpPr>
+        <p:spPr>
+          <a:xfrm>
+            <a:off x="4994682" y="4800412"/>
+            <a:ext cx="2154476" cy="1415442"/>
+          </a:xfrm>
+          <a:prstGeom prst="rect">
+            <a:avLst/>
+          </a:prstGeom>
+          <a:ln w="38100">
+            <a:solidFill>
+              <a:schemeClr val="tx1"/>
+            </a:solidFill>
+          </a:ln>
+        </p:spPr>
+        <p:style>
+          <a:lnRef idx="2">
+            <a:schemeClr val="accent6"/>
+          </a:lnRef>
+          <a:fillRef idx="1">
+            <a:schemeClr val="lt1"/>
+          </a:fillRef>
+          <a:effectRef idx="0">
+            <a:schemeClr val="accent6"/>
+          </a:effectRef>
+          <a:fontRef idx="minor">
+            <a:schemeClr val="dk1"/>
+          </a:fontRef>
+        </p:style>
+        <p:txBody>
+          <a:bodyPr rtlCol="0" anchor="ctr"/>
+          <a:lstStyle>
+            <a:defPPr>
+              <a:defRPr lang="ja-JP"/>
+            </a:defPPr>
+            <a:lvl1pPr marL="0" algn="l" defTabSz="914400" rtl="0" eaLnBrk="1" latinLnBrk="0" hangingPunct="1">
+              <a:defRPr kumimoji="1" sz="1800" kern="1200">
+                <a:solidFill>
+                  <a:schemeClr val="dk1"/>
+                </a:solidFill>
+                <a:latin typeface="+mn-lt"/>
+                <a:ea typeface="+mn-ea"/>
+                <a:cs typeface="+mn-cs"/>
+              </a:defRPr>
+            </a:lvl1pPr>
+            <a:lvl2pPr marL="457200" algn="l" defTabSz="914400" rtl="0" eaLnBrk="1" latinLnBrk="0" hangingPunct="1">
+              <a:defRPr kumimoji="1" sz="1800" kern="1200">
+                <a:solidFill>
+                  <a:schemeClr val="dk1"/>
+                </a:solidFill>
+                <a:latin typeface="+mn-lt"/>
+                <a:ea typeface="+mn-ea"/>
+                <a:cs typeface="+mn-cs"/>
+              </a:defRPr>
+            </a:lvl2pPr>
+            <a:lvl3pPr marL="914400" algn="l" defTabSz="914400" rtl="0" eaLnBrk="1" latinLnBrk="0" hangingPunct="1">
+              <a:defRPr kumimoji="1" sz="1800" kern="1200">
+                <a:solidFill>
+                  <a:schemeClr val="dk1"/>
+                </a:solidFill>
+                <a:latin typeface="+mn-lt"/>
+                <a:ea typeface="+mn-ea"/>
+                <a:cs typeface="+mn-cs"/>
+              </a:defRPr>
+            </a:lvl3pPr>
+            <a:lvl4pPr marL="1371600" algn="l" defTabSz="914400" rtl="0" eaLnBrk="1" latinLnBrk="0" hangingPunct="1">
+              <a:defRPr kumimoji="1" sz="1800" kern="1200">
+                <a:solidFill>
+                  <a:schemeClr val="dk1"/>
+                </a:solidFill>
+                <a:latin typeface="+mn-lt"/>
+                <a:ea typeface="+mn-ea"/>
+                <a:cs typeface="+mn-cs"/>
+              </a:defRPr>
+            </a:lvl4pPr>
+            <a:lvl5pPr marL="1828800" algn="l" defTabSz="914400" rtl="0" eaLnBrk="1" latinLnBrk="0" hangingPunct="1">
+              <a:defRPr kumimoji="1" sz="1800" kern="1200">
+                <a:solidFill>
+                  <a:schemeClr val="dk1"/>
+                </a:solidFill>
+                <a:latin typeface="+mn-lt"/>
+                <a:ea typeface="+mn-ea"/>
+                <a:cs typeface="+mn-cs"/>
+              </a:defRPr>
+            </a:lvl5pPr>
+            <a:lvl6pPr marL="2286000" algn="l" defTabSz="914400" rtl="0" eaLnBrk="1" latinLnBrk="0" hangingPunct="1">
+              <a:defRPr kumimoji="1" sz="1800" kern="1200">
+                <a:solidFill>
+                  <a:schemeClr val="dk1"/>
+                </a:solidFill>
+                <a:latin typeface="+mn-lt"/>
+                <a:ea typeface="+mn-ea"/>
+                <a:cs typeface="+mn-cs"/>
+              </a:defRPr>
+            </a:lvl6pPr>
+            <a:lvl7pPr marL="2743200" algn="l" defTabSz="914400" rtl="0" eaLnBrk="1" latinLnBrk="0" hangingPunct="1">
+              <a:defRPr kumimoji="1" sz="1800" kern="1200">
+                <a:solidFill>
+                  <a:schemeClr val="dk1"/>
+                </a:solidFill>
+                <a:latin typeface="+mn-lt"/>
+                <a:ea typeface="+mn-ea"/>
+                <a:cs typeface="+mn-cs"/>
+              </a:defRPr>
+            </a:lvl7pPr>
+            <a:lvl8pPr marL="3200400" algn="l" defTabSz="914400" rtl="0" eaLnBrk="1" latinLnBrk="0" hangingPunct="1">
+              <a:defRPr kumimoji="1" sz="1800" kern="1200">
+                <a:solidFill>
+                  <a:schemeClr val="dk1"/>
+                </a:solidFill>
+                <a:latin typeface="+mn-lt"/>
+                <a:ea typeface="+mn-ea"/>
+                <a:cs typeface="+mn-cs"/>
+              </a:defRPr>
+            </a:lvl8pPr>
+            <a:lvl9pPr marL="3657600" algn="l" defTabSz="914400" rtl="0" eaLnBrk="1" latinLnBrk="0" hangingPunct="1">
+              <a:defRPr kumimoji="1" sz="1800" kern="1200">
+                <a:solidFill>
+                  <a:schemeClr val="dk1"/>
+                </a:solidFill>
+                <a:latin typeface="+mn-lt"/>
+                <a:ea typeface="+mn-ea"/>
+                <a:cs typeface="+mn-cs"/>
+              </a:defRPr>
+            </a:lvl9pPr>
+          </a:lstStyle>
+          <a:p>
+            <a:pPr algn="ctr"/>
+            <a:endParaRPr kumimoji="1" lang="ja-JP" altLang="en-US"/>
+          </a:p>
+        </p:txBody>
+      </p:sp>
+      <p:sp>
+        <p:nvSpPr>
+          <p:cNvPr id="11" name="左右矢印 10">
+            <a:extLst>
+              <a:ext uri="{FF2B5EF4-FFF2-40B4-BE49-F238E27FC236}">
+                <a16:creationId xmlns:a16="http://schemas.microsoft.com/office/drawing/2014/main" id="{EB1C4D45-9DA6-62D2-2C0A-4ADA84F0414E}"/>
+              </a:ext>
+            </a:extLst>
+          </p:cNvPr>
+          <p:cNvSpPr/>
+          <p:nvPr/>
+        </p:nvSpPr>
+        <p:spPr>
+          <a:xfrm rot="1646620">
+            <a:off x="590424" y="2816655"/>
+            <a:ext cx="1248517" cy="258306"/>
+          </a:xfrm>
+          <a:prstGeom prst="leftRightArrow">
+            <a:avLst>
+              <a:gd name="adj1" fmla="val 34906"/>
+              <a:gd name="adj2" fmla="val 50000"/>
+            </a:avLst>
+          </a:prstGeom>
+        </p:spPr>
+        <p:style>
+          <a:lnRef idx="2">
+            <a:schemeClr val="accent1">
+              <a:shade val="15000"/>
+            </a:schemeClr>
+          </a:lnRef>
+          <a:fillRef idx="1">
+            <a:schemeClr val="accent1"/>
+          </a:fillRef>
+          <a:effectRef idx="0">
+            <a:schemeClr val="accent1"/>
+          </a:effectRef>
+          <a:fontRef idx="minor">
+            <a:schemeClr val="lt1"/>
+          </a:fontRef>
+        </p:style>
+        <p:txBody>
+          <a:bodyPr rtlCol="0" anchor="ctr"/>
+          <a:lstStyle>
+            <a:defPPr>
+              <a:defRPr lang="ja-JP"/>
+            </a:defPPr>
+            <a:lvl1pPr marL="0" algn="l" defTabSz="914400" rtl="0" eaLnBrk="1" latinLnBrk="0" hangingPunct="1">
+              <a:defRPr kumimoji="1" sz="1800" kern="1200">
+                <a:solidFill>
+                  <a:schemeClr val="lt1"/>
+                </a:solidFill>
+                <a:latin typeface="+mn-lt"/>
+                <a:ea typeface="+mn-ea"/>
+                <a:cs typeface="+mn-cs"/>
+              </a:defRPr>
+            </a:lvl1pPr>
+            <a:lvl2pPr marL="457200" algn="l" defTabSz="914400" rtl="0" eaLnBrk="1" latinLnBrk="0" hangingPunct="1">
+              <a:defRPr kumimoji="1" sz="1800" kern="1200">
+                <a:solidFill>
+                  <a:schemeClr val="lt1"/>
+                </a:solidFill>
+                <a:latin typeface="+mn-lt"/>
+                <a:ea typeface="+mn-ea"/>
+                <a:cs typeface="+mn-cs"/>
+              </a:defRPr>
+            </a:lvl2pPr>
+            <a:lvl3pPr marL="914400" algn="l" defTabSz="914400" rtl="0" eaLnBrk="1" latinLnBrk="0" hangingPunct="1">
+              <a:defRPr kumimoji="1" sz="1800" kern="1200">
+                <a:solidFill>
+                  <a:schemeClr val="lt1"/>
+                </a:solidFill>
+                <a:latin typeface="+mn-lt"/>
+                <a:ea typeface="+mn-ea"/>
+                <a:cs typeface="+mn-cs"/>
+              </a:defRPr>
+            </a:lvl3pPr>
+            <a:lvl4pPr marL="1371600" algn="l" defTabSz="914400" rtl="0" eaLnBrk="1" latinLnBrk="0" hangingPunct="1">
+              <a:defRPr kumimoji="1" sz="1800" kern="1200">
+                <a:solidFill>
+                  <a:schemeClr val="lt1"/>
+                </a:solidFill>
+                <a:latin typeface="+mn-lt"/>
+                <a:ea typeface="+mn-ea"/>
+                <a:cs typeface="+mn-cs"/>
+              </a:defRPr>
+            </a:lvl4pPr>
+            <a:lvl5pPr marL="1828800" algn="l" defTabSz="914400" rtl="0" eaLnBrk="1" latinLnBrk="0" hangingPunct="1">
+              <a:defRPr kumimoji="1" sz="1800" kern="1200">
+                <a:solidFill>
+                  <a:schemeClr val="lt1"/>
+                </a:solidFill>
+                <a:latin typeface="+mn-lt"/>
+                <a:ea typeface="+mn-ea"/>
+                <a:cs typeface="+mn-cs"/>
+              </a:defRPr>
+            </a:lvl5pPr>
+            <a:lvl6pPr marL="2286000" algn="l" defTabSz="914400" rtl="0" eaLnBrk="1" latinLnBrk="0" hangingPunct="1">
+              <a:defRPr kumimoji="1" sz="1800" kern="1200">
+                <a:solidFill>
+                  <a:schemeClr val="lt1"/>
+                </a:solidFill>
+                <a:latin typeface="+mn-lt"/>
+                <a:ea typeface="+mn-ea"/>
+                <a:cs typeface="+mn-cs"/>
+              </a:defRPr>
+            </a:lvl6pPr>
+            <a:lvl7pPr marL="2743200" algn="l" defTabSz="914400" rtl="0" eaLnBrk="1" latinLnBrk="0" hangingPunct="1">
+              <a:defRPr kumimoji="1" sz="1800" kern="1200">
+                <a:solidFill>
+                  <a:schemeClr val="lt1"/>
+                </a:solidFill>
+                <a:latin typeface="+mn-lt"/>
+                <a:ea typeface="+mn-ea"/>
+                <a:cs typeface="+mn-cs"/>
+              </a:defRPr>
+            </a:lvl7pPr>
+            <a:lvl8pPr marL="3200400" algn="l" defTabSz="914400" rtl="0" eaLnBrk="1" latinLnBrk="0" hangingPunct="1">
+              <a:defRPr kumimoji="1" sz="1800" kern="1200">
+                <a:solidFill>
+                  <a:schemeClr val="lt1"/>
+                </a:solidFill>
+                <a:latin typeface="+mn-lt"/>
+                <a:ea typeface="+mn-ea"/>
+                <a:cs typeface="+mn-cs"/>
+              </a:defRPr>
+            </a:lvl8pPr>
+            <a:lvl9pPr marL="3657600" algn="l" defTabSz="914400" rtl="0" eaLnBrk="1" latinLnBrk="0" hangingPunct="1">
+              <a:defRPr kumimoji="1" sz="1800" kern="1200">
+                <a:solidFill>
+                  <a:schemeClr val="lt1"/>
+                </a:solidFill>
+                <a:latin typeface="+mn-lt"/>
+                <a:ea typeface="+mn-ea"/>
+                <a:cs typeface="+mn-cs"/>
+              </a:defRPr>
+            </a:lvl9pPr>
+          </a:lstStyle>
+          <a:p>
+            <a:pPr algn="ctr"/>
+            <a:endParaRPr kumimoji="1" lang="ja-JP" altLang="en-US"/>
+          </a:p>
+        </p:txBody>
+      </p:sp>
+      <p:sp>
+        <p:nvSpPr>
+          <p:cNvPr id="12" name="左右矢印 11">
+            <a:extLst>
+              <a:ext uri="{FF2B5EF4-FFF2-40B4-BE49-F238E27FC236}">
+                <a16:creationId xmlns:a16="http://schemas.microsoft.com/office/drawing/2014/main" id="{47CA5F07-1D9F-0E4F-79D5-D3E40AA780C1}"/>
+              </a:ext>
+            </a:extLst>
+          </p:cNvPr>
+          <p:cNvSpPr/>
+          <p:nvPr/>
+        </p:nvSpPr>
+        <p:spPr>
+          <a:xfrm rot="1646620">
+            <a:off x="1670424" y="3356656"/>
+            <a:ext cx="1248517" cy="258306"/>
+          </a:xfrm>
+          <a:prstGeom prst="leftRightArrow">
+            <a:avLst>
+              <a:gd name="adj1" fmla="val 34906"/>
+              <a:gd name="adj2" fmla="val 50000"/>
+            </a:avLst>
+          </a:prstGeom>
+        </p:spPr>
+        <p:style>
+          <a:lnRef idx="2">
+            <a:schemeClr val="accent1">
+              <a:shade val="15000"/>
+            </a:schemeClr>
+          </a:lnRef>
+          <a:fillRef idx="1">
+            <a:schemeClr val="accent1"/>
+          </a:fillRef>
+          <a:effectRef idx="0">
+            <a:schemeClr val="accent1"/>
+          </a:effectRef>
+          <a:fontRef idx="minor">
+            <a:schemeClr val="lt1"/>
+          </a:fontRef>
+        </p:style>
+        <p:txBody>
+          <a:bodyPr rtlCol="0" anchor="ctr"/>
+          <a:lstStyle>
+            <a:defPPr>
+              <a:defRPr lang="ja-JP"/>
+            </a:defPPr>
+            <a:lvl1pPr marL="0" algn="l" defTabSz="914400" rtl="0" eaLnBrk="1" latinLnBrk="0" hangingPunct="1">
+              <a:defRPr kumimoji="1" sz="1800" kern="1200">
+                <a:solidFill>
+                  <a:schemeClr val="lt1"/>
+                </a:solidFill>
+                <a:latin typeface="+mn-lt"/>
+                <a:ea typeface="+mn-ea"/>
+                <a:cs typeface="+mn-cs"/>
+              </a:defRPr>
+            </a:lvl1pPr>
+            <a:lvl2pPr marL="457200" algn="l" defTabSz="914400" rtl="0" eaLnBrk="1" latinLnBrk="0" hangingPunct="1">
+              <a:defRPr kumimoji="1" sz="1800" kern="1200">
+                <a:solidFill>
+                  <a:schemeClr val="lt1"/>
+                </a:solidFill>
+                <a:latin typeface="+mn-lt"/>
+                <a:ea typeface="+mn-ea"/>
+                <a:cs typeface="+mn-cs"/>
+              </a:defRPr>
+            </a:lvl2pPr>
+            <a:lvl3pPr marL="914400" algn="l" defTabSz="914400" rtl="0" eaLnBrk="1" latinLnBrk="0" hangingPunct="1">
+              <a:defRPr kumimoji="1" sz="1800" kern="1200">
+                <a:solidFill>
+                  <a:schemeClr val="lt1"/>
+                </a:solidFill>
+                <a:latin typeface="+mn-lt"/>
+                <a:ea typeface="+mn-ea"/>
+                <a:cs typeface="+mn-cs"/>
+              </a:defRPr>
+            </a:lvl3pPr>
+            <a:lvl4pPr marL="1371600" algn="l" defTabSz="914400" rtl="0" eaLnBrk="1" latinLnBrk="0" hangingPunct="1">
+              <a:defRPr kumimoji="1" sz="1800" kern="1200">
+                <a:solidFill>
+                  <a:schemeClr val="lt1"/>
+                </a:solidFill>
+                <a:latin typeface="+mn-lt"/>
+                <a:ea typeface="+mn-ea"/>
+                <a:cs typeface="+mn-cs"/>
+              </a:defRPr>
+            </a:lvl4pPr>
+            <a:lvl5pPr marL="1828800" algn="l" defTabSz="914400" rtl="0" eaLnBrk="1" latinLnBrk="0" hangingPunct="1">
+              <a:defRPr kumimoji="1" sz="1800" kern="1200">
+                <a:solidFill>
+                  <a:schemeClr val="lt1"/>
+                </a:solidFill>
+                <a:latin typeface="+mn-lt"/>
+                <a:ea typeface="+mn-ea"/>
+                <a:cs typeface="+mn-cs"/>
+              </a:defRPr>
+            </a:lvl5pPr>
+            <a:lvl6pPr marL="2286000" algn="l" defTabSz="914400" rtl="0" eaLnBrk="1" latinLnBrk="0" hangingPunct="1">
+              <a:defRPr kumimoji="1" sz="1800" kern="1200">
+                <a:solidFill>
+                  <a:schemeClr val="lt1"/>
+                </a:solidFill>
+                <a:latin typeface="+mn-lt"/>
+                <a:ea typeface="+mn-ea"/>
+                <a:cs typeface="+mn-cs"/>
+              </a:defRPr>
+            </a:lvl6pPr>
+            <a:lvl7pPr marL="2743200" algn="l" defTabSz="914400" rtl="0" eaLnBrk="1" latinLnBrk="0" hangingPunct="1">
+              <a:defRPr kumimoji="1" sz="1800" kern="1200">
+                <a:solidFill>
+                  <a:schemeClr val="lt1"/>
+                </a:solidFill>
+                <a:latin typeface="+mn-lt"/>
+                <a:ea typeface="+mn-ea"/>
+                <a:cs typeface="+mn-cs"/>
+              </a:defRPr>
+            </a:lvl7pPr>
+            <a:lvl8pPr marL="3200400" algn="l" defTabSz="914400" rtl="0" eaLnBrk="1" latinLnBrk="0" hangingPunct="1">
+              <a:defRPr kumimoji="1" sz="1800" kern="1200">
+                <a:solidFill>
+                  <a:schemeClr val="lt1"/>
+                </a:solidFill>
+                <a:latin typeface="+mn-lt"/>
+                <a:ea typeface="+mn-ea"/>
+                <a:cs typeface="+mn-cs"/>
+              </a:defRPr>
+            </a:lvl8pPr>
+            <a:lvl9pPr marL="3657600" algn="l" defTabSz="914400" rtl="0" eaLnBrk="1" latinLnBrk="0" hangingPunct="1">
+              <a:defRPr kumimoji="1" sz="1800" kern="1200">
+                <a:solidFill>
+                  <a:schemeClr val="lt1"/>
+                </a:solidFill>
+                <a:latin typeface="+mn-lt"/>
+                <a:ea typeface="+mn-ea"/>
+                <a:cs typeface="+mn-cs"/>
+              </a:defRPr>
+            </a:lvl9pPr>
+          </a:lstStyle>
+          <a:p>
+            <a:pPr algn="ctr"/>
+            <a:endParaRPr kumimoji="1" lang="ja-JP" altLang="en-US"/>
+          </a:p>
+        </p:txBody>
+      </p:sp>
+      <p:sp>
+        <p:nvSpPr>
+          <p:cNvPr id="13" name="左右矢印 12">
+            <a:extLst>
+              <a:ext uri="{FF2B5EF4-FFF2-40B4-BE49-F238E27FC236}">
+                <a16:creationId xmlns:a16="http://schemas.microsoft.com/office/drawing/2014/main" id="{7AFF1B03-56A9-856F-AB9C-9E936BF33CA3}"/>
+              </a:ext>
+            </a:extLst>
+          </p:cNvPr>
+          <p:cNvSpPr/>
+          <p:nvPr/>
+        </p:nvSpPr>
+        <p:spPr>
+          <a:xfrm rot="1646620">
+            <a:off x="2744900" y="3896656"/>
+            <a:ext cx="1248517" cy="258306"/>
+          </a:xfrm>
+          <a:prstGeom prst="leftRightArrow">
+            <a:avLst>
+              <a:gd name="adj1" fmla="val 34906"/>
+              <a:gd name="adj2" fmla="val 50000"/>
+            </a:avLst>
+          </a:prstGeom>
+        </p:spPr>
+        <p:style>
+          <a:lnRef idx="2">
+            <a:schemeClr val="accent1">
+              <a:shade val="15000"/>
+            </a:schemeClr>
+          </a:lnRef>
+          <a:fillRef idx="1">
+            <a:schemeClr val="accent1"/>
+          </a:fillRef>
+          <a:effectRef idx="0">
+            <a:schemeClr val="accent1"/>
+          </a:effectRef>
+          <a:fontRef idx="minor">
+            <a:schemeClr val="lt1"/>
+          </a:fontRef>
+        </p:style>
+        <p:txBody>
+          <a:bodyPr rtlCol="0" anchor="ctr"/>
+          <a:lstStyle>
+            <a:defPPr>
+              <a:defRPr lang="ja-JP"/>
+            </a:defPPr>
+            <a:lvl1pPr marL="0" algn="l" defTabSz="914400" rtl="0" eaLnBrk="1" latinLnBrk="0" hangingPunct="1">
+              <a:defRPr kumimoji="1" sz="1800" kern="1200">
+                <a:solidFill>
+                  <a:schemeClr val="lt1"/>
+                </a:solidFill>
+                <a:latin typeface="+mn-lt"/>
+                <a:ea typeface="+mn-ea"/>
+                <a:cs typeface="+mn-cs"/>
+              </a:defRPr>
+            </a:lvl1pPr>
+            <a:lvl2pPr marL="457200" algn="l" defTabSz="914400" rtl="0" eaLnBrk="1" latinLnBrk="0" hangingPunct="1">
+              <a:defRPr kumimoji="1" sz="1800" kern="1200">
+                <a:solidFill>
+                  <a:schemeClr val="lt1"/>
+                </a:solidFill>
+                <a:latin typeface="+mn-lt"/>
+                <a:ea typeface="+mn-ea"/>
+                <a:cs typeface="+mn-cs"/>
+              </a:defRPr>
+            </a:lvl2pPr>
+            <a:lvl3pPr marL="914400" algn="l" defTabSz="914400" rtl="0" eaLnBrk="1" latinLnBrk="0" hangingPunct="1">
+              <a:defRPr kumimoji="1" sz="1800" kern="1200">
+                <a:solidFill>
+                  <a:schemeClr val="lt1"/>
+                </a:solidFill>
+                <a:latin typeface="+mn-lt"/>
+                <a:ea typeface="+mn-ea"/>
+                <a:cs typeface="+mn-cs"/>
+              </a:defRPr>
+            </a:lvl3pPr>
+            <a:lvl4pPr marL="1371600" algn="l" defTabSz="914400" rtl="0" eaLnBrk="1" latinLnBrk="0" hangingPunct="1">
+              <a:defRPr kumimoji="1" sz="1800" kern="1200">
+                <a:solidFill>
+                  <a:schemeClr val="lt1"/>
+                </a:solidFill>
+                <a:latin typeface="+mn-lt"/>
+                <a:ea typeface="+mn-ea"/>
+                <a:cs typeface="+mn-cs"/>
+              </a:defRPr>
+            </a:lvl4pPr>
+            <a:lvl5pPr marL="1828800" algn="l" defTabSz="914400" rtl="0" eaLnBrk="1" latinLnBrk="0" hangingPunct="1">
+              <a:defRPr kumimoji="1" sz="1800" kern="1200">
+                <a:solidFill>
+                  <a:schemeClr val="lt1"/>
+                </a:solidFill>
+                <a:latin typeface="+mn-lt"/>
+                <a:ea typeface="+mn-ea"/>
+                <a:cs typeface="+mn-cs"/>
+              </a:defRPr>
+            </a:lvl5pPr>
+            <a:lvl6pPr marL="2286000" algn="l" defTabSz="914400" rtl="0" eaLnBrk="1" latinLnBrk="0" hangingPunct="1">
+              <a:defRPr kumimoji="1" sz="1800" kern="1200">
+                <a:solidFill>
+                  <a:schemeClr val="lt1"/>
+                </a:solidFill>
+                <a:latin typeface="+mn-lt"/>
+                <a:ea typeface="+mn-ea"/>
+                <a:cs typeface="+mn-cs"/>
+              </a:defRPr>
+            </a:lvl6pPr>
+            <a:lvl7pPr marL="2743200" algn="l" defTabSz="914400" rtl="0" eaLnBrk="1" latinLnBrk="0" hangingPunct="1">
+              <a:defRPr kumimoji="1" sz="1800" kern="1200">
+                <a:solidFill>
+                  <a:schemeClr val="lt1"/>
+                </a:solidFill>
+                <a:latin typeface="+mn-lt"/>
+                <a:ea typeface="+mn-ea"/>
+                <a:cs typeface="+mn-cs"/>
+              </a:defRPr>
+            </a:lvl7pPr>
+            <a:lvl8pPr marL="3200400" algn="l" defTabSz="914400" rtl="0" eaLnBrk="1" latinLnBrk="0" hangingPunct="1">
+              <a:defRPr kumimoji="1" sz="1800" kern="1200">
+                <a:solidFill>
+                  <a:schemeClr val="lt1"/>
+                </a:solidFill>
+                <a:latin typeface="+mn-lt"/>
+                <a:ea typeface="+mn-ea"/>
+                <a:cs typeface="+mn-cs"/>
+              </a:defRPr>
+            </a:lvl8pPr>
+            <a:lvl9pPr marL="3657600" algn="l" defTabSz="914400" rtl="0" eaLnBrk="1" latinLnBrk="0" hangingPunct="1">
+              <a:defRPr kumimoji="1" sz="1800" kern="1200">
+                <a:solidFill>
+                  <a:schemeClr val="lt1"/>
+                </a:solidFill>
+                <a:latin typeface="+mn-lt"/>
+                <a:ea typeface="+mn-ea"/>
+                <a:cs typeface="+mn-cs"/>
+              </a:defRPr>
+            </a:lvl9pPr>
+          </a:lstStyle>
+          <a:p>
+            <a:pPr algn="ctr"/>
+            <a:endParaRPr kumimoji="1" lang="ja-JP" altLang="en-US"/>
+          </a:p>
+        </p:txBody>
+      </p:sp>
+      <p:sp>
+        <p:nvSpPr>
+          <p:cNvPr id="14" name="左右矢印 13">
+            <a:extLst>
+              <a:ext uri="{FF2B5EF4-FFF2-40B4-BE49-F238E27FC236}">
+                <a16:creationId xmlns:a16="http://schemas.microsoft.com/office/drawing/2014/main" id="{57DD8587-DC9A-7E18-7B0A-98EB86C3B18F}"/>
+              </a:ext>
+            </a:extLst>
+          </p:cNvPr>
+          <p:cNvSpPr/>
+          <p:nvPr/>
+        </p:nvSpPr>
+        <p:spPr>
+          <a:xfrm rot="1646620">
+            <a:off x="3861665" y="4461201"/>
+            <a:ext cx="1248517" cy="258306"/>
+          </a:xfrm>
+          <a:prstGeom prst="leftRightArrow">
+            <a:avLst>
+              <a:gd name="adj1" fmla="val 34906"/>
+              <a:gd name="adj2" fmla="val 50000"/>
+            </a:avLst>
+          </a:prstGeom>
+        </p:spPr>
+        <p:style>
+          <a:lnRef idx="2">
+            <a:schemeClr val="accent1">
+              <a:shade val="15000"/>
+            </a:schemeClr>
+          </a:lnRef>
+          <a:fillRef idx="1">
+            <a:schemeClr val="accent1"/>
+          </a:fillRef>
+          <a:effectRef idx="0">
+            <a:schemeClr val="accent1"/>
+          </a:effectRef>
+          <a:fontRef idx="minor">
+            <a:schemeClr val="lt1"/>
+          </a:fontRef>
+        </p:style>
+        <p:txBody>
+          <a:bodyPr rtlCol="0" anchor="ctr"/>
+          <a:lstStyle>
+            <a:defPPr>
+              <a:defRPr lang="ja-JP"/>
+            </a:defPPr>
+            <a:lvl1pPr marL="0" algn="l" defTabSz="914400" rtl="0" eaLnBrk="1" latinLnBrk="0" hangingPunct="1">
+              <a:defRPr kumimoji="1" sz="1800" kern="1200">
+                <a:solidFill>
+                  <a:schemeClr val="lt1"/>
+                </a:solidFill>
+                <a:latin typeface="+mn-lt"/>
+                <a:ea typeface="+mn-ea"/>
+                <a:cs typeface="+mn-cs"/>
+              </a:defRPr>
+            </a:lvl1pPr>
+            <a:lvl2pPr marL="457200" algn="l" defTabSz="914400" rtl="0" eaLnBrk="1" latinLnBrk="0" hangingPunct="1">
+              <a:defRPr kumimoji="1" sz="1800" kern="1200">
+                <a:solidFill>
+                  <a:schemeClr val="lt1"/>
+                </a:solidFill>
+                <a:latin typeface="+mn-lt"/>
+                <a:ea typeface="+mn-ea"/>
+                <a:cs typeface="+mn-cs"/>
+              </a:defRPr>
+            </a:lvl2pPr>
+            <a:lvl3pPr marL="914400" algn="l" defTabSz="914400" rtl="0" eaLnBrk="1" latinLnBrk="0" hangingPunct="1">
+              <a:defRPr kumimoji="1" sz="1800" kern="1200">
+                <a:solidFill>
+                  <a:schemeClr val="lt1"/>
+                </a:solidFill>
+                <a:latin typeface="+mn-lt"/>
+                <a:ea typeface="+mn-ea"/>
+                <a:cs typeface="+mn-cs"/>
+              </a:defRPr>
+            </a:lvl3pPr>
+            <a:lvl4pPr marL="1371600" algn="l" defTabSz="914400" rtl="0" eaLnBrk="1" latinLnBrk="0" hangingPunct="1">
+              <a:defRPr kumimoji="1" sz="1800" kern="1200">
+                <a:solidFill>
+                  <a:schemeClr val="lt1"/>
+                </a:solidFill>
+                <a:latin typeface="+mn-lt"/>
+                <a:ea typeface="+mn-ea"/>
+                <a:cs typeface="+mn-cs"/>
+              </a:defRPr>
+            </a:lvl4pPr>
+            <a:lvl5pPr marL="1828800" algn="l" defTabSz="914400" rtl="0" eaLnBrk="1" latinLnBrk="0" hangingPunct="1">
+              <a:defRPr kumimoji="1" sz="1800" kern="1200">
+                <a:solidFill>
+                  <a:schemeClr val="lt1"/>
+                </a:solidFill>
+                <a:latin typeface="+mn-lt"/>
+                <a:ea typeface="+mn-ea"/>
+                <a:cs typeface="+mn-cs"/>
+              </a:defRPr>
+            </a:lvl5pPr>
+            <a:lvl6pPr marL="2286000" algn="l" defTabSz="914400" rtl="0" eaLnBrk="1" latinLnBrk="0" hangingPunct="1">
+              <a:defRPr kumimoji="1" sz="1800" kern="1200">
+                <a:solidFill>
+                  <a:schemeClr val="lt1"/>
+                </a:solidFill>
+                <a:latin typeface="+mn-lt"/>
+                <a:ea typeface="+mn-ea"/>
+                <a:cs typeface="+mn-cs"/>
+              </a:defRPr>
+            </a:lvl6pPr>
+            <a:lvl7pPr marL="2743200" algn="l" defTabSz="914400" rtl="0" eaLnBrk="1" latinLnBrk="0" hangingPunct="1">
+              <a:defRPr kumimoji="1" sz="1800" kern="1200">
+                <a:solidFill>
+                  <a:schemeClr val="lt1"/>
+                </a:solidFill>
+                <a:latin typeface="+mn-lt"/>
+                <a:ea typeface="+mn-ea"/>
+                <a:cs typeface="+mn-cs"/>
+              </a:defRPr>
+            </a:lvl7pPr>
+            <a:lvl8pPr marL="3200400" algn="l" defTabSz="914400" rtl="0" eaLnBrk="1" latinLnBrk="0" hangingPunct="1">
+              <a:defRPr kumimoji="1" sz="1800" kern="1200">
+                <a:solidFill>
+                  <a:schemeClr val="lt1"/>
+                </a:solidFill>
+                <a:latin typeface="+mn-lt"/>
+                <a:ea typeface="+mn-ea"/>
+                <a:cs typeface="+mn-cs"/>
+              </a:defRPr>
+            </a:lvl8pPr>
+            <a:lvl9pPr marL="3657600" algn="l" defTabSz="914400" rtl="0" eaLnBrk="1" latinLnBrk="0" hangingPunct="1">
+              <a:defRPr kumimoji="1" sz="1800" kern="1200">
+                <a:solidFill>
+                  <a:schemeClr val="lt1"/>
+                </a:solidFill>
+                <a:latin typeface="+mn-lt"/>
+                <a:ea typeface="+mn-ea"/>
+                <a:cs typeface="+mn-cs"/>
+              </a:defRPr>
+            </a:lvl9pPr>
+          </a:lstStyle>
+          <a:p>
+            <a:pPr algn="ctr"/>
+            <a:endParaRPr kumimoji="1" lang="ja-JP" altLang="en-US"/>
+          </a:p>
+        </p:txBody>
+      </p:sp>
+      <p:sp>
+        <p:nvSpPr>
+          <p:cNvPr id="15" name="TextBox 12">
+            <a:extLst>
+              <a:ext uri="{FF2B5EF4-FFF2-40B4-BE49-F238E27FC236}">
+                <a16:creationId xmlns:a16="http://schemas.microsoft.com/office/drawing/2014/main" id="{3C768109-CB9F-51EA-89A4-F76CEC3C26F9}"/>
+              </a:ext>
+            </a:extLst>
+          </p:cNvPr>
+          <p:cNvSpPr txBox="1"/>
+          <p:nvPr/>
+        </p:nvSpPr>
+        <p:spPr>
+          <a:xfrm>
+            <a:off x="613638" y="4660518"/>
+            <a:ext cx="1812503" cy="707886"/>
+          </a:xfrm>
+          <a:prstGeom prst="rect">
+            <a:avLst/>
+          </a:prstGeom>
+          <a:noFill/>
+        </p:spPr>
+        <p:txBody>
+          <a:bodyPr rot="0" spcFirstLastPara="0" vert="horz" wrap="square" lIns="91440" tIns="45720" rIns="91440" bIns="45720" numCol="1" spcCol="0" rtlCol="0" fromWordArt="0" anchor="t" anchorCtr="0" forceAA="0" compatLnSpc="1">
+            <a:prstTxWarp prst="textNoShape">
+              <a:avLst/>
+            </a:prstTxWarp>
+            <a:spAutoFit/>
+          </a:bodyPr>
+          <a:lstStyle>
+            <a:defPPr>
+              <a:defRPr lang="ja-JP"/>
+            </a:defPPr>
+            <a:lvl1pPr marL="0" algn="l" defTabSz="914400" rtl="0" eaLnBrk="1" latinLnBrk="0" hangingPunct="1">
+              <a:defRPr kumimoji="1" sz="1800" kern="1200">
+                <a:solidFill>
+                  <a:schemeClr val="tx1"/>
+                </a:solidFill>
+                <a:latin typeface="+mn-lt"/>
+                <a:ea typeface="+mn-ea"/>
+                <a:cs typeface="+mn-cs"/>
+              </a:defRPr>
+            </a:lvl1pPr>
+            <a:lvl2pPr marL="457200" algn="l" defTabSz="914400" rtl="0" eaLnBrk="1" latinLnBrk="0" hangingPunct="1">
+              <a:defRPr kumimoji="1" sz="1800" kern="1200">
+                <a:solidFill>
+                  <a:schemeClr val="tx1"/>
+                </a:solidFill>
+                <a:latin typeface="+mn-lt"/>
+                <a:ea typeface="+mn-ea"/>
+                <a:cs typeface="+mn-cs"/>
+              </a:defRPr>
+            </a:lvl2pPr>
+            <a:lvl3pPr marL="914400" algn="l" defTabSz="914400" rtl="0" eaLnBrk="1" latinLnBrk="0" hangingPunct="1">
+              <a:defRPr kumimoji="1" sz="1800" kern="1200">
+                <a:solidFill>
+                  <a:schemeClr val="tx1"/>
+                </a:solidFill>
+                <a:latin typeface="+mn-lt"/>
+                <a:ea typeface="+mn-ea"/>
+                <a:cs typeface="+mn-cs"/>
+              </a:defRPr>
+            </a:lvl3pPr>
+            <a:lvl4pPr marL="1371600" algn="l" defTabSz="914400" rtl="0" eaLnBrk="1" latinLnBrk="0" hangingPunct="1">
+              <a:defRPr kumimoji="1" sz="1800" kern="1200">
+                <a:solidFill>
+                  <a:schemeClr val="tx1"/>
+                </a:solidFill>
+                <a:latin typeface="+mn-lt"/>
+                <a:ea typeface="+mn-ea"/>
+                <a:cs typeface="+mn-cs"/>
+              </a:defRPr>
+            </a:lvl4pPr>
+            <a:lvl5pPr marL="1828800" algn="l" defTabSz="914400" rtl="0" eaLnBrk="1" latinLnBrk="0" hangingPunct="1">
+              <a:defRPr kumimoji="1" sz="1800" kern="1200">
+                <a:solidFill>
+                  <a:schemeClr val="tx1"/>
+                </a:solidFill>
+                <a:latin typeface="+mn-lt"/>
+                <a:ea typeface="+mn-ea"/>
+                <a:cs typeface="+mn-cs"/>
+              </a:defRPr>
+            </a:lvl5pPr>
+            <a:lvl6pPr marL="2286000" algn="l" defTabSz="914400" rtl="0" eaLnBrk="1" latinLnBrk="0" hangingPunct="1">
+              <a:defRPr kumimoji="1" sz="1800" kern="1200">
+                <a:solidFill>
+                  <a:schemeClr val="tx1"/>
+                </a:solidFill>
+                <a:latin typeface="+mn-lt"/>
+                <a:ea typeface="+mn-ea"/>
+                <a:cs typeface="+mn-cs"/>
+              </a:defRPr>
+            </a:lvl6pPr>
+            <a:lvl7pPr marL="2743200" algn="l" defTabSz="914400" rtl="0" eaLnBrk="1" latinLnBrk="0" hangingPunct="1">
+              <a:defRPr kumimoji="1" sz="1800" kern="1200">
+                <a:solidFill>
+                  <a:schemeClr val="tx1"/>
+                </a:solidFill>
+                <a:latin typeface="+mn-lt"/>
+                <a:ea typeface="+mn-ea"/>
+                <a:cs typeface="+mn-cs"/>
+              </a:defRPr>
+            </a:lvl7pPr>
+            <a:lvl8pPr marL="3200400" algn="l" defTabSz="914400" rtl="0" eaLnBrk="1" latinLnBrk="0" hangingPunct="1">
+              <a:defRPr kumimoji="1" sz="1800" kern="1200">
+                <a:solidFill>
+                  <a:schemeClr val="tx1"/>
+                </a:solidFill>
+                <a:latin typeface="+mn-lt"/>
+                <a:ea typeface="+mn-ea"/>
+                <a:cs typeface="+mn-cs"/>
+              </a:defRPr>
+            </a:lvl8pPr>
+            <a:lvl9pPr marL="3657600" algn="l" defTabSz="914400" rtl="0" eaLnBrk="1" latinLnBrk="0" hangingPunct="1">
+              <a:defRPr kumimoji="1" sz="1800" kern="1200">
+                <a:solidFill>
+                  <a:schemeClr val="tx1"/>
+                </a:solidFill>
+                <a:latin typeface="+mn-lt"/>
+                <a:ea typeface="+mn-ea"/>
+                <a:cs typeface="+mn-cs"/>
+              </a:defRPr>
+            </a:lvl9pPr>
+          </a:lstStyle>
+          <a:p>
+            <a:pPr algn="ctr"/>
+            <a:r>
+              <a:rPr lang="en-US" altLang="ja-JP" sz="2000">
+                <a:latin typeface="+mn-ea"/>
+              </a:rPr>
+              <a:t>Processing</a:t>
+            </a:r>
+          </a:p>
+          <a:p>
+            <a:pPr algn="ctr"/>
+            <a:r>
+              <a:rPr lang="en-US" altLang="ja-JP" sz="2000">
+                <a:latin typeface="+mn-ea"/>
+              </a:rPr>
+              <a:t>d</a:t>
+            </a:r>
+            <a:r>
+              <a:rPr lang="en-US" altLang="ja-JP" sz="2000" b="0" i="0" u="none" strike="noStrike" baseline="0">
+                <a:latin typeface="+mn-ea"/>
+              </a:rPr>
+              <a:t>raw()</a:t>
+            </a:r>
+            <a:endParaRPr lang="en-US" altLang="ja-JP" sz="2000">
+              <a:latin typeface="+mn-ea"/>
+            </a:endParaRPr>
+          </a:p>
+        </p:txBody>
+      </p:sp>
+      <p:sp>
+        <p:nvSpPr>
+          <p:cNvPr id="16" name="TextBox 12">
+            <a:extLst>
+              <a:ext uri="{FF2B5EF4-FFF2-40B4-BE49-F238E27FC236}">
+                <a16:creationId xmlns:a16="http://schemas.microsoft.com/office/drawing/2014/main" id="{C5EC6189-16E1-8E2D-DEF2-F9BBDA16A6EB}"/>
+              </a:ext>
+            </a:extLst>
+          </p:cNvPr>
+          <p:cNvSpPr txBox="1"/>
+          <p:nvPr/>
+        </p:nvSpPr>
+        <p:spPr>
+          <a:xfrm>
+            <a:off x="3982690" y="4671151"/>
+            <a:ext cx="922200" cy="400110"/>
+          </a:xfrm>
+          <a:prstGeom prst="rect">
+            <a:avLst/>
+          </a:prstGeom>
+          <a:noFill/>
+          <a:ln>
+            <a:noFill/>
+          </a:ln>
+        </p:spPr>
+        <p:txBody>
+          <a:bodyPr rot="0" spcFirstLastPara="0" vert="horz" wrap="square" lIns="91440" tIns="45720" rIns="91440" bIns="45720" numCol="1" spcCol="0" rtlCol="0" fromWordArt="0" anchor="t" anchorCtr="0" forceAA="0" compatLnSpc="1">
+            <a:prstTxWarp prst="textNoShape">
+              <a:avLst/>
+            </a:prstTxWarp>
+            <a:spAutoFit/>
+          </a:bodyPr>
+          <a:lstStyle>
+            <a:defPPr>
+              <a:defRPr lang="ja-JP"/>
+            </a:defPPr>
+            <a:lvl1pPr marL="0" algn="l" defTabSz="914400" rtl="0" eaLnBrk="1" latinLnBrk="0" hangingPunct="1">
+              <a:defRPr kumimoji="1" sz="1800" kern="1200">
+                <a:solidFill>
+                  <a:schemeClr val="tx1"/>
+                </a:solidFill>
+                <a:latin typeface="+mn-lt"/>
+                <a:ea typeface="+mn-ea"/>
+                <a:cs typeface="+mn-cs"/>
+              </a:defRPr>
+            </a:lvl1pPr>
+            <a:lvl2pPr marL="457200" algn="l" defTabSz="914400" rtl="0" eaLnBrk="1" latinLnBrk="0" hangingPunct="1">
+              <a:defRPr kumimoji="1" sz="1800" kern="1200">
+                <a:solidFill>
+                  <a:schemeClr val="tx1"/>
+                </a:solidFill>
+                <a:latin typeface="+mn-lt"/>
+                <a:ea typeface="+mn-ea"/>
+                <a:cs typeface="+mn-cs"/>
+              </a:defRPr>
+            </a:lvl2pPr>
+            <a:lvl3pPr marL="914400" algn="l" defTabSz="914400" rtl="0" eaLnBrk="1" latinLnBrk="0" hangingPunct="1">
+              <a:defRPr kumimoji="1" sz="1800" kern="1200">
+                <a:solidFill>
+                  <a:schemeClr val="tx1"/>
+                </a:solidFill>
+                <a:latin typeface="+mn-lt"/>
+                <a:ea typeface="+mn-ea"/>
+                <a:cs typeface="+mn-cs"/>
+              </a:defRPr>
+            </a:lvl3pPr>
+            <a:lvl4pPr marL="1371600" algn="l" defTabSz="914400" rtl="0" eaLnBrk="1" latinLnBrk="0" hangingPunct="1">
+              <a:defRPr kumimoji="1" sz="1800" kern="1200">
+                <a:solidFill>
+                  <a:schemeClr val="tx1"/>
+                </a:solidFill>
+                <a:latin typeface="+mn-lt"/>
+                <a:ea typeface="+mn-ea"/>
+                <a:cs typeface="+mn-cs"/>
+              </a:defRPr>
+            </a:lvl4pPr>
+            <a:lvl5pPr marL="1828800" algn="l" defTabSz="914400" rtl="0" eaLnBrk="1" latinLnBrk="0" hangingPunct="1">
+              <a:defRPr kumimoji="1" sz="1800" kern="1200">
+                <a:solidFill>
+                  <a:schemeClr val="tx1"/>
+                </a:solidFill>
+                <a:latin typeface="+mn-lt"/>
+                <a:ea typeface="+mn-ea"/>
+                <a:cs typeface="+mn-cs"/>
+              </a:defRPr>
+            </a:lvl5pPr>
+            <a:lvl6pPr marL="2286000" algn="l" defTabSz="914400" rtl="0" eaLnBrk="1" latinLnBrk="0" hangingPunct="1">
+              <a:defRPr kumimoji="1" sz="1800" kern="1200">
+                <a:solidFill>
+                  <a:schemeClr val="tx1"/>
+                </a:solidFill>
+                <a:latin typeface="+mn-lt"/>
+                <a:ea typeface="+mn-ea"/>
+                <a:cs typeface="+mn-cs"/>
+              </a:defRPr>
+            </a:lvl6pPr>
+            <a:lvl7pPr marL="2743200" algn="l" defTabSz="914400" rtl="0" eaLnBrk="1" latinLnBrk="0" hangingPunct="1">
+              <a:defRPr kumimoji="1" sz="1800" kern="1200">
+                <a:solidFill>
+                  <a:schemeClr val="tx1"/>
+                </a:solidFill>
+                <a:latin typeface="+mn-lt"/>
+                <a:ea typeface="+mn-ea"/>
+                <a:cs typeface="+mn-cs"/>
+              </a:defRPr>
+            </a:lvl7pPr>
+            <a:lvl8pPr marL="3200400" algn="l" defTabSz="914400" rtl="0" eaLnBrk="1" latinLnBrk="0" hangingPunct="1">
+              <a:defRPr kumimoji="1" sz="1800" kern="1200">
+                <a:solidFill>
+                  <a:schemeClr val="tx1"/>
+                </a:solidFill>
+                <a:latin typeface="+mn-lt"/>
+                <a:ea typeface="+mn-ea"/>
+                <a:cs typeface="+mn-cs"/>
+              </a:defRPr>
+            </a:lvl8pPr>
+            <a:lvl9pPr marL="3657600" algn="l" defTabSz="914400" rtl="0" eaLnBrk="1" latinLnBrk="0" hangingPunct="1">
+              <a:defRPr kumimoji="1" sz="1800" kern="1200">
+                <a:solidFill>
+                  <a:schemeClr val="tx1"/>
+                </a:solidFill>
+                <a:latin typeface="+mn-lt"/>
+                <a:ea typeface="+mn-ea"/>
+                <a:cs typeface="+mn-cs"/>
+              </a:defRPr>
+            </a:lvl9pPr>
+          </a:lstStyle>
+          <a:p>
+            <a:pPr algn="ctr"/>
+            <a:r>
+              <a:rPr lang="en-US" altLang="ja-JP" sz="2000">
+                <a:latin typeface="+mn-ea"/>
+              </a:rPr>
+              <a:t>60fps</a:t>
+            </a:r>
+          </a:p>
+        </p:txBody>
+      </p:sp>
+      <p:sp>
+        <p:nvSpPr>
+          <p:cNvPr id="17" name="TextBox 12">
+            <a:extLst>
+              <a:ext uri="{FF2B5EF4-FFF2-40B4-BE49-F238E27FC236}">
+                <a16:creationId xmlns:a16="http://schemas.microsoft.com/office/drawing/2014/main" id="{22632EEA-22E3-C2E6-B796-B257D5423EF8}"/>
+              </a:ext>
+            </a:extLst>
+          </p:cNvPr>
+          <p:cNvSpPr txBox="1"/>
+          <p:nvPr/>
+        </p:nvSpPr>
+        <p:spPr>
+          <a:xfrm>
+            <a:off x="2883141" y="4106144"/>
+            <a:ext cx="922200" cy="400110"/>
+          </a:xfrm>
+          <a:prstGeom prst="rect">
+            <a:avLst/>
+          </a:prstGeom>
+          <a:noFill/>
+          <a:ln>
+            <a:noFill/>
+          </a:ln>
+        </p:spPr>
+        <p:txBody>
+          <a:bodyPr rot="0" spcFirstLastPara="0" vert="horz" wrap="square" lIns="91440" tIns="45720" rIns="91440" bIns="45720" numCol="1" spcCol="0" rtlCol="0" fromWordArt="0" anchor="t" anchorCtr="0" forceAA="0" compatLnSpc="1">
+            <a:prstTxWarp prst="textNoShape">
+              <a:avLst/>
+            </a:prstTxWarp>
+            <a:spAutoFit/>
+          </a:bodyPr>
+          <a:lstStyle>
+            <a:defPPr>
+              <a:defRPr lang="ja-JP"/>
+            </a:defPPr>
+            <a:lvl1pPr marL="0" algn="l" defTabSz="914400" rtl="0" eaLnBrk="1" latinLnBrk="0" hangingPunct="1">
+              <a:defRPr kumimoji="1" sz="1800" kern="1200">
+                <a:solidFill>
+                  <a:schemeClr val="tx1"/>
+                </a:solidFill>
+                <a:latin typeface="+mn-lt"/>
+                <a:ea typeface="+mn-ea"/>
+                <a:cs typeface="+mn-cs"/>
+              </a:defRPr>
+            </a:lvl1pPr>
+            <a:lvl2pPr marL="457200" algn="l" defTabSz="914400" rtl="0" eaLnBrk="1" latinLnBrk="0" hangingPunct="1">
+              <a:defRPr kumimoji="1" sz="1800" kern="1200">
+                <a:solidFill>
+                  <a:schemeClr val="tx1"/>
+                </a:solidFill>
+                <a:latin typeface="+mn-lt"/>
+                <a:ea typeface="+mn-ea"/>
+                <a:cs typeface="+mn-cs"/>
+              </a:defRPr>
+            </a:lvl2pPr>
+            <a:lvl3pPr marL="914400" algn="l" defTabSz="914400" rtl="0" eaLnBrk="1" latinLnBrk="0" hangingPunct="1">
+              <a:defRPr kumimoji="1" sz="1800" kern="1200">
+                <a:solidFill>
+                  <a:schemeClr val="tx1"/>
+                </a:solidFill>
+                <a:latin typeface="+mn-lt"/>
+                <a:ea typeface="+mn-ea"/>
+                <a:cs typeface="+mn-cs"/>
+              </a:defRPr>
+            </a:lvl3pPr>
+            <a:lvl4pPr marL="1371600" algn="l" defTabSz="914400" rtl="0" eaLnBrk="1" latinLnBrk="0" hangingPunct="1">
+              <a:defRPr kumimoji="1" sz="1800" kern="1200">
+                <a:solidFill>
+                  <a:schemeClr val="tx1"/>
+                </a:solidFill>
+                <a:latin typeface="+mn-lt"/>
+                <a:ea typeface="+mn-ea"/>
+                <a:cs typeface="+mn-cs"/>
+              </a:defRPr>
+            </a:lvl4pPr>
+            <a:lvl5pPr marL="1828800" algn="l" defTabSz="914400" rtl="0" eaLnBrk="1" latinLnBrk="0" hangingPunct="1">
+              <a:defRPr kumimoji="1" sz="1800" kern="1200">
+                <a:solidFill>
+                  <a:schemeClr val="tx1"/>
+                </a:solidFill>
+                <a:latin typeface="+mn-lt"/>
+                <a:ea typeface="+mn-ea"/>
+                <a:cs typeface="+mn-cs"/>
+              </a:defRPr>
+            </a:lvl5pPr>
+            <a:lvl6pPr marL="2286000" algn="l" defTabSz="914400" rtl="0" eaLnBrk="1" latinLnBrk="0" hangingPunct="1">
+              <a:defRPr kumimoji="1" sz="1800" kern="1200">
+                <a:solidFill>
+                  <a:schemeClr val="tx1"/>
+                </a:solidFill>
+                <a:latin typeface="+mn-lt"/>
+                <a:ea typeface="+mn-ea"/>
+                <a:cs typeface="+mn-cs"/>
+              </a:defRPr>
+            </a:lvl6pPr>
+            <a:lvl7pPr marL="2743200" algn="l" defTabSz="914400" rtl="0" eaLnBrk="1" latinLnBrk="0" hangingPunct="1">
+              <a:defRPr kumimoji="1" sz="1800" kern="1200">
+                <a:solidFill>
+                  <a:schemeClr val="tx1"/>
+                </a:solidFill>
+                <a:latin typeface="+mn-lt"/>
+                <a:ea typeface="+mn-ea"/>
+                <a:cs typeface="+mn-cs"/>
+              </a:defRPr>
+            </a:lvl7pPr>
+            <a:lvl8pPr marL="3200400" algn="l" defTabSz="914400" rtl="0" eaLnBrk="1" latinLnBrk="0" hangingPunct="1">
+              <a:defRPr kumimoji="1" sz="1800" kern="1200">
+                <a:solidFill>
+                  <a:schemeClr val="tx1"/>
+                </a:solidFill>
+                <a:latin typeface="+mn-lt"/>
+                <a:ea typeface="+mn-ea"/>
+                <a:cs typeface="+mn-cs"/>
+              </a:defRPr>
+            </a:lvl8pPr>
+            <a:lvl9pPr marL="3657600" algn="l" defTabSz="914400" rtl="0" eaLnBrk="1" latinLnBrk="0" hangingPunct="1">
+              <a:defRPr kumimoji="1" sz="1800" kern="1200">
+                <a:solidFill>
+                  <a:schemeClr val="tx1"/>
+                </a:solidFill>
+                <a:latin typeface="+mn-lt"/>
+                <a:ea typeface="+mn-ea"/>
+                <a:cs typeface="+mn-cs"/>
+              </a:defRPr>
+            </a:lvl9pPr>
+          </a:lstStyle>
+          <a:p>
+            <a:pPr algn="ctr"/>
+            <a:r>
+              <a:rPr lang="en-US" altLang="ja-JP" sz="2000">
+                <a:latin typeface="+mn-ea"/>
+              </a:rPr>
+              <a:t>60fps</a:t>
+            </a:r>
+          </a:p>
+        </p:txBody>
+      </p:sp>
+      <p:sp>
+        <p:nvSpPr>
+          <p:cNvPr id="18" name="TextBox 12">
+            <a:extLst>
+              <a:ext uri="{FF2B5EF4-FFF2-40B4-BE49-F238E27FC236}">
+                <a16:creationId xmlns:a16="http://schemas.microsoft.com/office/drawing/2014/main" id="{BF308364-4B3E-748B-2E70-32F51224DEE3}"/>
+              </a:ext>
+            </a:extLst>
+          </p:cNvPr>
+          <p:cNvSpPr txBox="1"/>
+          <p:nvPr/>
+        </p:nvSpPr>
+        <p:spPr>
+          <a:xfrm>
+            <a:off x="1812360" y="3555848"/>
+            <a:ext cx="922200" cy="400110"/>
+          </a:xfrm>
+          <a:prstGeom prst="rect">
+            <a:avLst/>
+          </a:prstGeom>
+          <a:noFill/>
+          <a:ln>
+            <a:noFill/>
+          </a:ln>
+        </p:spPr>
+        <p:txBody>
+          <a:bodyPr rot="0" spcFirstLastPara="0" vert="horz" wrap="square" lIns="91440" tIns="45720" rIns="91440" bIns="45720" numCol="1" spcCol="0" rtlCol="0" fromWordArt="0" anchor="t" anchorCtr="0" forceAA="0" compatLnSpc="1">
+            <a:prstTxWarp prst="textNoShape">
+              <a:avLst/>
+            </a:prstTxWarp>
+            <a:spAutoFit/>
+          </a:bodyPr>
+          <a:lstStyle>
+            <a:defPPr>
+              <a:defRPr lang="ja-JP"/>
+            </a:defPPr>
+            <a:lvl1pPr marL="0" algn="l" defTabSz="914400" rtl="0" eaLnBrk="1" latinLnBrk="0" hangingPunct="1">
+              <a:defRPr kumimoji="1" sz="1800" kern="1200">
+                <a:solidFill>
+                  <a:schemeClr val="tx1"/>
+                </a:solidFill>
+                <a:latin typeface="+mn-lt"/>
+                <a:ea typeface="+mn-ea"/>
+                <a:cs typeface="+mn-cs"/>
+              </a:defRPr>
+            </a:lvl1pPr>
+            <a:lvl2pPr marL="457200" algn="l" defTabSz="914400" rtl="0" eaLnBrk="1" latinLnBrk="0" hangingPunct="1">
+              <a:defRPr kumimoji="1" sz="1800" kern="1200">
+                <a:solidFill>
+                  <a:schemeClr val="tx1"/>
+                </a:solidFill>
+                <a:latin typeface="+mn-lt"/>
+                <a:ea typeface="+mn-ea"/>
+                <a:cs typeface="+mn-cs"/>
+              </a:defRPr>
+            </a:lvl2pPr>
+            <a:lvl3pPr marL="914400" algn="l" defTabSz="914400" rtl="0" eaLnBrk="1" latinLnBrk="0" hangingPunct="1">
+              <a:defRPr kumimoji="1" sz="1800" kern="1200">
+                <a:solidFill>
+                  <a:schemeClr val="tx1"/>
+                </a:solidFill>
+                <a:latin typeface="+mn-lt"/>
+                <a:ea typeface="+mn-ea"/>
+                <a:cs typeface="+mn-cs"/>
+              </a:defRPr>
+            </a:lvl3pPr>
+            <a:lvl4pPr marL="1371600" algn="l" defTabSz="914400" rtl="0" eaLnBrk="1" latinLnBrk="0" hangingPunct="1">
+              <a:defRPr kumimoji="1" sz="1800" kern="1200">
+                <a:solidFill>
+                  <a:schemeClr val="tx1"/>
+                </a:solidFill>
+                <a:latin typeface="+mn-lt"/>
+                <a:ea typeface="+mn-ea"/>
+                <a:cs typeface="+mn-cs"/>
+              </a:defRPr>
+            </a:lvl4pPr>
+            <a:lvl5pPr marL="1828800" algn="l" defTabSz="914400" rtl="0" eaLnBrk="1" latinLnBrk="0" hangingPunct="1">
+              <a:defRPr kumimoji="1" sz="1800" kern="1200">
+                <a:solidFill>
+                  <a:schemeClr val="tx1"/>
+                </a:solidFill>
+                <a:latin typeface="+mn-lt"/>
+                <a:ea typeface="+mn-ea"/>
+                <a:cs typeface="+mn-cs"/>
+              </a:defRPr>
+            </a:lvl5pPr>
+            <a:lvl6pPr marL="2286000" algn="l" defTabSz="914400" rtl="0" eaLnBrk="1" latinLnBrk="0" hangingPunct="1">
+              <a:defRPr kumimoji="1" sz="1800" kern="1200">
+                <a:solidFill>
+                  <a:schemeClr val="tx1"/>
+                </a:solidFill>
+                <a:latin typeface="+mn-lt"/>
+                <a:ea typeface="+mn-ea"/>
+                <a:cs typeface="+mn-cs"/>
+              </a:defRPr>
+            </a:lvl6pPr>
+            <a:lvl7pPr marL="2743200" algn="l" defTabSz="914400" rtl="0" eaLnBrk="1" latinLnBrk="0" hangingPunct="1">
+              <a:defRPr kumimoji="1" sz="1800" kern="1200">
+                <a:solidFill>
+                  <a:schemeClr val="tx1"/>
+                </a:solidFill>
+                <a:latin typeface="+mn-lt"/>
+                <a:ea typeface="+mn-ea"/>
+                <a:cs typeface="+mn-cs"/>
+              </a:defRPr>
+            </a:lvl7pPr>
+            <a:lvl8pPr marL="3200400" algn="l" defTabSz="914400" rtl="0" eaLnBrk="1" latinLnBrk="0" hangingPunct="1">
+              <a:defRPr kumimoji="1" sz="1800" kern="1200">
+                <a:solidFill>
+                  <a:schemeClr val="tx1"/>
+                </a:solidFill>
+                <a:latin typeface="+mn-lt"/>
+                <a:ea typeface="+mn-ea"/>
+                <a:cs typeface="+mn-cs"/>
+              </a:defRPr>
+            </a:lvl8pPr>
+            <a:lvl9pPr marL="3657600" algn="l" defTabSz="914400" rtl="0" eaLnBrk="1" latinLnBrk="0" hangingPunct="1">
+              <a:defRPr kumimoji="1" sz="1800" kern="1200">
+                <a:solidFill>
+                  <a:schemeClr val="tx1"/>
+                </a:solidFill>
+                <a:latin typeface="+mn-lt"/>
+                <a:ea typeface="+mn-ea"/>
+                <a:cs typeface="+mn-cs"/>
+              </a:defRPr>
+            </a:lvl9pPr>
+          </a:lstStyle>
+          <a:p>
+            <a:pPr algn="ctr"/>
+            <a:r>
+              <a:rPr lang="en-US" altLang="ja-JP" sz="2000">
+                <a:latin typeface="+mn-ea"/>
+              </a:rPr>
+              <a:t>60fps</a:t>
+            </a:r>
+          </a:p>
+        </p:txBody>
+      </p:sp>
+      <p:sp>
+        <p:nvSpPr>
+          <p:cNvPr id="19" name="TextBox 12">
+            <a:extLst>
+              <a:ext uri="{FF2B5EF4-FFF2-40B4-BE49-F238E27FC236}">
+                <a16:creationId xmlns:a16="http://schemas.microsoft.com/office/drawing/2014/main" id="{5F514321-31F5-BF7C-DACE-DFFE64C1AC63}"/>
+              </a:ext>
+            </a:extLst>
+          </p:cNvPr>
+          <p:cNvSpPr txBox="1"/>
+          <p:nvPr/>
+        </p:nvSpPr>
+        <p:spPr>
+          <a:xfrm>
+            <a:off x="660712" y="3015540"/>
+            <a:ext cx="922200" cy="400110"/>
+          </a:xfrm>
+          <a:prstGeom prst="rect">
+            <a:avLst/>
+          </a:prstGeom>
+          <a:noFill/>
+          <a:ln>
+            <a:noFill/>
+          </a:ln>
+        </p:spPr>
+        <p:txBody>
+          <a:bodyPr rot="0" spcFirstLastPara="0" vert="horz" wrap="square" lIns="91440" tIns="45720" rIns="91440" bIns="45720" numCol="1" spcCol="0" rtlCol="0" fromWordArt="0" anchor="t" anchorCtr="0" forceAA="0" compatLnSpc="1">
+            <a:prstTxWarp prst="textNoShape">
+              <a:avLst/>
+            </a:prstTxWarp>
+            <a:spAutoFit/>
+          </a:bodyPr>
+          <a:lstStyle>
+            <a:defPPr>
+              <a:defRPr lang="ja-JP"/>
+            </a:defPPr>
+            <a:lvl1pPr marL="0" algn="l" defTabSz="914400" rtl="0" eaLnBrk="1" latinLnBrk="0" hangingPunct="1">
+              <a:defRPr kumimoji="1" sz="1800" kern="1200">
+                <a:solidFill>
+                  <a:schemeClr val="tx1"/>
+                </a:solidFill>
+                <a:latin typeface="+mn-lt"/>
+                <a:ea typeface="+mn-ea"/>
+                <a:cs typeface="+mn-cs"/>
+              </a:defRPr>
+            </a:lvl1pPr>
+            <a:lvl2pPr marL="457200" algn="l" defTabSz="914400" rtl="0" eaLnBrk="1" latinLnBrk="0" hangingPunct="1">
+              <a:defRPr kumimoji="1" sz="1800" kern="1200">
+                <a:solidFill>
+                  <a:schemeClr val="tx1"/>
+                </a:solidFill>
+                <a:latin typeface="+mn-lt"/>
+                <a:ea typeface="+mn-ea"/>
+                <a:cs typeface="+mn-cs"/>
+              </a:defRPr>
+            </a:lvl2pPr>
+            <a:lvl3pPr marL="914400" algn="l" defTabSz="914400" rtl="0" eaLnBrk="1" latinLnBrk="0" hangingPunct="1">
+              <a:defRPr kumimoji="1" sz="1800" kern="1200">
+                <a:solidFill>
+                  <a:schemeClr val="tx1"/>
+                </a:solidFill>
+                <a:latin typeface="+mn-lt"/>
+                <a:ea typeface="+mn-ea"/>
+                <a:cs typeface="+mn-cs"/>
+              </a:defRPr>
+            </a:lvl3pPr>
+            <a:lvl4pPr marL="1371600" algn="l" defTabSz="914400" rtl="0" eaLnBrk="1" latinLnBrk="0" hangingPunct="1">
+              <a:defRPr kumimoji="1" sz="1800" kern="1200">
+                <a:solidFill>
+                  <a:schemeClr val="tx1"/>
+                </a:solidFill>
+                <a:latin typeface="+mn-lt"/>
+                <a:ea typeface="+mn-ea"/>
+                <a:cs typeface="+mn-cs"/>
+              </a:defRPr>
+            </a:lvl4pPr>
+            <a:lvl5pPr marL="1828800" algn="l" defTabSz="914400" rtl="0" eaLnBrk="1" latinLnBrk="0" hangingPunct="1">
+              <a:defRPr kumimoji="1" sz="1800" kern="1200">
+                <a:solidFill>
+                  <a:schemeClr val="tx1"/>
+                </a:solidFill>
+                <a:latin typeface="+mn-lt"/>
+                <a:ea typeface="+mn-ea"/>
+                <a:cs typeface="+mn-cs"/>
+              </a:defRPr>
+            </a:lvl5pPr>
+            <a:lvl6pPr marL="2286000" algn="l" defTabSz="914400" rtl="0" eaLnBrk="1" latinLnBrk="0" hangingPunct="1">
+              <a:defRPr kumimoji="1" sz="1800" kern="1200">
+                <a:solidFill>
+                  <a:schemeClr val="tx1"/>
+                </a:solidFill>
+                <a:latin typeface="+mn-lt"/>
+                <a:ea typeface="+mn-ea"/>
+                <a:cs typeface="+mn-cs"/>
+              </a:defRPr>
+            </a:lvl6pPr>
+            <a:lvl7pPr marL="2743200" algn="l" defTabSz="914400" rtl="0" eaLnBrk="1" latinLnBrk="0" hangingPunct="1">
+              <a:defRPr kumimoji="1" sz="1800" kern="1200">
+                <a:solidFill>
+                  <a:schemeClr val="tx1"/>
+                </a:solidFill>
+                <a:latin typeface="+mn-lt"/>
+                <a:ea typeface="+mn-ea"/>
+                <a:cs typeface="+mn-cs"/>
+              </a:defRPr>
+            </a:lvl7pPr>
+            <a:lvl8pPr marL="3200400" algn="l" defTabSz="914400" rtl="0" eaLnBrk="1" latinLnBrk="0" hangingPunct="1">
+              <a:defRPr kumimoji="1" sz="1800" kern="1200">
+                <a:solidFill>
+                  <a:schemeClr val="tx1"/>
+                </a:solidFill>
+                <a:latin typeface="+mn-lt"/>
+                <a:ea typeface="+mn-ea"/>
+                <a:cs typeface="+mn-cs"/>
+              </a:defRPr>
+            </a:lvl8pPr>
+            <a:lvl9pPr marL="3657600" algn="l" defTabSz="914400" rtl="0" eaLnBrk="1" latinLnBrk="0" hangingPunct="1">
+              <a:defRPr kumimoji="1" sz="1800" kern="1200">
+                <a:solidFill>
+                  <a:schemeClr val="tx1"/>
+                </a:solidFill>
+                <a:latin typeface="+mn-lt"/>
+                <a:ea typeface="+mn-ea"/>
+                <a:cs typeface="+mn-cs"/>
+              </a:defRPr>
+            </a:lvl9pPr>
+          </a:lstStyle>
+          <a:p>
+            <a:pPr algn="ctr"/>
+            <a:r>
+              <a:rPr lang="en-US" altLang="ja-JP" sz="2000">
+                <a:latin typeface="+mn-ea"/>
+              </a:rPr>
+              <a:t>60fps</a:t>
+            </a:r>
+          </a:p>
+        </p:txBody>
+      </p:sp>
+      <p:sp>
+        <p:nvSpPr>
+          <p:cNvPr id="20" name="正方形/長方形 19">
+            <a:extLst>
+              <a:ext uri="{FF2B5EF4-FFF2-40B4-BE49-F238E27FC236}">
+                <a16:creationId xmlns:a16="http://schemas.microsoft.com/office/drawing/2014/main" id="{C4913AC9-6F91-AE4B-D837-AEF3FA0143F2}"/>
+              </a:ext>
+            </a:extLst>
+          </p:cNvPr>
+          <p:cNvSpPr/>
+          <p:nvPr/>
+        </p:nvSpPr>
+        <p:spPr>
+          <a:xfrm>
+            <a:off x="2311486" y="2760297"/>
+            <a:ext cx="1182405" cy="69732"/>
+          </a:xfrm>
+          <a:prstGeom prst="rect">
+            <a:avLst/>
+          </a:prstGeom>
+        </p:spPr>
+        <p:style>
+          <a:lnRef idx="2">
+            <a:schemeClr val="accent1">
+              <a:shade val="15000"/>
+            </a:schemeClr>
+          </a:lnRef>
+          <a:fillRef idx="1">
+            <a:schemeClr val="accent1"/>
+          </a:fillRef>
+          <a:effectRef idx="0">
+            <a:schemeClr val="accent1"/>
+          </a:effectRef>
+          <a:fontRef idx="minor">
+            <a:schemeClr val="lt1"/>
+          </a:fontRef>
+        </p:style>
+        <p:txBody>
+          <a:bodyPr rtlCol="0" anchor="ctr"/>
+          <a:lstStyle>
+            <a:defPPr>
+              <a:defRPr lang="ja-JP"/>
+            </a:defPPr>
+            <a:lvl1pPr marL="0" algn="l" defTabSz="914400" rtl="0" eaLnBrk="1" latinLnBrk="0" hangingPunct="1">
+              <a:defRPr kumimoji="1" sz="1800" kern="1200">
+                <a:solidFill>
+                  <a:schemeClr val="lt1"/>
+                </a:solidFill>
+                <a:latin typeface="+mn-lt"/>
+                <a:ea typeface="+mn-ea"/>
+                <a:cs typeface="+mn-cs"/>
+              </a:defRPr>
+            </a:lvl1pPr>
+            <a:lvl2pPr marL="457200" algn="l" defTabSz="914400" rtl="0" eaLnBrk="1" latinLnBrk="0" hangingPunct="1">
+              <a:defRPr kumimoji="1" sz="1800" kern="1200">
+                <a:solidFill>
+                  <a:schemeClr val="lt1"/>
+                </a:solidFill>
+                <a:latin typeface="+mn-lt"/>
+                <a:ea typeface="+mn-ea"/>
+                <a:cs typeface="+mn-cs"/>
+              </a:defRPr>
+            </a:lvl2pPr>
+            <a:lvl3pPr marL="914400" algn="l" defTabSz="914400" rtl="0" eaLnBrk="1" latinLnBrk="0" hangingPunct="1">
+              <a:defRPr kumimoji="1" sz="1800" kern="1200">
+                <a:solidFill>
+                  <a:schemeClr val="lt1"/>
+                </a:solidFill>
+                <a:latin typeface="+mn-lt"/>
+                <a:ea typeface="+mn-ea"/>
+                <a:cs typeface="+mn-cs"/>
+              </a:defRPr>
+            </a:lvl3pPr>
+            <a:lvl4pPr marL="1371600" algn="l" defTabSz="914400" rtl="0" eaLnBrk="1" latinLnBrk="0" hangingPunct="1">
+              <a:defRPr kumimoji="1" sz="1800" kern="1200">
+                <a:solidFill>
+                  <a:schemeClr val="lt1"/>
+                </a:solidFill>
+                <a:latin typeface="+mn-lt"/>
+                <a:ea typeface="+mn-ea"/>
+                <a:cs typeface="+mn-cs"/>
+              </a:defRPr>
+            </a:lvl4pPr>
+            <a:lvl5pPr marL="1828800" algn="l" defTabSz="914400" rtl="0" eaLnBrk="1" latinLnBrk="0" hangingPunct="1">
+              <a:defRPr kumimoji="1" sz="1800" kern="1200">
+                <a:solidFill>
+                  <a:schemeClr val="lt1"/>
+                </a:solidFill>
+                <a:latin typeface="+mn-lt"/>
+                <a:ea typeface="+mn-ea"/>
+                <a:cs typeface="+mn-cs"/>
+              </a:defRPr>
+            </a:lvl5pPr>
+            <a:lvl6pPr marL="2286000" algn="l" defTabSz="914400" rtl="0" eaLnBrk="1" latinLnBrk="0" hangingPunct="1">
+              <a:defRPr kumimoji="1" sz="1800" kern="1200">
+                <a:solidFill>
+                  <a:schemeClr val="lt1"/>
+                </a:solidFill>
+                <a:latin typeface="+mn-lt"/>
+                <a:ea typeface="+mn-ea"/>
+                <a:cs typeface="+mn-cs"/>
+              </a:defRPr>
+            </a:lvl6pPr>
+            <a:lvl7pPr marL="2743200" algn="l" defTabSz="914400" rtl="0" eaLnBrk="1" latinLnBrk="0" hangingPunct="1">
+              <a:defRPr kumimoji="1" sz="1800" kern="1200">
+                <a:solidFill>
+                  <a:schemeClr val="lt1"/>
+                </a:solidFill>
+                <a:latin typeface="+mn-lt"/>
+                <a:ea typeface="+mn-ea"/>
+                <a:cs typeface="+mn-cs"/>
+              </a:defRPr>
+            </a:lvl7pPr>
+            <a:lvl8pPr marL="3200400" algn="l" defTabSz="914400" rtl="0" eaLnBrk="1" latinLnBrk="0" hangingPunct="1">
+              <a:defRPr kumimoji="1" sz="1800" kern="1200">
+                <a:solidFill>
+                  <a:schemeClr val="lt1"/>
+                </a:solidFill>
+                <a:latin typeface="+mn-lt"/>
+                <a:ea typeface="+mn-ea"/>
+                <a:cs typeface="+mn-cs"/>
+              </a:defRPr>
+            </a:lvl8pPr>
+            <a:lvl9pPr marL="3657600" algn="l" defTabSz="914400" rtl="0" eaLnBrk="1" latinLnBrk="0" hangingPunct="1">
+              <a:defRPr kumimoji="1" sz="1800" kern="1200">
+                <a:solidFill>
+                  <a:schemeClr val="lt1"/>
+                </a:solidFill>
+                <a:latin typeface="+mn-lt"/>
+                <a:ea typeface="+mn-ea"/>
+                <a:cs typeface="+mn-cs"/>
+              </a:defRPr>
+            </a:lvl9pPr>
+          </a:lstStyle>
+          <a:p>
+            <a:pPr algn="ctr"/>
+            <a:endParaRPr kumimoji="1" lang="ja-JP" altLang="en-US"/>
+          </a:p>
+        </p:txBody>
+      </p:sp>
+      <p:sp>
+        <p:nvSpPr>
+          <p:cNvPr id="21" name="正方形/長方形 20">
+            <a:extLst>
+              <a:ext uri="{FF2B5EF4-FFF2-40B4-BE49-F238E27FC236}">
+                <a16:creationId xmlns:a16="http://schemas.microsoft.com/office/drawing/2014/main" id="{B46CA252-5730-AB06-60B9-3998B6112673}"/>
+              </a:ext>
+            </a:extLst>
+          </p:cNvPr>
+          <p:cNvSpPr/>
+          <p:nvPr/>
+        </p:nvSpPr>
+        <p:spPr>
+          <a:xfrm>
+            <a:off x="3380451" y="3378561"/>
+            <a:ext cx="1182405" cy="69732"/>
+          </a:xfrm>
+          <a:prstGeom prst="rect">
+            <a:avLst/>
+          </a:prstGeom>
+        </p:spPr>
+        <p:style>
+          <a:lnRef idx="2">
+            <a:schemeClr val="accent1">
+              <a:shade val="15000"/>
+            </a:schemeClr>
+          </a:lnRef>
+          <a:fillRef idx="1">
+            <a:schemeClr val="accent1"/>
+          </a:fillRef>
+          <a:effectRef idx="0">
+            <a:schemeClr val="accent1"/>
+          </a:effectRef>
+          <a:fontRef idx="minor">
+            <a:schemeClr val="lt1"/>
+          </a:fontRef>
+        </p:style>
+        <p:txBody>
+          <a:bodyPr rtlCol="0" anchor="ctr"/>
+          <a:lstStyle>
+            <a:defPPr>
+              <a:defRPr lang="ja-JP"/>
+            </a:defPPr>
+            <a:lvl1pPr marL="0" algn="l" defTabSz="914400" rtl="0" eaLnBrk="1" latinLnBrk="0" hangingPunct="1">
+              <a:defRPr kumimoji="1" sz="1800" kern="1200">
+                <a:solidFill>
+                  <a:schemeClr val="lt1"/>
+                </a:solidFill>
+                <a:latin typeface="+mn-lt"/>
+                <a:ea typeface="+mn-ea"/>
+                <a:cs typeface="+mn-cs"/>
+              </a:defRPr>
+            </a:lvl1pPr>
+            <a:lvl2pPr marL="457200" algn="l" defTabSz="914400" rtl="0" eaLnBrk="1" latinLnBrk="0" hangingPunct="1">
+              <a:defRPr kumimoji="1" sz="1800" kern="1200">
+                <a:solidFill>
+                  <a:schemeClr val="lt1"/>
+                </a:solidFill>
+                <a:latin typeface="+mn-lt"/>
+                <a:ea typeface="+mn-ea"/>
+                <a:cs typeface="+mn-cs"/>
+              </a:defRPr>
+            </a:lvl2pPr>
+            <a:lvl3pPr marL="914400" algn="l" defTabSz="914400" rtl="0" eaLnBrk="1" latinLnBrk="0" hangingPunct="1">
+              <a:defRPr kumimoji="1" sz="1800" kern="1200">
+                <a:solidFill>
+                  <a:schemeClr val="lt1"/>
+                </a:solidFill>
+                <a:latin typeface="+mn-lt"/>
+                <a:ea typeface="+mn-ea"/>
+                <a:cs typeface="+mn-cs"/>
+              </a:defRPr>
+            </a:lvl3pPr>
+            <a:lvl4pPr marL="1371600" algn="l" defTabSz="914400" rtl="0" eaLnBrk="1" latinLnBrk="0" hangingPunct="1">
+              <a:defRPr kumimoji="1" sz="1800" kern="1200">
+                <a:solidFill>
+                  <a:schemeClr val="lt1"/>
+                </a:solidFill>
+                <a:latin typeface="+mn-lt"/>
+                <a:ea typeface="+mn-ea"/>
+                <a:cs typeface="+mn-cs"/>
+              </a:defRPr>
+            </a:lvl4pPr>
+            <a:lvl5pPr marL="1828800" algn="l" defTabSz="914400" rtl="0" eaLnBrk="1" latinLnBrk="0" hangingPunct="1">
+              <a:defRPr kumimoji="1" sz="1800" kern="1200">
+                <a:solidFill>
+                  <a:schemeClr val="lt1"/>
+                </a:solidFill>
+                <a:latin typeface="+mn-lt"/>
+                <a:ea typeface="+mn-ea"/>
+                <a:cs typeface="+mn-cs"/>
+              </a:defRPr>
+            </a:lvl5pPr>
+            <a:lvl6pPr marL="2286000" algn="l" defTabSz="914400" rtl="0" eaLnBrk="1" latinLnBrk="0" hangingPunct="1">
+              <a:defRPr kumimoji="1" sz="1800" kern="1200">
+                <a:solidFill>
+                  <a:schemeClr val="lt1"/>
+                </a:solidFill>
+                <a:latin typeface="+mn-lt"/>
+                <a:ea typeface="+mn-ea"/>
+                <a:cs typeface="+mn-cs"/>
+              </a:defRPr>
+            </a:lvl6pPr>
+            <a:lvl7pPr marL="2743200" algn="l" defTabSz="914400" rtl="0" eaLnBrk="1" latinLnBrk="0" hangingPunct="1">
+              <a:defRPr kumimoji="1" sz="1800" kern="1200">
+                <a:solidFill>
+                  <a:schemeClr val="lt1"/>
+                </a:solidFill>
+                <a:latin typeface="+mn-lt"/>
+                <a:ea typeface="+mn-ea"/>
+                <a:cs typeface="+mn-cs"/>
+              </a:defRPr>
+            </a:lvl7pPr>
+            <a:lvl8pPr marL="3200400" algn="l" defTabSz="914400" rtl="0" eaLnBrk="1" latinLnBrk="0" hangingPunct="1">
+              <a:defRPr kumimoji="1" sz="1800" kern="1200">
+                <a:solidFill>
+                  <a:schemeClr val="lt1"/>
+                </a:solidFill>
+                <a:latin typeface="+mn-lt"/>
+                <a:ea typeface="+mn-ea"/>
+                <a:cs typeface="+mn-cs"/>
+              </a:defRPr>
+            </a:lvl8pPr>
+            <a:lvl9pPr marL="3657600" algn="l" defTabSz="914400" rtl="0" eaLnBrk="1" latinLnBrk="0" hangingPunct="1">
+              <a:defRPr kumimoji="1" sz="1800" kern="1200">
+                <a:solidFill>
+                  <a:schemeClr val="lt1"/>
+                </a:solidFill>
+                <a:latin typeface="+mn-lt"/>
+                <a:ea typeface="+mn-ea"/>
+                <a:cs typeface="+mn-cs"/>
+              </a:defRPr>
+            </a:lvl9pPr>
+          </a:lstStyle>
+          <a:p>
+            <a:pPr algn="ctr"/>
+            <a:endParaRPr kumimoji="1" lang="ja-JP" altLang="en-US"/>
+          </a:p>
+        </p:txBody>
+      </p:sp>
+      <p:sp>
+        <p:nvSpPr>
+          <p:cNvPr id="22" name="正方形/長方形 21">
+            <a:extLst>
+              <a:ext uri="{FF2B5EF4-FFF2-40B4-BE49-F238E27FC236}">
+                <a16:creationId xmlns:a16="http://schemas.microsoft.com/office/drawing/2014/main" id="{FB8E5590-9A5C-7305-F672-EB917D9089A2}"/>
+              </a:ext>
+            </a:extLst>
+          </p:cNvPr>
+          <p:cNvSpPr/>
+          <p:nvPr/>
+        </p:nvSpPr>
+        <p:spPr>
+          <a:xfrm>
+            <a:off x="4562856" y="3980623"/>
+            <a:ext cx="1182405" cy="69732"/>
+          </a:xfrm>
+          <a:prstGeom prst="rect">
+            <a:avLst/>
+          </a:prstGeom>
+        </p:spPr>
+        <p:style>
+          <a:lnRef idx="2">
+            <a:schemeClr val="accent1">
+              <a:shade val="15000"/>
+            </a:schemeClr>
+          </a:lnRef>
+          <a:fillRef idx="1">
+            <a:schemeClr val="accent1"/>
+          </a:fillRef>
+          <a:effectRef idx="0">
+            <a:schemeClr val="accent1"/>
+          </a:effectRef>
+          <a:fontRef idx="minor">
+            <a:schemeClr val="lt1"/>
+          </a:fontRef>
+        </p:style>
+        <p:txBody>
+          <a:bodyPr rtlCol="0" anchor="ctr"/>
+          <a:lstStyle>
+            <a:defPPr>
+              <a:defRPr lang="ja-JP"/>
+            </a:defPPr>
+            <a:lvl1pPr marL="0" algn="l" defTabSz="914400" rtl="0" eaLnBrk="1" latinLnBrk="0" hangingPunct="1">
+              <a:defRPr kumimoji="1" sz="1800" kern="1200">
+                <a:solidFill>
+                  <a:schemeClr val="lt1"/>
+                </a:solidFill>
+                <a:latin typeface="+mn-lt"/>
+                <a:ea typeface="+mn-ea"/>
+                <a:cs typeface="+mn-cs"/>
+              </a:defRPr>
+            </a:lvl1pPr>
+            <a:lvl2pPr marL="457200" algn="l" defTabSz="914400" rtl="0" eaLnBrk="1" latinLnBrk="0" hangingPunct="1">
+              <a:defRPr kumimoji="1" sz="1800" kern="1200">
+                <a:solidFill>
+                  <a:schemeClr val="lt1"/>
+                </a:solidFill>
+                <a:latin typeface="+mn-lt"/>
+                <a:ea typeface="+mn-ea"/>
+                <a:cs typeface="+mn-cs"/>
+              </a:defRPr>
+            </a:lvl2pPr>
+            <a:lvl3pPr marL="914400" algn="l" defTabSz="914400" rtl="0" eaLnBrk="1" latinLnBrk="0" hangingPunct="1">
+              <a:defRPr kumimoji="1" sz="1800" kern="1200">
+                <a:solidFill>
+                  <a:schemeClr val="lt1"/>
+                </a:solidFill>
+                <a:latin typeface="+mn-lt"/>
+                <a:ea typeface="+mn-ea"/>
+                <a:cs typeface="+mn-cs"/>
+              </a:defRPr>
+            </a:lvl3pPr>
+            <a:lvl4pPr marL="1371600" algn="l" defTabSz="914400" rtl="0" eaLnBrk="1" latinLnBrk="0" hangingPunct="1">
+              <a:defRPr kumimoji="1" sz="1800" kern="1200">
+                <a:solidFill>
+                  <a:schemeClr val="lt1"/>
+                </a:solidFill>
+                <a:latin typeface="+mn-lt"/>
+                <a:ea typeface="+mn-ea"/>
+                <a:cs typeface="+mn-cs"/>
+              </a:defRPr>
+            </a:lvl4pPr>
+            <a:lvl5pPr marL="1828800" algn="l" defTabSz="914400" rtl="0" eaLnBrk="1" latinLnBrk="0" hangingPunct="1">
+              <a:defRPr kumimoji="1" sz="1800" kern="1200">
+                <a:solidFill>
+                  <a:schemeClr val="lt1"/>
+                </a:solidFill>
+                <a:latin typeface="+mn-lt"/>
+                <a:ea typeface="+mn-ea"/>
+                <a:cs typeface="+mn-cs"/>
+              </a:defRPr>
+            </a:lvl5pPr>
+            <a:lvl6pPr marL="2286000" algn="l" defTabSz="914400" rtl="0" eaLnBrk="1" latinLnBrk="0" hangingPunct="1">
+              <a:defRPr kumimoji="1" sz="1800" kern="1200">
+                <a:solidFill>
+                  <a:schemeClr val="lt1"/>
+                </a:solidFill>
+                <a:latin typeface="+mn-lt"/>
+                <a:ea typeface="+mn-ea"/>
+                <a:cs typeface="+mn-cs"/>
+              </a:defRPr>
+            </a:lvl6pPr>
+            <a:lvl7pPr marL="2743200" algn="l" defTabSz="914400" rtl="0" eaLnBrk="1" latinLnBrk="0" hangingPunct="1">
+              <a:defRPr kumimoji="1" sz="1800" kern="1200">
+                <a:solidFill>
+                  <a:schemeClr val="lt1"/>
+                </a:solidFill>
+                <a:latin typeface="+mn-lt"/>
+                <a:ea typeface="+mn-ea"/>
+                <a:cs typeface="+mn-cs"/>
+              </a:defRPr>
+            </a:lvl7pPr>
+            <a:lvl8pPr marL="3200400" algn="l" defTabSz="914400" rtl="0" eaLnBrk="1" latinLnBrk="0" hangingPunct="1">
+              <a:defRPr kumimoji="1" sz="1800" kern="1200">
+                <a:solidFill>
+                  <a:schemeClr val="lt1"/>
+                </a:solidFill>
+                <a:latin typeface="+mn-lt"/>
+                <a:ea typeface="+mn-ea"/>
+                <a:cs typeface="+mn-cs"/>
+              </a:defRPr>
+            </a:lvl8pPr>
+            <a:lvl9pPr marL="3657600" algn="l" defTabSz="914400" rtl="0" eaLnBrk="1" latinLnBrk="0" hangingPunct="1">
+              <a:defRPr kumimoji="1" sz="1800" kern="1200">
+                <a:solidFill>
+                  <a:schemeClr val="lt1"/>
+                </a:solidFill>
+                <a:latin typeface="+mn-lt"/>
+                <a:ea typeface="+mn-ea"/>
+                <a:cs typeface="+mn-cs"/>
+              </a:defRPr>
+            </a:lvl9pPr>
+          </a:lstStyle>
+          <a:p>
+            <a:pPr algn="ctr"/>
+            <a:endParaRPr kumimoji="1" lang="ja-JP" altLang="en-US"/>
+          </a:p>
+        </p:txBody>
+      </p:sp>
+      <p:sp>
+        <p:nvSpPr>
+          <p:cNvPr id="23" name="正方形/長方形 22">
+            <a:extLst>
+              <a:ext uri="{FF2B5EF4-FFF2-40B4-BE49-F238E27FC236}">
+                <a16:creationId xmlns:a16="http://schemas.microsoft.com/office/drawing/2014/main" id="{DC538383-410A-3DF9-403F-5C4B06DCB886}"/>
+              </a:ext>
+            </a:extLst>
+          </p:cNvPr>
+          <p:cNvSpPr/>
+          <p:nvPr/>
+        </p:nvSpPr>
+        <p:spPr>
+          <a:xfrm>
+            <a:off x="5669724" y="4590786"/>
+            <a:ext cx="1182405" cy="69732"/>
+          </a:xfrm>
+          <a:prstGeom prst="rect">
+            <a:avLst/>
+          </a:prstGeom>
+        </p:spPr>
+        <p:style>
+          <a:lnRef idx="2">
+            <a:schemeClr val="accent1">
+              <a:shade val="15000"/>
+            </a:schemeClr>
+          </a:lnRef>
+          <a:fillRef idx="1">
+            <a:schemeClr val="accent1"/>
+          </a:fillRef>
+          <a:effectRef idx="0">
+            <a:schemeClr val="accent1"/>
+          </a:effectRef>
+          <a:fontRef idx="minor">
+            <a:schemeClr val="lt1"/>
+          </a:fontRef>
+        </p:style>
+        <p:txBody>
+          <a:bodyPr rtlCol="0" anchor="ctr"/>
+          <a:lstStyle>
+            <a:defPPr>
+              <a:defRPr lang="ja-JP"/>
+            </a:defPPr>
+            <a:lvl1pPr marL="0" algn="l" defTabSz="914400" rtl="0" eaLnBrk="1" latinLnBrk="0" hangingPunct="1">
+              <a:defRPr kumimoji="1" sz="1800" kern="1200">
+                <a:solidFill>
+                  <a:schemeClr val="lt1"/>
+                </a:solidFill>
+                <a:latin typeface="+mn-lt"/>
+                <a:ea typeface="+mn-ea"/>
+                <a:cs typeface="+mn-cs"/>
+              </a:defRPr>
+            </a:lvl1pPr>
+            <a:lvl2pPr marL="457200" algn="l" defTabSz="914400" rtl="0" eaLnBrk="1" latinLnBrk="0" hangingPunct="1">
+              <a:defRPr kumimoji="1" sz="1800" kern="1200">
+                <a:solidFill>
+                  <a:schemeClr val="lt1"/>
+                </a:solidFill>
+                <a:latin typeface="+mn-lt"/>
+                <a:ea typeface="+mn-ea"/>
+                <a:cs typeface="+mn-cs"/>
+              </a:defRPr>
+            </a:lvl2pPr>
+            <a:lvl3pPr marL="914400" algn="l" defTabSz="914400" rtl="0" eaLnBrk="1" latinLnBrk="0" hangingPunct="1">
+              <a:defRPr kumimoji="1" sz="1800" kern="1200">
+                <a:solidFill>
+                  <a:schemeClr val="lt1"/>
+                </a:solidFill>
+                <a:latin typeface="+mn-lt"/>
+                <a:ea typeface="+mn-ea"/>
+                <a:cs typeface="+mn-cs"/>
+              </a:defRPr>
+            </a:lvl3pPr>
+            <a:lvl4pPr marL="1371600" algn="l" defTabSz="914400" rtl="0" eaLnBrk="1" latinLnBrk="0" hangingPunct="1">
+              <a:defRPr kumimoji="1" sz="1800" kern="1200">
+                <a:solidFill>
+                  <a:schemeClr val="lt1"/>
+                </a:solidFill>
+                <a:latin typeface="+mn-lt"/>
+                <a:ea typeface="+mn-ea"/>
+                <a:cs typeface="+mn-cs"/>
+              </a:defRPr>
+            </a:lvl4pPr>
+            <a:lvl5pPr marL="1828800" algn="l" defTabSz="914400" rtl="0" eaLnBrk="1" latinLnBrk="0" hangingPunct="1">
+              <a:defRPr kumimoji="1" sz="1800" kern="1200">
+                <a:solidFill>
+                  <a:schemeClr val="lt1"/>
+                </a:solidFill>
+                <a:latin typeface="+mn-lt"/>
+                <a:ea typeface="+mn-ea"/>
+                <a:cs typeface="+mn-cs"/>
+              </a:defRPr>
+            </a:lvl5pPr>
+            <a:lvl6pPr marL="2286000" algn="l" defTabSz="914400" rtl="0" eaLnBrk="1" latinLnBrk="0" hangingPunct="1">
+              <a:defRPr kumimoji="1" sz="1800" kern="1200">
+                <a:solidFill>
+                  <a:schemeClr val="lt1"/>
+                </a:solidFill>
+                <a:latin typeface="+mn-lt"/>
+                <a:ea typeface="+mn-ea"/>
+                <a:cs typeface="+mn-cs"/>
+              </a:defRPr>
+            </a:lvl6pPr>
+            <a:lvl7pPr marL="2743200" algn="l" defTabSz="914400" rtl="0" eaLnBrk="1" latinLnBrk="0" hangingPunct="1">
+              <a:defRPr kumimoji="1" sz="1800" kern="1200">
+                <a:solidFill>
+                  <a:schemeClr val="lt1"/>
+                </a:solidFill>
+                <a:latin typeface="+mn-lt"/>
+                <a:ea typeface="+mn-ea"/>
+                <a:cs typeface="+mn-cs"/>
+              </a:defRPr>
+            </a:lvl7pPr>
+            <a:lvl8pPr marL="3200400" algn="l" defTabSz="914400" rtl="0" eaLnBrk="1" latinLnBrk="0" hangingPunct="1">
+              <a:defRPr kumimoji="1" sz="1800" kern="1200">
+                <a:solidFill>
+                  <a:schemeClr val="lt1"/>
+                </a:solidFill>
+                <a:latin typeface="+mn-lt"/>
+                <a:ea typeface="+mn-ea"/>
+                <a:cs typeface="+mn-cs"/>
+              </a:defRPr>
+            </a:lvl8pPr>
+            <a:lvl9pPr marL="3657600" algn="l" defTabSz="914400" rtl="0" eaLnBrk="1" latinLnBrk="0" hangingPunct="1">
+              <a:defRPr kumimoji="1" sz="1800" kern="1200">
+                <a:solidFill>
+                  <a:schemeClr val="lt1"/>
+                </a:solidFill>
+                <a:latin typeface="+mn-lt"/>
+                <a:ea typeface="+mn-ea"/>
+                <a:cs typeface="+mn-cs"/>
+              </a:defRPr>
+            </a:lvl9pPr>
+          </a:lstStyle>
+          <a:p>
+            <a:pPr algn="ctr"/>
+            <a:endParaRPr kumimoji="1" lang="ja-JP" altLang="en-US"/>
+          </a:p>
+        </p:txBody>
+      </p:sp>
+      <p:sp>
+        <p:nvSpPr>
+          <p:cNvPr id="24" name="左右矢印 23">
+            <a:extLst>
+              <a:ext uri="{FF2B5EF4-FFF2-40B4-BE49-F238E27FC236}">
+                <a16:creationId xmlns:a16="http://schemas.microsoft.com/office/drawing/2014/main" id="{359C419C-8A5C-F28E-4623-85B94324C8C7}"/>
+              </a:ext>
+            </a:extLst>
+          </p:cNvPr>
+          <p:cNvSpPr/>
+          <p:nvPr/>
+        </p:nvSpPr>
+        <p:spPr>
+          <a:xfrm rot="1646620">
+            <a:off x="3333540" y="2861026"/>
+            <a:ext cx="642404" cy="258306"/>
+          </a:xfrm>
+          <a:prstGeom prst="leftRightArrow">
+            <a:avLst>
+              <a:gd name="adj1" fmla="val 34906"/>
+              <a:gd name="adj2" fmla="val 50000"/>
+            </a:avLst>
+          </a:prstGeom>
+          <a:solidFill>
+            <a:srgbClr val="00B0F0"/>
+          </a:solidFill>
+          <a:ln>
+            <a:solidFill>
+              <a:schemeClr val="tx1"/>
+            </a:solidFill>
+          </a:ln>
+        </p:spPr>
+        <p:style>
+          <a:lnRef idx="2">
+            <a:schemeClr val="accent1">
+              <a:shade val="15000"/>
+            </a:schemeClr>
+          </a:lnRef>
+          <a:fillRef idx="1">
+            <a:schemeClr val="accent1"/>
+          </a:fillRef>
+          <a:effectRef idx="0">
+            <a:schemeClr val="accent1"/>
+          </a:effectRef>
+          <a:fontRef idx="minor">
+            <a:schemeClr val="lt1"/>
+          </a:fontRef>
+        </p:style>
+        <p:txBody>
+          <a:bodyPr rtlCol="0" anchor="ctr"/>
+          <a:lstStyle>
+            <a:defPPr>
+              <a:defRPr lang="ja-JP"/>
+            </a:defPPr>
+            <a:lvl1pPr marL="0" algn="l" defTabSz="914400" rtl="0" eaLnBrk="1" latinLnBrk="0" hangingPunct="1">
+              <a:defRPr kumimoji="1" sz="1800" kern="1200">
+                <a:solidFill>
+                  <a:schemeClr val="lt1"/>
+                </a:solidFill>
+                <a:latin typeface="+mn-lt"/>
+                <a:ea typeface="+mn-ea"/>
+                <a:cs typeface="+mn-cs"/>
+              </a:defRPr>
+            </a:lvl1pPr>
+            <a:lvl2pPr marL="457200" algn="l" defTabSz="914400" rtl="0" eaLnBrk="1" latinLnBrk="0" hangingPunct="1">
+              <a:defRPr kumimoji="1" sz="1800" kern="1200">
+                <a:solidFill>
+                  <a:schemeClr val="lt1"/>
+                </a:solidFill>
+                <a:latin typeface="+mn-lt"/>
+                <a:ea typeface="+mn-ea"/>
+                <a:cs typeface="+mn-cs"/>
+              </a:defRPr>
+            </a:lvl2pPr>
+            <a:lvl3pPr marL="914400" algn="l" defTabSz="914400" rtl="0" eaLnBrk="1" latinLnBrk="0" hangingPunct="1">
+              <a:defRPr kumimoji="1" sz="1800" kern="1200">
+                <a:solidFill>
+                  <a:schemeClr val="lt1"/>
+                </a:solidFill>
+                <a:latin typeface="+mn-lt"/>
+                <a:ea typeface="+mn-ea"/>
+                <a:cs typeface="+mn-cs"/>
+              </a:defRPr>
+            </a:lvl3pPr>
+            <a:lvl4pPr marL="1371600" algn="l" defTabSz="914400" rtl="0" eaLnBrk="1" latinLnBrk="0" hangingPunct="1">
+              <a:defRPr kumimoji="1" sz="1800" kern="1200">
+                <a:solidFill>
+                  <a:schemeClr val="lt1"/>
+                </a:solidFill>
+                <a:latin typeface="+mn-lt"/>
+                <a:ea typeface="+mn-ea"/>
+                <a:cs typeface="+mn-cs"/>
+              </a:defRPr>
+            </a:lvl4pPr>
+            <a:lvl5pPr marL="1828800" algn="l" defTabSz="914400" rtl="0" eaLnBrk="1" latinLnBrk="0" hangingPunct="1">
+              <a:defRPr kumimoji="1" sz="1800" kern="1200">
+                <a:solidFill>
+                  <a:schemeClr val="lt1"/>
+                </a:solidFill>
+                <a:latin typeface="+mn-lt"/>
+                <a:ea typeface="+mn-ea"/>
+                <a:cs typeface="+mn-cs"/>
+              </a:defRPr>
+            </a:lvl5pPr>
+            <a:lvl6pPr marL="2286000" algn="l" defTabSz="914400" rtl="0" eaLnBrk="1" latinLnBrk="0" hangingPunct="1">
+              <a:defRPr kumimoji="1" sz="1800" kern="1200">
+                <a:solidFill>
+                  <a:schemeClr val="lt1"/>
+                </a:solidFill>
+                <a:latin typeface="+mn-lt"/>
+                <a:ea typeface="+mn-ea"/>
+                <a:cs typeface="+mn-cs"/>
+              </a:defRPr>
+            </a:lvl6pPr>
+            <a:lvl7pPr marL="2743200" algn="l" defTabSz="914400" rtl="0" eaLnBrk="1" latinLnBrk="0" hangingPunct="1">
+              <a:defRPr kumimoji="1" sz="1800" kern="1200">
+                <a:solidFill>
+                  <a:schemeClr val="lt1"/>
+                </a:solidFill>
+                <a:latin typeface="+mn-lt"/>
+                <a:ea typeface="+mn-ea"/>
+                <a:cs typeface="+mn-cs"/>
+              </a:defRPr>
+            </a:lvl7pPr>
+            <a:lvl8pPr marL="3200400" algn="l" defTabSz="914400" rtl="0" eaLnBrk="1" latinLnBrk="0" hangingPunct="1">
+              <a:defRPr kumimoji="1" sz="1800" kern="1200">
+                <a:solidFill>
+                  <a:schemeClr val="lt1"/>
+                </a:solidFill>
+                <a:latin typeface="+mn-lt"/>
+                <a:ea typeface="+mn-ea"/>
+                <a:cs typeface="+mn-cs"/>
+              </a:defRPr>
+            </a:lvl8pPr>
+            <a:lvl9pPr marL="3657600" algn="l" defTabSz="914400" rtl="0" eaLnBrk="1" latinLnBrk="0" hangingPunct="1">
+              <a:defRPr kumimoji="1" sz="1800" kern="1200">
+                <a:solidFill>
+                  <a:schemeClr val="lt1"/>
+                </a:solidFill>
+                <a:latin typeface="+mn-lt"/>
+                <a:ea typeface="+mn-ea"/>
+                <a:cs typeface="+mn-cs"/>
+              </a:defRPr>
+            </a:lvl9pPr>
+          </a:lstStyle>
+          <a:p>
+            <a:pPr algn="ctr"/>
+            <a:endParaRPr kumimoji="1" lang="ja-JP" altLang="en-US"/>
+          </a:p>
+        </p:txBody>
+      </p:sp>
+      <p:sp>
+        <p:nvSpPr>
+          <p:cNvPr id="25" name="左右矢印 24">
+            <a:extLst>
+              <a:ext uri="{FF2B5EF4-FFF2-40B4-BE49-F238E27FC236}">
+                <a16:creationId xmlns:a16="http://schemas.microsoft.com/office/drawing/2014/main" id="{51F8A521-4253-4BA9-CC5A-E26E333BF5BB}"/>
+              </a:ext>
+            </a:extLst>
+          </p:cNvPr>
+          <p:cNvSpPr/>
+          <p:nvPr/>
+        </p:nvSpPr>
+        <p:spPr>
+          <a:xfrm rot="1646620">
+            <a:off x="4394642" y="3452758"/>
+            <a:ext cx="642404" cy="258306"/>
+          </a:xfrm>
+          <a:prstGeom prst="leftRightArrow">
+            <a:avLst>
+              <a:gd name="adj1" fmla="val 34906"/>
+              <a:gd name="adj2" fmla="val 50000"/>
+            </a:avLst>
+          </a:prstGeom>
+          <a:solidFill>
+            <a:srgbClr val="00B0F0"/>
+          </a:solidFill>
+          <a:ln>
+            <a:solidFill>
+              <a:schemeClr val="tx1"/>
+            </a:solidFill>
+          </a:ln>
+        </p:spPr>
+        <p:style>
+          <a:lnRef idx="2">
+            <a:schemeClr val="accent1">
+              <a:shade val="15000"/>
+            </a:schemeClr>
+          </a:lnRef>
+          <a:fillRef idx="1">
+            <a:schemeClr val="accent1"/>
+          </a:fillRef>
+          <a:effectRef idx="0">
+            <a:schemeClr val="accent1"/>
+          </a:effectRef>
+          <a:fontRef idx="minor">
+            <a:schemeClr val="lt1"/>
+          </a:fontRef>
+        </p:style>
+        <p:txBody>
+          <a:bodyPr rtlCol="0" anchor="ctr"/>
+          <a:lstStyle>
+            <a:defPPr>
+              <a:defRPr lang="ja-JP"/>
+            </a:defPPr>
+            <a:lvl1pPr marL="0" algn="l" defTabSz="914400" rtl="0" eaLnBrk="1" latinLnBrk="0" hangingPunct="1">
+              <a:defRPr kumimoji="1" sz="1800" kern="1200">
+                <a:solidFill>
+                  <a:schemeClr val="lt1"/>
+                </a:solidFill>
+                <a:latin typeface="+mn-lt"/>
+                <a:ea typeface="+mn-ea"/>
+                <a:cs typeface="+mn-cs"/>
+              </a:defRPr>
+            </a:lvl1pPr>
+            <a:lvl2pPr marL="457200" algn="l" defTabSz="914400" rtl="0" eaLnBrk="1" latinLnBrk="0" hangingPunct="1">
+              <a:defRPr kumimoji="1" sz="1800" kern="1200">
+                <a:solidFill>
+                  <a:schemeClr val="lt1"/>
+                </a:solidFill>
+                <a:latin typeface="+mn-lt"/>
+                <a:ea typeface="+mn-ea"/>
+                <a:cs typeface="+mn-cs"/>
+              </a:defRPr>
+            </a:lvl2pPr>
+            <a:lvl3pPr marL="914400" algn="l" defTabSz="914400" rtl="0" eaLnBrk="1" latinLnBrk="0" hangingPunct="1">
+              <a:defRPr kumimoji="1" sz="1800" kern="1200">
+                <a:solidFill>
+                  <a:schemeClr val="lt1"/>
+                </a:solidFill>
+                <a:latin typeface="+mn-lt"/>
+                <a:ea typeface="+mn-ea"/>
+                <a:cs typeface="+mn-cs"/>
+              </a:defRPr>
+            </a:lvl3pPr>
+            <a:lvl4pPr marL="1371600" algn="l" defTabSz="914400" rtl="0" eaLnBrk="1" latinLnBrk="0" hangingPunct="1">
+              <a:defRPr kumimoji="1" sz="1800" kern="1200">
+                <a:solidFill>
+                  <a:schemeClr val="lt1"/>
+                </a:solidFill>
+                <a:latin typeface="+mn-lt"/>
+                <a:ea typeface="+mn-ea"/>
+                <a:cs typeface="+mn-cs"/>
+              </a:defRPr>
+            </a:lvl4pPr>
+            <a:lvl5pPr marL="1828800" algn="l" defTabSz="914400" rtl="0" eaLnBrk="1" latinLnBrk="0" hangingPunct="1">
+              <a:defRPr kumimoji="1" sz="1800" kern="1200">
+                <a:solidFill>
+                  <a:schemeClr val="lt1"/>
+                </a:solidFill>
+                <a:latin typeface="+mn-lt"/>
+                <a:ea typeface="+mn-ea"/>
+                <a:cs typeface="+mn-cs"/>
+              </a:defRPr>
+            </a:lvl5pPr>
+            <a:lvl6pPr marL="2286000" algn="l" defTabSz="914400" rtl="0" eaLnBrk="1" latinLnBrk="0" hangingPunct="1">
+              <a:defRPr kumimoji="1" sz="1800" kern="1200">
+                <a:solidFill>
+                  <a:schemeClr val="lt1"/>
+                </a:solidFill>
+                <a:latin typeface="+mn-lt"/>
+                <a:ea typeface="+mn-ea"/>
+                <a:cs typeface="+mn-cs"/>
+              </a:defRPr>
+            </a:lvl6pPr>
+            <a:lvl7pPr marL="2743200" algn="l" defTabSz="914400" rtl="0" eaLnBrk="1" latinLnBrk="0" hangingPunct="1">
+              <a:defRPr kumimoji="1" sz="1800" kern="1200">
+                <a:solidFill>
+                  <a:schemeClr val="lt1"/>
+                </a:solidFill>
+                <a:latin typeface="+mn-lt"/>
+                <a:ea typeface="+mn-ea"/>
+                <a:cs typeface="+mn-cs"/>
+              </a:defRPr>
+            </a:lvl7pPr>
+            <a:lvl8pPr marL="3200400" algn="l" defTabSz="914400" rtl="0" eaLnBrk="1" latinLnBrk="0" hangingPunct="1">
+              <a:defRPr kumimoji="1" sz="1800" kern="1200">
+                <a:solidFill>
+                  <a:schemeClr val="lt1"/>
+                </a:solidFill>
+                <a:latin typeface="+mn-lt"/>
+                <a:ea typeface="+mn-ea"/>
+                <a:cs typeface="+mn-cs"/>
+              </a:defRPr>
+            </a:lvl8pPr>
+            <a:lvl9pPr marL="3657600" algn="l" defTabSz="914400" rtl="0" eaLnBrk="1" latinLnBrk="0" hangingPunct="1">
+              <a:defRPr kumimoji="1" sz="1800" kern="1200">
+                <a:solidFill>
+                  <a:schemeClr val="lt1"/>
+                </a:solidFill>
+                <a:latin typeface="+mn-lt"/>
+                <a:ea typeface="+mn-ea"/>
+                <a:cs typeface="+mn-cs"/>
+              </a:defRPr>
+            </a:lvl9pPr>
+          </a:lstStyle>
+          <a:p>
+            <a:pPr algn="ctr"/>
+            <a:endParaRPr kumimoji="1" lang="ja-JP" altLang="en-US"/>
+          </a:p>
+        </p:txBody>
+      </p:sp>
+      <p:sp>
+        <p:nvSpPr>
+          <p:cNvPr id="26" name="左右矢印 25">
+            <a:extLst>
+              <a:ext uri="{FF2B5EF4-FFF2-40B4-BE49-F238E27FC236}">
+                <a16:creationId xmlns:a16="http://schemas.microsoft.com/office/drawing/2014/main" id="{302F1CB2-E8FE-5BBA-AAF6-DFCB6A38BDA0}"/>
+              </a:ext>
+            </a:extLst>
+          </p:cNvPr>
+          <p:cNvSpPr/>
+          <p:nvPr/>
+        </p:nvSpPr>
+        <p:spPr>
+          <a:xfrm rot="1646620">
+            <a:off x="5471384" y="4026237"/>
+            <a:ext cx="642404" cy="258306"/>
+          </a:xfrm>
+          <a:prstGeom prst="leftRightArrow">
+            <a:avLst>
+              <a:gd name="adj1" fmla="val 34906"/>
+              <a:gd name="adj2" fmla="val 50000"/>
+            </a:avLst>
+          </a:prstGeom>
+          <a:solidFill>
+            <a:srgbClr val="00B0F0"/>
+          </a:solidFill>
+          <a:ln>
+            <a:solidFill>
+              <a:schemeClr val="tx1"/>
+            </a:solidFill>
+          </a:ln>
+        </p:spPr>
+        <p:style>
+          <a:lnRef idx="2">
+            <a:schemeClr val="accent1">
+              <a:shade val="15000"/>
+            </a:schemeClr>
+          </a:lnRef>
+          <a:fillRef idx="1">
+            <a:schemeClr val="accent1"/>
+          </a:fillRef>
+          <a:effectRef idx="0">
+            <a:schemeClr val="accent1"/>
+          </a:effectRef>
+          <a:fontRef idx="minor">
+            <a:schemeClr val="lt1"/>
+          </a:fontRef>
+        </p:style>
+        <p:txBody>
+          <a:bodyPr rtlCol="0" anchor="ctr"/>
+          <a:lstStyle>
+            <a:defPPr>
+              <a:defRPr lang="ja-JP"/>
+            </a:defPPr>
+            <a:lvl1pPr marL="0" algn="l" defTabSz="914400" rtl="0" eaLnBrk="1" latinLnBrk="0" hangingPunct="1">
+              <a:defRPr kumimoji="1" sz="1800" kern="1200">
+                <a:solidFill>
+                  <a:schemeClr val="lt1"/>
+                </a:solidFill>
+                <a:latin typeface="+mn-lt"/>
+                <a:ea typeface="+mn-ea"/>
+                <a:cs typeface="+mn-cs"/>
+              </a:defRPr>
+            </a:lvl1pPr>
+            <a:lvl2pPr marL="457200" algn="l" defTabSz="914400" rtl="0" eaLnBrk="1" latinLnBrk="0" hangingPunct="1">
+              <a:defRPr kumimoji="1" sz="1800" kern="1200">
+                <a:solidFill>
+                  <a:schemeClr val="lt1"/>
+                </a:solidFill>
+                <a:latin typeface="+mn-lt"/>
+                <a:ea typeface="+mn-ea"/>
+                <a:cs typeface="+mn-cs"/>
+              </a:defRPr>
+            </a:lvl2pPr>
+            <a:lvl3pPr marL="914400" algn="l" defTabSz="914400" rtl="0" eaLnBrk="1" latinLnBrk="0" hangingPunct="1">
+              <a:defRPr kumimoji="1" sz="1800" kern="1200">
+                <a:solidFill>
+                  <a:schemeClr val="lt1"/>
+                </a:solidFill>
+                <a:latin typeface="+mn-lt"/>
+                <a:ea typeface="+mn-ea"/>
+                <a:cs typeface="+mn-cs"/>
+              </a:defRPr>
+            </a:lvl3pPr>
+            <a:lvl4pPr marL="1371600" algn="l" defTabSz="914400" rtl="0" eaLnBrk="1" latinLnBrk="0" hangingPunct="1">
+              <a:defRPr kumimoji="1" sz="1800" kern="1200">
+                <a:solidFill>
+                  <a:schemeClr val="lt1"/>
+                </a:solidFill>
+                <a:latin typeface="+mn-lt"/>
+                <a:ea typeface="+mn-ea"/>
+                <a:cs typeface="+mn-cs"/>
+              </a:defRPr>
+            </a:lvl4pPr>
+            <a:lvl5pPr marL="1828800" algn="l" defTabSz="914400" rtl="0" eaLnBrk="1" latinLnBrk="0" hangingPunct="1">
+              <a:defRPr kumimoji="1" sz="1800" kern="1200">
+                <a:solidFill>
+                  <a:schemeClr val="lt1"/>
+                </a:solidFill>
+                <a:latin typeface="+mn-lt"/>
+                <a:ea typeface="+mn-ea"/>
+                <a:cs typeface="+mn-cs"/>
+              </a:defRPr>
+            </a:lvl5pPr>
+            <a:lvl6pPr marL="2286000" algn="l" defTabSz="914400" rtl="0" eaLnBrk="1" latinLnBrk="0" hangingPunct="1">
+              <a:defRPr kumimoji="1" sz="1800" kern="1200">
+                <a:solidFill>
+                  <a:schemeClr val="lt1"/>
+                </a:solidFill>
+                <a:latin typeface="+mn-lt"/>
+                <a:ea typeface="+mn-ea"/>
+                <a:cs typeface="+mn-cs"/>
+              </a:defRPr>
+            </a:lvl6pPr>
+            <a:lvl7pPr marL="2743200" algn="l" defTabSz="914400" rtl="0" eaLnBrk="1" latinLnBrk="0" hangingPunct="1">
+              <a:defRPr kumimoji="1" sz="1800" kern="1200">
+                <a:solidFill>
+                  <a:schemeClr val="lt1"/>
+                </a:solidFill>
+                <a:latin typeface="+mn-lt"/>
+                <a:ea typeface="+mn-ea"/>
+                <a:cs typeface="+mn-cs"/>
+              </a:defRPr>
+            </a:lvl7pPr>
+            <a:lvl8pPr marL="3200400" algn="l" defTabSz="914400" rtl="0" eaLnBrk="1" latinLnBrk="0" hangingPunct="1">
+              <a:defRPr kumimoji="1" sz="1800" kern="1200">
+                <a:solidFill>
+                  <a:schemeClr val="lt1"/>
+                </a:solidFill>
+                <a:latin typeface="+mn-lt"/>
+                <a:ea typeface="+mn-ea"/>
+                <a:cs typeface="+mn-cs"/>
+              </a:defRPr>
+            </a:lvl8pPr>
+            <a:lvl9pPr marL="3657600" algn="l" defTabSz="914400" rtl="0" eaLnBrk="1" latinLnBrk="0" hangingPunct="1">
+              <a:defRPr kumimoji="1" sz="1800" kern="1200">
+                <a:solidFill>
+                  <a:schemeClr val="lt1"/>
+                </a:solidFill>
+                <a:latin typeface="+mn-lt"/>
+                <a:ea typeface="+mn-ea"/>
+                <a:cs typeface="+mn-cs"/>
+              </a:defRPr>
+            </a:lvl9pPr>
+          </a:lstStyle>
+          <a:p>
+            <a:pPr algn="ctr"/>
+            <a:endParaRPr kumimoji="1" lang="ja-JP" altLang="en-US"/>
+          </a:p>
+        </p:txBody>
+      </p:sp>
+      <p:sp>
+        <p:nvSpPr>
+          <p:cNvPr id="27" name="左右矢印 26">
+            <a:extLst>
+              <a:ext uri="{FF2B5EF4-FFF2-40B4-BE49-F238E27FC236}">
+                <a16:creationId xmlns:a16="http://schemas.microsoft.com/office/drawing/2014/main" id="{37F197F5-E734-D1E7-C379-4E0074D08232}"/>
+              </a:ext>
+            </a:extLst>
+          </p:cNvPr>
+          <p:cNvSpPr/>
+          <p:nvPr/>
+        </p:nvSpPr>
+        <p:spPr>
+          <a:xfrm rot="1646620">
+            <a:off x="6769200" y="4545363"/>
+            <a:ext cx="418785" cy="258306"/>
+          </a:xfrm>
+          <a:prstGeom prst="leftRightArrow">
+            <a:avLst>
+              <a:gd name="adj1" fmla="val 34906"/>
+              <a:gd name="adj2" fmla="val 50000"/>
+            </a:avLst>
+          </a:prstGeom>
+          <a:solidFill>
+            <a:srgbClr val="00B0F0"/>
+          </a:solidFill>
+          <a:ln>
+            <a:solidFill>
+              <a:schemeClr val="tx1"/>
+            </a:solidFill>
+          </a:ln>
+        </p:spPr>
+        <p:style>
+          <a:lnRef idx="2">
+            <a:schemeClr val="accent1">
+              <a:shade val="15000"/>
+            </a:schemeClr>
+          </a:lnRef>
+          <a:fillRef idx="1">
+            <a:schemeClr val="accent1"/>
+          </a:fillRef>
+          <a:effectRef idx="0">
+            <a:schemeClr val="accent1"/>
+          </a:effectRef>
+          <a:fontRef idx="minor">
+            <a:schemeClr val="lt1"/>
+          </a:fontRef>
+        </p:style>
+        <p:txBody>
+          <a:bodyPr rtlCol="0" anchor="ctr"/>
+          <a:lstStyle>
+            <a:defPPr>
+              <a:defRPr lang="ja-JP"/>
+            </a:defPPr>
+            <a:lvl1pPr marL="0" algn="l" defTabSz="914400" rtl="0" eaLnBrk="1" latinLnBrk="0" hangingPunct="1">
+              <a:defRPr kumimoji="1" sz="1800" kern="1200">
+                <a:solidFill>
+                  <a:schemeClr val="lt1"/>
+                </a:solidFill>
+                <a:latin typeface="+mn-lt"/>
+                <a:ea typeface="+mn-ea"/>
+                <a:cs typeface="+mn-cs"/>
+              </a:defRPr>
+            </a:lvl1pPr>
+            <a:lvl2pPr marL="457200" algn="l" defTabSz="914400" rtl="0" eaLnBrk="1" latinLnBrk="0" hangingPunct="1">
+              <a:defRPr kumimoji="1" sz="1800" kern="1200">
+                <a:solidFill>
+                  <a:schemeClr val="lt1"/>
+                </a:solidFill>
+                <a:latin typeface="+mn-lt"/>
+                <a:ea typeface="+mn-ea"/>
+                <a:cs typeface="+mn-cs"/>
+              </a:defRPr>
+            </a:lvl2pPr>
+            <a:lvl3pPr marL="914400" algn="l" defTabSz="914400" rtl="0" eaLnBrk="1" latinLnBrk="0" hangingPunct="1">
+              <a:defRPr kumimoji="1" sz="1800" kern="1200">
+                <a:solidFill>
+                  <a:schemeClr val="lt1"/>
+                </a:solidFill>
+                <a:latin typeface="+mn-lt"/>
+                <a:ea typeface="+mn-ea"/>
+                <a:cs typeface="+mn-cs"/>
+              </a:defRPr>
+            </a:lvl3pPr>
+            <a:lvl4pPr marL="1371600" algn="l" defTabSz="914400" rtl="0" eaLnBrk="1" latinLnBrk="0" hangingPunct="1">
+              <a:defRPr kumimoji="1" sz="1800" kern="1200">
+                <a:solidFill>
+                  <a:schemeClr val="lt1"/>
+                </a:solidFill>
+                <a:latin typeface="+mn-lt"/>
+                <a:ea typeface="+mn-ea"/>
+                <a:cs typeface="+mn-cs"/>
+              </a:defRPr>
+            </a:lvl4pPr>
+            <a:lvl5pPr marL="1828800" algn="l" defTabSz="914400" rtl="0" eaLnBrk="1" latinLnBrk="0" hangingPunct="1">
+              <a:defRPr kumimoji="1" sz="1800" kern="1200">
+                <a:solidFill>
+                  <a:schemeClr val="lt1"/>
+                </a:solidFill>
+                <a:latin typeface="+mn-lt"/>
+                <a:ea typeface="+mn-ea"/>
+                <a:cs typeface="+mn-cs"/>
+              </a:defRPr>
+            </a:lvl5pPr>
+            <a:lvl6pPr marL="2286000" algn="l" defTabSz="914400" rtl="0" eaLnBrk="1" latinLnBrk="0" hangingPunct="1">
+              <a:defRPr kumimoji="1" sz="1800" kern="1200">
+                <a:solidFill>
+                  <a:schemeClr val="lt1"/>
+                </a:solidFill>
+                <a:latin typeface="+mn-lt"/>
+                <a:ea typeface="+mn-ea"/>
+                <a:cs typeface="+mn-cs"/>
+              </a:defRPr>
+            </a:lvl6pPr>
+            <a:lvl7pPr marL="2743200" algn="l" defTabSz="914400" rtl="0" eaLnBrk="1" latinLnBrk="0" hangingPunct="1">
+              <a:defRPr kumimoji="1" sz="1800" kern="1200">
+                <a:solidFill>
+                  <a:schemeClr val="lt1"/>
+                </a:solidFill>
+                <a:latin typeface="+mn-lt"/>
+                <a:ea typeface="+mn-ea"/>
+                <a:cs typeface="+mn-cs"/>
+              </a:defRPr>
+            </a:lvl7pPr>
+            <a:lvl8pPr marL="3200400" algn="l" defTabSz="914400" rtl="0" eaLnBrk="1" latinLnBrk="0" hangingPunct="1">
+              <a:defRPr kumimoji="1" sz="1800" kern="1200">
+                <a:solidFill>
+                  <a:schemeClr val="lt1"/>
+                </a:solidFill>
+                <a:latin typeface="+mn-lt"/>
+                <a:ea typeface="+mn-ea"/>
+                <a:cs typeface="+mn-cs"/>
+              </a:defRPr>
+            </a:lvl8pPr>
+            <a:lvl9pPr marL="3657600" algn="l" defTabSz="914400" rtl="0" eaLnBrk="1" latinLnBrk="0" hangingPunct="1">
+              <a:defRPr kumimoji="1" sz="1800" kern="1200">
+                <a:solidFill>
+                  <a:schemeClr val="lt1"/>
+                </a:solidFill>
+                <a:latin typeface="+mn-lt"/>
+                <a:ea typeface="+mn-ea"/>
+                <a:cs typeface="+mn-cs"/>
+              </a:defRPr>
+            </a:lvl9pPr>
+          </a:lstStyle>
+          <a:p>
+            <a:pPr algn="ctr"/>
+            <a:endParaRPr kumimoji="1" lang="ja-JP" altLang="en-US"/>
+          </a:p>
+        </p:txBody>
+      </p:sp>
+      <p:sp>
+        <p:nvSpPr>
+          <p:cNvPr id="28" name="TextBox 12">
+            <a:extLst>
+              <a:ext uri="{FF2B5EF4-FFF2-40B4-BE49-F238E27FC236}">
+                <a16:creationId xmlns:a16="http://schemas.microsoft.com/office/drawing/2014/main" id="{B70254D3-61D3-E9A6-51E8-C76516D357B3}"/>
+              </a:ext>
+            </a:extLst>
+          </p:cNvPr>
+          <p:cNvSpPr txBox="1"/>
+          <p:nvPr/>
+        </p:nvSpPr>
+        <p:spPr>
+          <a:xfrm>
+            <a:off x="3584887" y="2620629"/>
+            <a:ext cx="922200" cy="400110"/>
+          </a:xfrm>
+          <a:prstGeom prst="rect">
+            <a:avLst/>
+          </a:prstGeom>
+          <a:noFill/>
+          <a:ln>
+            <a:noFill/>
+          </a:ln>
+        </p:spPr>
+        <p:txBody>
+          <a:bodyPr rot="0" spcFirstLastPara="0" vert="horz" wrap="square" lIns="91440" tIns="45720" rIns="91440" bIns="45720" numCol="1" spcCol="0" rtlCol="0" fromWordArt="0" anchor="t" anchorCtr="0" forceAA="0" compatLnSpc="1">
+            <a:prstTxWarp prst="textNoShape">
+              <a:avLst/>
+            </a:prstTxWarp>
+            <a:spAutoFit/>
+          </a:bodyPr>
+          <a:lstStyle>
+            <a:defPPr>
+              <a:defRPr lang="ja-JP"/>
+            </a:defPPr>
+            <a:lvl1pPr marL="0" algn="l" defTabSz="914400" rtl="0" eaLnBrk="1" latinLnBrk="0" hangingPunct="1">
+              <a:defRPr kumimoji="1" sz="1800" kern="1200">
+                <a:solidFill>
+                  <a:schemeClr val="tx1"/>
+                </a:solidFill>
+                <a:latin typeface="+mn-lt"/>
+                <a:ea typeface="+mn-ea"/>
+                <a:cs typeface="+mn-cs"/>
+              </a:defRPr>
+            </a:lvl1pPr>
+            <a:lvl2pPr marL="457200" algn="l" defTabSz="914400" rtl="0" eaLnBrk="1" latinLnBrk="0" hangingPunct="1">
+              <a:defRPr kumimoji="1" sz="1800" kern="1200">
+                <a:solidFill>
+                  <a:schemeClr val="tx1"/>
+                </a:solidFill>
+                <a:latin typeface="+mn-lt"/>
+                <a:ea typeface="+mn-ea"/>
+                <a:cs typeface="+mn-cs"/>
+              </a:defRPr>
+            </a:lvl2pPr>
+            <a:lvl3pPr marL="914400" algn="l" defTabSz="914400" rtl="0" eaLnBrk="1" latinLnBrk="0" hangingPunct="1">
+              <a:defRPr kumimoji="1" sz="1800" kern="1200">
+                <a:solidFill>
+                  <a:schemeClr val="tx1"/>
+                </a:solidFill>
+                <a:latin typeface="+mn-lt"/>
+                <a:ea typeface="+mn-ea"/>
+                <a:cs typeface="+mn-cs"/>
+              </a:defRPr>
+            </a:lvl3pPr>
+            <a:lvl4pPr marL="1371600" algn="l" defTabSz="914400" rtl="0" eaLnBrk="1" latinLnBrk="0" hangingPunct="1">
+              <a:defRPr kumimoji="1" sz="1800" kern="1200">
+                <a:solidFill>
+                  <a:schemeClr val="tx1"/>
+                </a:solidFill>
+                <a:latin typeface="+mn-lt"/>
+                <a:ea typeface="+mn-ea"/>
+                <a:cs typeface="+mn-cs"/>
+              </a:defRPr>
+            </a:lvl4pPr>
+            <a:lvl5pPr marL="1828800" algn="l" defTabSz="914400" rtl="0" eaLnBrk="1" latinLnBrk="0" hangingPunct="1">
+              <a:defRPr kumimoji="1" sz="1800" kern="1200">
+                <a:solidFill>
+                  <a:schemeClr val="tx1"/>
+                </a:solidFill>
+                <a:latin typeface="+mn-lt"/>
+                <a:ea typeface="+mn-ea"/>
+                <a:cs typeface="+mn-cs"/>
+              </a:defRPr>
+            </a:lvl5pPr>
+            <a:lvl6pPr marL="2286000" algn="l" defTabSz="914400" rtl="0" eaLnBrk="1" latinLnBrk="0" hangingPunct="1">
+              <a:defRPr kumimoji="1" sz="1800" kern="1200">
+                <a:solidFill>
+                  <a:schemeClr val="tx1"/>
+                </a:solidFill>
+                <a:latin typeface="+mn-lt"/>
+                <a:ea typeface="+mn-ea"/>
+                <a:cs typeface="+mn-cs"/>
+              </a:defRPr>
+            </a:lvl6pPr>
+            <a:lvl7pPr marL="2743200" algn="l" defTabSz="914400" rtl="0" eaLnBrk="1" latinLnBrk="0" hangingPunct="1">
+              <a:defRPr kumimoji="1" sz="1800" kern="1200">
+                <a:solidFill>
+                  <a:schemeClr val="tx1"/>
+                </a:solidFill>
+                <a:latin typeface="+mn-lt"/>
+                <a:ea typeface="+mn-ea"/>
+                <a:cs typeface="+mn-cs"/>
+              </a:defRPr>
+            </a:lvl7pPr>
+            <a:lvl8pPr marL="3200400" algn="l" defTabSz="914400" rtl="0" eaLnBrk="1" latinLnBrk="0" hangingPunct="1">
+              <a:defRPr kumimoji="1" sz="1800" kern="1200">
+                <a:solidFill>
+                  <a:schemeClr val="tx1"/>
+                </a:solidFill>
+                <a:latin typeface="+mn-lt"/>
+                <a:ea typeface="+mn-ea"/>
+                <a:cs typeface="+mn-cs"/>
+              </a:defRPr>
+            </a:lvl8pPr>
+            <a:lvl9pPr marL="3657600" algn="l" defTabSz="914400" rtl="0" eaLnBrk="1" latinLnBrk="0" hangingPunct="1">
+              <a:defRPr kumimoji="1" sz="1800" kern="1200">
+                <a:solidFill>
+                  <a:schemeClr val="tx1"/>
+                </a:solidFill>
+                <a:latin typeface="+mn-lt"/>
+                <a:ea typeface="+mn-ea"/>
+                <a:cs typeface="+mn-cs"/>
+              </a:defRPr>
+            </a:lvl9pPr>
+          </a:lstStyle>
+          <a:p>
+            <a:pPr algn="ctr"/>
+            <a:r>
+              <a:rPr lang="ja-JP" altLang="en-US" sz="2000">
+                <a:latin typeface="+mn-ea"/>
+              </a:rPr>
+              <a:t>誤差</a:t>
+            </a:r>
+            <a:endParaRPr lang="en-US" altLang="ja-JP" sz="2000">
+              <a:latin typeface="+mn-ea"/>
+            </a:endParaRPr>
+          </a:p>
+        </p:txBody>
+      </p:sp>
+      <p:sp>
+        <p:nvSpPr>
+          <p:cNvPr id="29" name="TextBox 12">
+            <a:extLst>
+              <a:ext uri="{FF2B5EF4-FFF2-40B4-BE49-F238E27FC236}">
+                <a16:creationId xmlns:a16="http://schemas.microsoft.com/office/drawing/2014/main" id="{CFA1F570-C77F-8DE8-41BB-D6E3E11A4AC4}"/>
+              </a:ext>
+            </a:extLst>
+          </p:cNvPr>
+          <p:cNvSpPr txBox="1"/>
+          <p:nvPr/>
+        </p:nvSpPr>
+        <p:spPr>
+          <a:xfrm>
+            <a:off x="5707862" y="3761546"/>
+            <a:ext cx="922200" cy="400110"/>
+          </a:xfrm>
+          <a:prstGeom prst="rect">
+            <a:avLst/>
+          </a:prstGeom>
+          <a:noFill/>
+          <a:ln>
+            <a:noFill/>
+          </a:ln>
+        </p:spPr>
+        <p:txBody>
+          <a:bodyPr rot="0" spcFirstLastPara="0" vert="horz" wrap="square" lIns="91440" tIns="45720" rIns="91440" bIns="45720" numCol="1" spcCol="0" rtlCol="0" fromWordArt="0" anchor="t" anchorCtr="0" forceAA="0" compatLnSpc="1">
+            <a:prstTxWarp prst="textNoShape">
+              <a:avLst/>
+            </a:prstTxWarp>
+            <a:spAutoFit/>
+          </a:bodyPr>
+          <a:lstStyle>
+            <a:defPPr>
+              <a:defRPr lang="ja-JP"/>
+            </a:defPPr>
+            <a:lvl1pPr marL="0" algn="l" defTabSz="914400" rtl="0" eaLnBrk="1" latinLnBrk="0" hangingPunct="1">
+              <a:defRPr kumimoji="1" sz="1800" kern="1200">
+                <a:solidFill>
+                  <a:schemeClr val="tx1"/>
+                </a:solidFill>
+                <a:latin typeface="+mn-lt"/>
+                <a:ea typeface="+mn-ea"/>
+                <a:cs typeface="+mn-cs"/>
+              </a:defRPr>
+            </a:lvl1pPr>
+            <a:lvl2pPr marL="457200" algn="l" defTabSz="914400" rtl="0" eaLnBrk="1" latinLnBrk="0" hangingPunct="1">
+              <a:defRPr kumimoji="1" sz="1800" kern="1200">
+                <a:solidFill>
+                  <a:schemeClr val="tx1"/>
+                </a:solidFill>
+                <a:latin typeface="+mn-lt"/>
+                <a:ea typeface="+mn-ea"/>
+                <a:cs typeface="+mn-cs"/>
+              </a:defRPr>
+            </a:lvl2pPr>
+            <a:lvl3pPr marL="914400" algn="l" defTabSz="914400" rtl="0" eaLnBrk="1" latinLnBrk="0" hangingPunct="1">
+              <a:defRPr kumimoji="1" sz="1800" kern="1200">
+                <a:solidFill>
+                  <a:schemeClr val="tx1"/>
+                </a:solidFill>
+                <a:latin typeface="+mn-lt"/>
+                <a:ea typeface="+mn-ea"/>
+                <a:cs typeface="+mn-cs"/>
+              </a:defRPr>
+            </a:lvl3pPr>
+            <a:lvl4pPr marL="1371600" algn="l" defTabSz="914400" rtl="0" eaLnBrk="1" latinLnBrk="0" hangingPunct="1">
+              <a:defRPr kumimoji="1" sz="1800" kern="1200">
+                <a:solidFill>
+                  <a:schemeClr val="tx1"/>
+                </a:solidFill>
+                <a:latin typeface="+mn-lt"/>
+                <a:ea typeface="+mn-ea"/>
+                <a:cs typeface="+mn-cs"/>
+              </a:defRPr>
+            </a:lvl4pPr>
+            <a:lvl5pPr marL="1828800" algn="l" defTabSz="914400" rtl="0" eaLnBrk="1" latinLnBrk="0" hangingPunct="1">
+              <a:defRPr kumimoji="1" sz="1800" kern="1200">
+                <a:solidFill>
+                  <a:schemeClr val="tx1"/>
+                </a:solidFill>
+                <a:latin typeface="+mn-lt"/>
+                <a:ea typeface="+mn-ea"/>
+                <a:cs typeface="+mn-cs"/>
+              </a:defRPr>
+            </a:lvl5pPr>
+            <a:lvl6pPr marL="2286000" algn="l" defTabSz="914400" rtl="0" eaLnBrk="1" latinLnBrk="0" hangingPunct="1">
+              <a:defRPr kumimoji="1" sz="1800" kern="1200">
+                <a:solidFill>
+                  <a:schemeClr val="tx1"/>
+                </a:solidFill>
+                <a:latin typeface="+mn-lt"/>
+                <a:ea typeface="+mn-ea"/>
+                <a:cs typeface="+mn-cs"/>
+              </a:defRPr>
+            </a:lvl6pPr>
+            <a:lvl7pPr marL="2743200" algn="l" defTabSz="914400" rtl="0" eaLnBrk="1" latinLnBrk="0" hangingPunct="1">
+              <a:defRPr kumimoji="1" sz="1800" kern="1200">
+                <a:solidFill>
+                  <a:schemeClr val="tx1"/>
+                </a:solidFill>
+                <a:latin typeface="+mn-lt"/>
+                <a:ea typeface="+mn-ea"/>
+                <a:cs typeface="+mn-cs"/>
+              </a:defRPr>
+            </a:lvl7pPr>
+            <a:lvl8pPr marL="3200400" algn="l" defTabSz="914400" rtl="0" eaLnBrk="1" latinLnBrk="0" hangingPunct="1">
+              <a:defRPr kumimoji="1" sz="1800" kern="1200">
+                <a:solidFill>
+                  <a:schemeClr val="tx1"/>
+                </a:solidFill>
+                <a:latin typeface="+mn-lt"/>
+                <a:ea typeface="+mn-ea"/>
+                <a:cs typeface="+mn-cs"/>
+              </a:defRPr>
+            </a:lvl8pPr>
+            <a:lvl9pPr marL="3657600" algn="l" defTabSz="914400" rtl="0" eaLnBrk="1" latinLnBrk="0" hangingPunct="1">
+              <a:defRPr kumimoji="1" sz="1800" kern="1200">
+                <a:solidFill>
+                  <a:schemeClr val="tx1"/>
+                </a:solidFill>
+                <a:latin typeface="+mn-lt"/>
+                <a:ea typeface="+mn-ea"/>
+                <a:cs typeface="+mn-cs"/>
+              </a:defRPr>
+            </a:lvl9pPr>
+          </a:lstStyle>
+          <a:p>
+            <a:pPr algn="ctr"/>
+            <a:r>
+              <a:rPr lang="ja-JP" altLang="en-US" sz="2000">
+                <a:latin typeface="+mn-ea"/>
+              </a:rPr>
+              <a:t>誤差</a:t>
+            </a:r>
+            <a:endParaRPr lang="en-US" altLang="ja-JP" sz="2000">
+              <a:latin typeface="+mn-ea"/>
+            </a:endParaRPr>
+          </a:p>
+        </p:txBody>
+      </p:sp>
+      <p:sp>
+        <p:nvSpPr>
+          <p:cNvPr id="30" name="TextBox 12">
+            <a:extLst>
+              <a:ext uri="{FF2B5EF4-FFF2-40B4-BE49-F238E27FC236}">
+                <a16:creationId xmlns:a16="http://schemas.microsoft.com/office/drawing/2014/main" id="{0670D85B-C6CE-0F30-2DBA-3322886D9C09}"/>
+              </a:ext>
+            </a:extLst>
+          </p:cNvPr>
+          <p:cNvSpPr txBox="1"/>
+          <p:nvPr/>
+        </p:nvSpPr>
+        <p:spPr>
+          <a:xfrm>
+            <a:off x="4850085" y="3367444"/>
+            <a:ext cx="922200" cy="400110"/>
+          </a:xfrm>
+          <a:prstGeom prst="rect">
+            <a:avLst/>
+          </a:prstGeom>
+          <a:noFill/>
+          <a:ln>
+            <a:noFill/>
+          </a:ln>
+        </p:spPr>
+        <p:txBody>
+          <a:bodyPr rot="0" spcFirstLastPara="0" vert="horz" wrap="square" lIns="91440" tIns="45720" rIns="91440" bIns="45720" numCol="1" spcCol="0" rtlCol="0" fromWordArt="0" anchor="t" anchorCtr="0" forceAA="0" compatLnSpc="1">
+            <a:prstTxWarp prst="textNoShape">
+              <a:avLst/>
+            </a:prstTxWarp>
+            <a:spAutoFit/>
+          </a:bodyPr>
+          <a:lstStyle>
+            <a:defPPr>
+              <a:defRPr lang="ja-JP"/>
+            </a:defPPr>
+            <a:lvl1pPr marL="0" algn="l" defTabSz="914400" rtl="0" eaLnBrk="1" latinLnBrk="0" hangingPunct="1">
+              <a:defRPr kumimoji="1" sz="1800" kern="1200">
+                <a:solidFill>
+                  <a:schemeClr val="tx1"/>
+                </a:solidFill>
+                <a:latin typeface="+mn-lt"/>
+                <a:ea typeface="+mn-ea"/>
+                <a:cs typeface="+mn-cs"/>
+              </a:defRPr>
+            </a:lvl1pPr>
+            <a:lvl2pPr marL="457200" algn="l" defTabSz="914400" rtl="0" eaLnBrk="1" latinLnBrk="0" hangingPunct="1">
+              <a:defRPr kumimoji="1" sz="1800" kern="1200">
+                <a:solidFill>
+                  <a:schemeClr val="tx1"/>
+                </a:solidFill>
+                <a:latin typeface="+mn-lt"/>
+                <a:ea typeface="+mn-ea"/>
+                <a:cs typeface="+mn-cs"/>
+              </a:defRPr>
+            </a:lvl2pPr>
+            <a:lvl3pPr marL="914400" algn="l" defTabSz="914400" rtl="0" eaLnBrk="1" latinLnBrk="0" hangingPunct="1">
+              <a:defRPr kumimoji="1" sz="1800" kern="1200">
+                <a:solidFill>
+                  <a:schemeClr val="tx1"/>
+                </a:solidFill>
+                <a:latin typeface="+mn-lt"/>
+                <a:ea typeface="+mn-ea"/>
+                <a:cs typeface="+mn-cs"/>
+              </a:defRPr>
+            </a:lvl3pPr>
+            <a:lvl4pPr marL="1371600" algn="l" defTabSz="914400" rtl="0" eaLnBrk="1" latinLnBrk="0" hangingPunct="1">
+              <a:defRPr kumimoji="1" sz="1800" kern="1200">
+                <a:solidFill>
+                  <a:schemeClr val="tx1"/>
+                </a:solidFill>
+                <a:latin typeface="+mn-lt"/>
+                <a:ea typeface="+mn-ea"/>
+                <a:cs typeface="+mn-cs"/>
+              </a:defRPr>
+            </a:lvl4pPr>
+            <a:lvl5pPr marL="1828800" algn="l" defTabSz="914400" rtl="0" eaLnBrk="1" latinLnBrk="0" hangingPunct="1">
+              <a:defRPr kumimoji="1" sz="1800" kern="1200">
+                <a:solidFill>
+                  <a:schemeClr val="tx1"/>
+                </a:solidFill>
+                <a:latin typeface="+mn-lt"/>
+                <a:ea typeface="+mn-ea"/>
+                <a:cs typeface="+mn-cs"/>
+              </a:defRPr>
+            </a:lvl5pPr>
+            <a:lvl6pPr marL="2286000" algn="l" defTabSz="914400" rtl="0" eaLnBrk="1" latinLnBrk="0" hangingPunct="1">
+              <a:defRPr kumimoji="1" sz="1800" kern="1200">
+                <a:solidFill>
+                  <a:schemeClr val="tx1"/>
+                </a:solidFill>
+                <a:latin typeface="+mn-lt"/>
+                <a:ea typeface="+mn-ea"/>
+                <a:cs typeface="+mn-cs"/>
+              </a:defRPr>
+            </a:lvl6pPr>
+            <a:lvl7pPr marL="2743200" algn="l" defTabSz="914400" rtl="0" eaLnBrk="1" latinLnBrk="0" hangingPunct="1">
+              <a:defRPr kumimoji="1" sz="1800" kern="1200">
+                <a:solidFill>
+                  <a:schemeClr val="tx1"/>
+                </a:solidFill>
+                <a:latin typeface="+mn-lt"/>
+                <a:ea typeface="+mn-ea"/>
+                <a:cs typeface="+mn-cs"/>
+              </a:defRPr>
+            </a:lvl7pPr>
+            <a:lvl8pPr marL="3200400" algn="l" defTabSz="914400" rtl="0" eaLnBrk="1" latinLnBrk="0" hangingPunct="1">
+              <a:defRPr kumimoji="1" sz="1800" kern="1200">
+                <a:solidFill>
+                  <a:schemeClr val="tx1"/>
+                </a:solidFill>
+                <a:latin typeface="+mn-lt"/>
+                <a:ea typeface="+mn-ea"/>
+                <a:cs typeface="+mn-cs"/>
+              </a:defRPr>
+            </a:lvl8pPr>
+            <a:lvl9pPr marL="3657600" algn="l" defTabSz="914400" rtl="0" eaLnBrk="1" latinLnBrk="0" hangingPunct="1">
+              <a:defRPr kumimoji="1" sz="1800" kern="1200">
+                <a:solidFill>
+                  <a:schemeClr val="tx1"/>
+                </a:solidFill>
+                <a:latin typeface="+mn-lt"/>
+                <a:ea typeface="+mn-ea"/>
+                <a:cs typeface="+mn-cs"/>
+              </a:defRPr>
+            </a:lvl9pPr>
+          </a:lstStyle>
+          <a:p>
+            <a:pPr algn="ctr"/>
+            <a:r>
+              <a:rPr lang="ja-JP" altLang="en-US" sz="2000">
+                <a:latin typeface="+mn-ea"/>
+              </a:rPr>
+              <a:t>誤差</a:t>
+            </a:r>
+            <a:endParaRPr lang="en-US" altLang="ja-JP" sz="2000">
+              <a:latin typeface="+mn-ea"/>
+            </a:endParaRPr>
+          </a:p>
+        </p:txBody>
+      </p:sp>
+      <p:sp>
+        <p:nvSpPr>
+          <p:cNvPr id="31" name="TextBox 12">
+            <a:extLst>
+              <a:ext uri="{FF2B5EF4-FFF2-40B4-BE49-F238E27FC236}">
+                <a16:creationId xmlns:a16="http://schemas.microsoft.com/office/drawing/2014/main" id="{E0C161A1-6C35-AF2D-7647-7EC2DEC9A289}"/>
+              </a:ext>
+            </a:extLst>
+          </p:cNvPr>
+          <p:cNvSpPr txBox="1"/>
+          <p:nvPr/>
+        </p:nvSpPr>
+        <p:spPr>
+          <a:xfrm>
+            <a:off x="6937061" y="4271041"/>
+            <a:ext cx="922200" cy="400110"/>
+          </a:xfrm>
+          <a:prstGeom prst="rect">
+            <a:avLst/>
+          </a:prstGeom>
+          <a:noFill/>
+          <a:ln>
+            <a:noFill/>
+          </a:ln>
+        </p:spPr>
+        <p:txBody>
+          <a:bodyPr rot="0" spcFirstLastPara="0" vert="horz" wrap="square" lIns="91440" tIns="45720" rIns="91440" bIns="45720" numCol="1" spcCol="0" rtlCol="0" fromWordArt="0" anchor="t" anchorCtr="0" forceAA="0" compatLnSpc="1">
+            <a:prstTxWarp prst="textNoShape">
+              <a:avLst/>
+            </a:prstTxWarp>
+            <a:spAutoFit/>
+          </a:bodyPr>
+          <a:lstStyle>
+            <a:defPPr>
+              <a:defRPr lang="ja-JP"/>
+            </a:defPPr>
+            <a:lvl1pPr marL="0" algn="l" defTabSz="914400" rtl="0" eaLnBrk="1" latinLnBrk="0" hangingPunct="1">
+              <a:defRPr kumimoji="1" sz="1800" kern="1200">
+                <a:solidFill>
+                  <a:schemeClr val="tx1"/>
+                </a:solidFill>
+                <a:latin typeface="+mn-lt"/>
+                <a:ea typeface="+mn-ea"/>
+                <a:cs typeface="+mn-cs"/>
+              </a:defRPr>
+            </a:lvl1pPr>
+            <a:lvl2pPr marL="457200" algn="l" defTabSz="914400" rtl="0" eaLnBrk="1" latinLnBrk="0" hangingPunct="1">
+              <a:defRPr kumimoji="1" sz="1800" kern="1200">
+                <a:solidFill>
+                  <a:schemeClr val="tx1"/>
+                </a:solidFill>
+                <a:latin typeface="+mn-lt"/>
+                <a:ea typeface="+mn-ea"/>
+                <a:cs typeface="+mn-cs"/>
+              </a:defRPr>
+            </a:lvl2pPr>
+            <a:lvl3pPr marL="914400" algn="l" defTabSz="914400" rtl="0" eaLnBrk="1" latinLnBrk="0" hangingPunct="1">
+              <a:defRPr kumimoji="1" sz="1800" kern="1200">
+                <a:solidFill>
+                  <a:schemeClr val="tx1"/>
+                </a:solidFill>
+                <a:latin typeface="+mn-lt"/>
+                <a:ea typeface="+mn-ea"/>
+                <a:cs typeface="+mn-cs"/>
+              </a:defRPr>
+            </a:lvl3pPr>
+            <a:lvl4pPr marL="1371600" algn="l" defTabSz="914400" rtl="0" eaLnBrk="1" latinLnBrk="0" hangingPunct="1">
+              <a:defRPr kumimoji="1" sz="1800" kern="1200">
+                <a:solidFill>
+                  <a:schemeClr val="tx1"/>
+                </a:solidFill>
+                <a:latin typeface="+mn-lt"/>
+                <a:ea typeface="+mn-ea"/>
+                <a:cs typeface="+mn-cs"/>
+              </a:defRPr>
+            </a:lvl4pPr>
+            <a:lvl5pPr marL="1828800" algn="l" defTabSz="914400" rtl="0" eaLnBrk="1" latinLnBrk="0" hangingPunct="1">
+              <a:defRPr kumimoji="1" sz="1800" kern="1200">
+                <a:solidFill>
+                  <a:schemeClr val="tx1"/>
+                </a:solidFill>
+                <a:latin typeface="+mn-lt"/>
+                <a:ea typeface="+mn-ea"/>
+                <a:cs typeface="+mn-cs"/>
+              </a:defRPr>
+            </a:lvl5pPr>
+            <a:lvl6pPr marL="2286000" algn="l" defTabSz="914400" rtl="0" eaLnBrk="1" latinLnBrk="0" hangingPunct="1">
+              <a:defRPr kumimoji="1" sz="1800" kern="1200">
+                <a:solidFill>
+                  <a:schemeClr val="tx1"/>
+                </a:solidFill>
+                <a:latin typeface="+mn-lt"/>
+                <a:ea typeface="+mn-ea"/>
+                <a:cs typeface="+mn-cs"/>
+              </a:defRPr>
+            </a:lvl6pPr>
+            <a:lvl7pPr marL="2743200" algn="l" defTabSz="914400" rtl="0" eaLnBrk="1" latinLnBrk="0" hangingPunct="1">
+              <a:defRPr kumimoji="1" sz="1800" kern="1200">
+                <a:solidFill>
+                  <a:schemeClr val="tx1"/>
+                </a:solidFill>
+                <a:latin typeface="+mn-lt"/>
+                <a:ea typeface="+mn-ea"/>
+                <a:cs typeface="+mn-cs"/>
+              </a:defRPr>
+            </a:lvl7pPr>
+            <a:lvl8pPr marL="3200400" algn="l" defTabSz="914400" rtl="0" eaLnBrk="1" latinLnBrk="0" hangingPunct="1">
+              <a:defRPr kumimoji="1" sz="1800" kern="1200">
+                <a:solidFill>
+                  <a:schemeClr val="tx1"/>
+                </a:solidFill>
+                <a:latin typeface="+mn-lt"/>
+                <a:ea typeface="+mn-ea"/>
+                <a:cs typeface="+mn-cs"/>
+              </a:defRPr>
+            </a:lvl8pPr>
+            <a:lvl9pPr marL="3657600" algn="l" defTabSz="914400" rtl="0" eaLnBrk="1" latinLnBrk="0" hangingPunct="1">
+              <a:defRPr kumimoji="1" sz="1800" kern="1200">
+                <a:solidFill>
+                  <a:schemeClr val="tx1"/>
+                </a:solidFill>
+                <a:latin typeface="+mn-lt"/>
+                <a:ea typeface="+mn-ea"/>
+                <a:cs typeface="+mn-cs"/>
+              </a:defRPr>
+            </a:lvl9pPr>
+          </a:lstStyle>
+          <a:p>
+            <a:pPr algn="ctr"/>
+            <a:r>
+              <a:rPr lang="ja-JP" altLang="en-US" sz="2000">
+                <a:latin typeface="+mn-ea"/>
+              </a:rPr>
+              <a:t>誤差</a:t>
+            </a:r>
+            <a:endParaRPr lang="en-US" altLang="ja-JP" sz="2000">
+              <a:latin typeface="+mn-ea"/>
+            </a:endParaRPr>
+          </a:p>
+        </p:txBody>
+      </p:sp>
+      <p:sp>
+        <p:nvSpPr>
+          <p:cNvPr id="32" name="TextBox 12">
+            <a:extLst>
+              <a:ext uri="{FF2B5EF4-FFF2-40B4-BE49-F238E27FC236}">
+                <a16:creationId xmlns:a16="http://schemas.microsoft.com/office/drawing/2014/main" id="{CBB7B6BE-DE11-D659-70AF-0674BB10FECA}"/>
+              </a:ext>
+            </a:extLst>
+          </p:cNvPr>
+          <p:cNvSpPr txBox="1"/>
+          <p:nvPr/>
+        </p:nvSpPr>
+        <p:spPr>
+          <a:xfrm>
+            <a:off x="4349310" y="2561878"/>
+            <a:ext cx="4011510" cy="400110"/>
+          </a:xfrm>
+          <a:prstGeom prst="rect">
+            <a:avLst/>
+          </a:prstGeom>
+          <a:noFill/>
+          <a:ln>
+            <a:noFill/>
+          </a:ln>
+        </p:spPr>
+        <p:txBody>
+          <a:bodyPr rot="0" spcFirstLastPara="0" vert="horz" wrap="square" lIns="91440" tIns="45720" rIns="91440" bIns="45720" numCol="1" spcCol="0" rtlCol="0" fromWordArt="0" anchor="t" anchorCtr="0" forceAA="0" compatLnSpc="1">
+            <a:prstTxWarp prst="textNoShape">
+              <a:avLst/>
+            </a:prstTxWarp>
+            <a:spAutoFit/>
+          </a:bodyPr>
+          <a:lstStyle>
+            <a:defPPr>
+              <a:defRPr lang="ja-JP"/>
+            </a:defPPr>
+            <a:lvl1pPr marL="0" algn="l" defTabSz="914400" rtl="0" eaLnBrk="1" latinLnBrk="0" hangingPunct="1">
+              <a:defRPr kumimoji="1" sz="1800" kern="1200">
+                <a:solidFill>
+                  <a:schemeClr val="tx1"/>
+                </a:solidFill>
+                <a:latin typeface="+mn-lt"/>
+                <a:ea typeface="+mn-ea"/>
+                <a:cs typeface="+mn-cs"/>
+              </a:defRPr>
+            </a:lvl1pPr>
+            <a:lvl2pPr marL="457200" algn="l" defTabSz="914400" rtl="0" eaLnBrk="1" latinLnBrk="0" hangingPunct="1">
+              <a:defRPr kumimoji="1" sz="1800" kern="1200">
+                <a:solidFill>
+                  <a:schemeClr val="tx1"/>
+                </a:solidFill>
+                <a:latin typeface="+mn-lt"/>
+                <a:ea typeface="+mn-ea"/>
+                <a:cs typeface="+mn-cs"/>
+              </a:defRPr>
+            </a:lvl2pPr>
+            <a:lvl3pPr marL="914400" algn="l" defTabSz="914400" rtl="0" eaLnBrk="1" latinLnBrk="0" hangingPunct="1">
+              <a:defRPr kumimoji="1" sz="1800" kern="1200">
+                <a:solidFill>
+                  <a:schemeClr val="tx1"/>
+                </a:solidFill>
+                <a:latin typeface="+mn-lt"/>
+                <a:ea typeface="+mn-ea"/>
+                <a:cs typeface="+mn-cs"/>
+              </a:defRPr>
+            </a:lvl3pPr>
+            <a:lvl4pPr marL="1371600" algn="l" defTabSz="914400" rtl="0" eaLnBrk="1" latinLnBrk="0" hangingPunct="1">
+              <a:defRPr kumimoji="1" sz="1800" kern="1200">
+                <a:solidFill>
+                  <a:schemeClr val="tx1"/>
+                </a:solidFill>
+                <a:latin typeface="+mn-lt"/>
+                <a:ea typeface="+mn-ea"/>
+                <a:cs typeface="+mn-cs"/>
+              </a:defRPr>
+            </a:lvl4pPr>
+            <a:lvl5pPr marL="1828800" algn="l" defTabSz="914400" rtl="0" eaLnBrk="1" latinLnBrk="0" hangingPunct="1">
+              <a:defRPr kumimoji="1" sz="1800" kern="1200">
+                <a:solidFill>
+                  <a:schemeClr val="tx1"/>
+                </a:solidFill>
+                <a:latin typeface="+mn-lt"/>
+                <a:ea typeface="+mn-ea"/>
+                <a:cs typeface="+mn-cs"/>
+              </a:defRPr>
+            </a:lvl5pPr>
+            <a:lvl6pPr marL="2286000" algn="l" defTabSz="914400" rtl="0" eaLnBrk="1" latinLnBrk="0" hangingPunct="1">
+              <a:defRPr kumimoji="1" sz="1800" kern="1200">
+                <a:solidFill>
+                  <a:schemeClr val="tx1"/>
+                </a:solidFill>
+                <a:latin typeface="+mn-lt"/>
+                <a:ea typeface="+mn-ea"/>
+                <a:cs typeface="+mn-cs"/>
+              </a:defRPr>
+            </a:lvl6pPr>
+            <a:lvl7pPr marL="2743200" algn="l" defTabSz="914400" rtl="0" eaLnBrk="1" latinLnBrk="0" hangingPunct="1">
+              <a:defRPr kumimoji="1" sz="1800" kern="1200">
+                <a:solidFill>
+                  <a:schemeClr val="tx1"/>
+                </a:solidFill>
+                <a:latin typeface="+mn-lt"/>
+                <a:ea typeface="+mn-ea"/>
+                <a:cs typeface="+mn-cs"/>
+              </a:defRPr>
+            </a:lvl7pPr>
+            <a:lvl8pPr marL="3200400" algn="l" defTabSz="914400" rtl="0" eaLnBrk="1" latinLnBrk="0" hangingPunct="1">
+              <a:defRPr kumimoji="1" sz="1800" kern="1200">
+                <a:solidFill>
+                  <a:schemeClr val="tx1"/>
+                </a:solidFill>
+                <a:latin typeface="+mn-lt"/>
+                <a:ea typeface="+mn-ea"/>
+                <a:cs typeface="+mn-cs"/>
+              </a:defRPr>
+            </a:lvl8pPr>
+            <a:lvl9pPr marL="3657600" algn="l" defTabSz="914400" rtl="0" eaLnBrk="1" latinLnBrk="0" hangingPunct="1">
+              <a:defRPr kumimoji="1" sz="1800" kern="1200">
+                <a:solidFill>
+                  <a:schemeClr val="tx1"/>
+                </a:solidFill>
+                <a:latin typeface="+mn-lt"/>
+                <a:ea typeface="+mn-ea"/>
+                <a:cs typeface="+mn-cs"/>
+              </a:defRPr>
+            </a:lvl9pPr>
+          </a:lstStyle>
+          <a:p>
+            <a:pPr algn="ctr"/>
+            <a:r>
+              <a:rPr lang="en-US" altLang="ja-JP" sz="2000">
+                <a:latin typeface="+mn-ea"/>
+              </a:rPr>
+              <a:t>←Arduino</a:t>
+            </a:r>
+            <a:r>
+              <a:rPr lang="ja-JP" altLang="en-US" sz="2000">
+                <a:latin typeface="+mn-ea"/>
+              </a:rPr>
+              <a:t>からテンポ受信</a:t>
+            </a:r>
+            <a:r>
+              <a:rPr lang="en-US" altLang="ja-JP" sz="2000">
+                <a:latin typeface="+mn-ea"/>
+              </a:rPr>
+              <a:t>(BPM=66)</a:t>
+            </a:r>
+          </a:p>
+        </p:txBody>
+      </p:sp>
+    </p:spTree>
+    <p:extLst>
+      <p:ext uri="{BB962C8B-B14F-4D97-AF65-F5344CB8AC3E}">
+        <p14:creationId xmlns:p14="http://schemas.microsoft.com/office/powerpoint/2010/main" val="1579836724"/>
+      </p:ext>
+    </p:extLst>
   </p:cSld>
   <p:clrMapOvr>
     <a:masterClrMapping/>
